--- a/manaberu/slides/manaberu-07-claude-code-intro.pptx
+++ b/manaberu/slides/manaberu-07-claude-code-intro.pptx
@@ -116,13 +116,13 @@
   <p:extLst>
     <p:ext uri="{521415D9-36F7-43E2-AB2F-B90AF26B5E84}">
       <p14:sectionLst xmlns:p14="http://schemas.microsoft.com/office/powerpoint/2010/main">
-        <p14:section name="導入" id="{ed803743-8728-c716-6e34-f9d0bb733034}">
+        <p14:section name="導入" id="{4d0c13c6-1b13-4f2f-366c-14561d4df756}">
           <p14:sldIdLst>
             <p14:sldId id="256"/>
             <p14:sldId id="257"/>
           </p14:sldIdLst>
         </p14:section>
-        <p14:section name="本編" id="{c6c81b10-cff2-33c8-d63a-17331f83a9da}">
+        <p14:section name="本編" id="{d7caba07-dd3f-5bb7-ee10-620cef3f366f}">
           <p14:sldIdLst>
             <p14:sldId id="258"/>
             <p14:sldId id="259"/>
@@ -132,7 +132,7 @@
             <p14:sldId id="263"/>
           </p14:sldIdLst>
         </p14:section>
-        <p14:section name="まとめ" id="{71886a49-6240-c1e1-4141-d33c810b139e}">
+        <p14:section name="まとめ" id="{1df2fda3-8d03-787a-11a5-4b53ace3819c}">
           <p14:sldIdLst>
             <p14:sldId id="264"/>
             <p14:sldId id="265"/>
@@ -1408,12 +1408,19 @@
 
 <file path=ppt/slideLayouts/slideLayout2.xml><?xml version="1.0" encoding="utf-8"?>
 <p:sldLayout xmlns:a="http://schemas.openxmlformats.org/drawingml/2006/main" xmlns:r="http://schemas.openxmlformats.org/officeDocument/2006/relationships" xmlns:p="http://schemas.openxmlformats.org/presentationml/2006/main" preserve="1">
-  <p:cSld name="MANA_TITLE">
+  <p:cSld name="MANA_COVER">
     <p:bg>
       <p:bgPr>
-        <a:solidFill>
-          <a:srgbClr val="FFD600"/>
-        </a:solidFill>
+        <a:blipFill dpi="0" rotWithShape="1">
+          <a:blip r:embed="rId1">
+            <a:lum/>
+          </a:blip>
+          <a:srcRect/>
+          <a:stretch>
+            <a:fillRect/>
+          </a:stretch>
+        </a:blipFill>
+        <a:effectLst/>
       </p:bgPr>
     </p:bg>
     <p:spTree>
@@ -1430,156 +1437,6 @@
           <a:chExt cx="0" cy="0"/>
         </a:xfrm>
       </p:grpSpPr>
-      <p:sp>
-        <p:nvSpPr>
-          <p:cNvPr id="2" name="Text 0"/>
-          <p:cNvSpPr/>
-          <p:nvPr>
-            <p:ph idx="100" type="title" hasCustomPrompt="1"/>
-          </p:nvPr>
-        </p:nvSpPr>
-        <p:spPr>
-          <a:xfrm>
-            <a:off x="548640" y="1691640"/>
-            <a:ext cx="5852160" cy="1371600"/>
-          </a:xfrm>
-          <a:prstGeom prst="rect">
-            <a:avLst/>
-          </a:prstGeom>
-          <a:noFill/>
-          <a:ln/>
-        </p:spPr>
-        <p:txBody>
-          <a:bodyPr wrap="square" rtlCol="0"/>
-          <a:lstStyle>
-            <a:lvl1pPr algn="l" indent="0" marL="0">
-              <a:buNone/>
-              <a:defRPr lang="en-US" sz="3200" b="1" dirty="0">
-                <a:solidFill>
-                  <a:schemeClr val="tx1"/>
-                </a:solidFill>
-              </a:defRPr>
-            </a:lvl1pPr>
-          </a:lstStyle>
-          <a:p>
-            <a:pPr algn="l" indent="0" marL="0">
-              <a:buNone/>
-            </a:pPr>
-            <a:endParaRPr lang="en-US" sz="3200" dirty="0"/>
-          </a:p>
-        </p:txBody>
-      </p:sp>
-      <p:sp>
-        <p:nvSpPr>
-          <p:cNvPr id="3" name="Text 0"/>
-          <p:cNvSpPr/>
-          <p:nvPr>
-            <p:ph idx="101" type="body" hasCustomPrompt="1"/>
-          </p:nvPr>
-        </p:nvSpPr>
-        <p:spPr>
-          <a:xfrm>
-            <a:off x="548640" y="3246120"/>
-            <a:ext cx="5852160" cy="457200"/>
-          </a:xfrm>
-          <a:prstGeom prst="rect">
-            <a:avLst/>
-          </a:prstGeom>
-          <a:noFill/>
-          <a:ln/>
-        </p:spPr>
-        <p:txBody>
-          <a:bodyPr wrap="square" rtlCol="0"/>
-          <a:lstStyle>
-            <a:lvl1pPr indent="0" marL="0">
-              <a:buNone/>
-              <a:defRPr lang="en-US" sz="1400" dirty="0">
-                <a:solidFill>
-                  <a:schemeClr val="tx1"/>
-                </a:solidFill>
-              </a:defRPr>
-            </a:lvl1pPr>
-          </a:lstStyle>
-          <a:p>
-            <a:pPr indent="0" marL="0">
-              <a:buNone/>
-            </a:pPr>
-            <a:endParaRPr lang="en-US" sz="1400" dirty="0"/>
-          </a:p>
-        </p:txBody>
-      </p:sp>
-      <p:sp>
-        <p:nvSpPr>
-          <p:cNvPr id="4" name="Text 0"/>
-          <p:cNvSpPr/>
-          <p:nvPr/>
-        </p:nvSpPr>
-        <p:spPr>
-          <a:xfrm>
-            <a:off x="548640" y="4526280"/>
-            <a:ext cx="5486400" cy="274320"/>
-          </a:xfrm>
-          <a:prstGeom prst="rect">
-            <a:avLst/>
-          </a:prstGeom>
-          <a:noFill/>
-          <a:ln/>
-        </p:spPr>
-        <p:txBody>
-          <a:bodyPr wrap="square" lIns="0" tIns="0" rIns="0" bIns="0" rtlCol="0" anchor="ctr"/>
-          <a:lstStyle/>
-          <a:p>
-            <a:pPr indent="0" marL="0">
-              <a:buNone/>
-            </a:pPr>
-            <a:r>
-              <a:rPr lang="en-US" sz="1000" dirty="0">
-                <a:solidFill>
-                  <a:schemeClr val="tx1"/>
-                </a:solidFill>
-              </a:rPr>
-              <a:t>マナベル｜AI×Lark 構築者育成講座</a:t>
-            </a:r>
-            <a:endParaRPr lang="en-US" sz="1000" dirty="0"/>
-          </a:p>
-        </p:txBody>
-      </p:sp>
-      <p:sp>
-        <p:nvSpPr>
-          <p:cNvPr id="5" name="Text 1"/>
-          <p:cNvSpPr/>
-          <p:nvPr/>
-        </p:nvSpPr>
-        <p:spPr>
-          <a:xfrm>
-            <a:off x="6766560" y="4526280"/>
-            <a:ext cx="1828800" cy="274320"/>
-          </a:xfrm>
-          <a:prstGeom prst="rect">
-            <a:avLst/>
-          </a:prstGeom>
-          <a:noFill/>
-          <a:ln/>
-        </p:spPr>
-        <p:txBody>
-          <a:bodyPr wrap="square" lIns="0" tIns="0" rIns="0" bIns="0" rtlCol="0" anchor="ctr"/>
-          <a:lstStyle/>
-          <a:p>
-            <a:pPr algn="r" indent="0" marL="0">
-              <a:buNone/>
-            </a:pPr>
-            <a:r>
-              <a:rPr lang="en-US" sz="1000" b="1" dirty="0">
-                <a:solidFill>
-                  <a:schemeClr val="tx1"/>
-                </a:solidFill>
-              </a:rPr>
-              <a:t>ささエール</a:t>
-            </a:r>
-            <a:endParaRPr lang="en-US" sz="1000" dirty="0"/>
-          </a:p>
-        </p:txBody>
-      </p:sp>
     </p:spTree>
   </p:cSld>
   <p:clrMapOvr>
@@ -1593,9 +1450,16 @@
   <p:cSld name="MANA_CONTENT">
     <p:bg>
       <p:bgPr>
-        <a:solidFill>
-          <a:srgbClr val="FFFFFF"/>
-        </a:solidFill>
+        <a:blipFill dpi="0" rotWithShape="1">
+          <a:blip r:embed="rId1">
+            <a:lum/>
+          </a:blip>
+          <a:srcRect/>
+          <a:stretch>
+            <a:fillRect/>
+          </a:stretch>
+        </a:blipFill>
+        <a:effectLst/>
       </p:bgPr>
     </p:bg>
     <p:spTree>
@@ -1614,16 +1478,36 @@
       </p:grpSpPr>
       <p:sp>
         <p:nvSpPr>
-          <p:cNvPr id="2" name="Text 0"/>
+          <p:cNvPr id="2" name="Shape 0"/>
           <p:cNvSpPr/>
-          <p:nvPr>
-            <p:ph idx="100" type="title" hasCustomPrompt="1"/>
-          </p:nvPr>
-        </p:nvSpPr>
-        <p:spPr>
-          <a:xfrm>
-            <a:off x="548640" y="658368"/>
-            <a:ext cx="8046720" cy="566928"/>
+          <p:nvPr/>
+        </p:nvSpPr>
+        <p:spPr>
+          <a:xfrm>
+            <a:off x="6400800" y="4754880"/>
+            <a:ext cx="2423160" cy="274320"/>
+          </a:xfrm>
+          <a:prstGeom prst="rect">
+            <a:avLst>
+              <a:gd name="adj" fmla="val 50000"/>
+            </a:avLst>
+          </a:prstGeom>
+          <a:solidFill>
+            <a:srgbClr val="1A1A1A"/>
+          </a:solidFill>
+          <a:ln/>
+        </p:spPr>
+      </p:sp>
+      <p:sp>
+        <p:nvSpPr>
+          <p:cNvPr id="3" name="Text 1"/>
+          <p:cNvSpPr/>
+          <p:nvPr/>
+        </p:nvSpPr>
+        <p:spPr>
+          <a:xfrm>
+            <a:off x="6510528" y="4754880"/>
+            <a:ext cx="1828800" cy="274320"/>
           </a:xfrm>
           <a:prstGeom prst="rect">
             <a:avLst/>
@@ -1632,35 +1516,37 @@
           <a:ln/>
         </p:spPr>
         <p:txBody>
-          <a:bodyPr wrap="square" rtlCol="0"/>
-          <a:lstStyle>
-            <a:lvl1pPr algn="l" indent="0" marL="0">
-              <a:buNone/>
-              <a:defRPr lang="en-US" sz="2400" b="1" dirty="0">
-                <a:solidFill>
-                  <a:schemeClr val="tx1"/>
-                </a:solidFill>
-              </a:defRPr>
-            </a:lvl1pPr>
-          </a:lstStyle>
-          <a:p>
-            <a:pPr algn="l" indent="0" marL="0">
-              <a:buNone/>
-            </a:pPr>
-            <a:endParaRPr lang="en-US" sz="2400" dirty="0"/>
-          </a:p>
-        </p:txBody>
-      </p:sp>
-      <p:sp>
-        <p:nvSpPr>
-          <p:cNvPr id="3" name="Text 0"/>
+          <a:bodyPr wrap="square" lIns="0" tIns="0" rIns="0" bIns="0" rtlCol="0" anchor="ctr"/>
+          <a:lstStyle/>
+          <a:p>
+            <a:pPr indent="0" marL="0">
+              <a:buNone/>
+            </a:pPr>
+            <a:r>
+              <a:rPr lang="ja-JP" altLang="en-US" sz="850" b="1" dirty="0">
+                <a:solidFill>
+                  <a:srgbClr val="FFFFFF"/>
+                </a:solidFill>
+                <a:latin typeface="Noto Sans JP" pitchFamily="34" charset="0"/>
+                <a:ea typeface="Noto Sans JP" pitchFamily="34" charset="-122"/>
+                <a:cs typeface="Noto Sans JP" pitchFamily="34" charset="-120"/>
+              </a:rPr>
+              <a:t>ささエール｜OFFICE PLATA</a:t>
+            </a:r>
+            <a:endParaRPr lang="ja-JP" sz="850" dirty="0"/>
+          </a:p>
+        </p:txBody>
+      </p:sp>
+      <p:sp>
+        <p:nvSpPr>
+          <p:cNvPr id="4" name="Text 2"/>
           <p:cNvSpPr/>
           <p:nvPr/>
         </p:nvSpPr>
         <p:spPr>
           <a:xfrm>
-            <a:off x="548640" y="4773168"/>
-            <a:ext cx="6400800" cy="228600"/>
+            <a:off x="365760" y="4754880"/>
+            <a:ext cx="5852160" cy="274320"/>
           </a:xfrm>
           <a:prstGeom prst="rect">
             <a:avLst/>
@@ -1676,14 +1562,17 @@
               <a:buNone/>
             </a:pPr>
             <a:r>
-              <a:rPr lang="en-US" sz="900" dirty="0">
-                <a:solidFill>
-                  <a:schemeClr val="tx2"/>
-                </a:solidFill>
+              <a:rPr lang="ja-JP" altLang="en-US" sz="850" dirty="0">
+                <a:solidFill>
+                  <a:srgbClr val="1A1A1A"/>
+                </a:solidFill>
+                <a:latin typeface="Noto Sans JP Medium" pitchFamily="34" charset="0"/>
+                <a:ea typeface="Noto Sans JP Medium" pitchFamily="34" charset="-122"/>
+                <a:cs typeface="Noto Sans JP Medium" pitchFamily="34" charset="-120"/>
               </a:rPr>
               <a:t>マナベル　第7回　Claude Code入門</a:t>
             </a:r>
-            <a:endParaRPr lang="en-US" sz="900" dirty="0"/>
+            <a:endParaRPr lang="ja-JP" sz="850" dirty="0"/>
           </a:p>
         </p:txBody>
       </p:sp>
@@ -1699,8 +1588,8 @@
         </p:nvSpPr>
         <p:spPr>
           <a:xfrm>
-            <a:off x="8229600" y="4773168"/>
-            <a:ext cx="365760" cy="228600"/>
+            <a:off x="8366760" y="4754880"/>
+            <a:ext cx="365760" cy="274320"/>
           </a:xfrm>
           <a:prstGeom prst="rect">
             <a:avLst/>
@@ -1712,169 +1601,26 @@
           </a:extLst>
         </p:spPr>
         <p:txBody>
-          <a:bodyPr/>
+          <a:bodyPr anchor="ctr"/>
           <a:lstStyle>
             <a:lvl1pPr>
-              <a:defRPr sz="900">
-                <a:solidFill>
-                  <a:srgbClr val="5A6872"/>
-                </a:solidFill>
+              <a:defRPr sz="850">
+                <a:solidFill>
+                  <a:srgbClr val="FFFFFF"/>
+                </a:solidFill>
+                <a:latin typeface="Noto Sans JP"/>
+                <a:ea typeface="Noto Sans JP"/>
+                <a:cs typeface="Noto Sans JP"/>
               </a:defRPr>
             </a:lvl1pPr>
           </a:lstStyle>
           <a:p>
             <a:pPr algn="r"/>
             <a:fld id="{F7021451-1387-4CA6-816F-3879F97B5CBC}" type="slidenum">
-              <a:rPr b="0" lang="en-US"/>
+              <a:rPr b="1" lang="en-US"/>
               <a:t>1003</a:t>
             </a:fld>
             <a:endParaRPr lang="en-US"/>
-          </a:p>
-        </p:txBody>
-      </p:sp>
-    </p:spTree>
-  </p:cSld>
-  <p:clrMapOvr>
-    <a:masterClrMapping/>
-  </p:clrMapOvr>
-</p:sldLayout>
-</file>
-
-<file path=ppt/slideLayouts/slideLayout4.xml><?xml version="1.0" encoding="utf-8"?>
-<p:sldLayout xmlns:a="http://schemas.openxmlformats.org/drawingml/2006/main" xmlns:r="http://schemas.openxmlformats.org/officeDocument/2006/relationships" xmlns:p="http://schemas.openxmlformats.org/presentationml/2006/main" preserve="1">
-  <p:cSld name="MANA_DARK">
-    <p:bg>
-      <p:bgPr>
-        <a:solidFill>
-          <a:srgbClr val="1A1A1A"/>
-        </a:solidFill>
-      </p:bgPr>
-    </p:bg>
-    <p:spTree>
-      <p:nvGrpSpPr>
-        <p:cNvPr id="1" name=""/>
-        <p:cNvGrpSpPr/>
-        <p:nvPr/>
-      </p:nvGrpSpPr>
-      <p:grpSpPr>
-        <a:xfrm>
-          <a:off x="0" y="0"/>
-          <a:ext cx="0" cy="0"/>
-          <a:chOff x="0" y="0"/>
-          <a:chExt cx="0" cy="0"/>
-        </a:xfrm>
-      </p:grpSpPr>
-      <p:sp>
-        <p:nvSpPr>
-          <p:cNvPr id="2" name="Text 0"/>
-          <p:cNvSpPr/>
-          <p:nvPr>
-            <p:ph idx="100" type="title" hasCustomPrompt="1"/>
-          </p:nvPr>
-        </p:nvSpPr>
-        <p:spPr>
-          <a:xfrm>
-            <a:off x="548640" y="1463040"/>
-            <a:ext cx="8046720" cy="1005840"/>
-          </a:xfrm>
-          <a:prstGeom prst="rect">
-            <a:avLst/>
-          </a:prstGeom>
-          <a:noFill/>
-          <a:ln/>
-        </p:spPr>
-        <p:txBody>
-          <a:bodyPr wrap="square" rtlCol="0"/>
-          <a:lstStyle>
-            <a:lvl1pPr algn="l" indent="0" marL="0">
-              <a:buNone/>
-              <a:defRPr lang="en-US" sz="3000" b="1" dirty="0">
-                <a:solidFill>
-                  <a:schemeClr val="accent1"/>
-                </a:solidFill>
-              </a:defRPr>
-            </a:lvl1pPr>
-          </a:lstStyle>
-          <a:p>
-            <a:pPr algn="l" indent="0" marL="0">
-              <a:buNone/>
-            </a:pPr>
-            <a:endParaRPr lang="en-US" sz="3000" dirty="0"/>
-          </a:p>
-        </p:txBody>
-      </p:sp>
-      <p:sp>
-        <p:nvSpPr>
-          <p:cNvPr id="3" name="Text 0"/>
-          <p:cNvSpPr/>
-          <p:nvPr>
-            <p:ph idx="101" type="body" hasCustomPrompt="1"/>
-          </p:nvPr>
-        </p:nvSpPr>
-        <p:spPr>
-          <a:xfrm>
-            <a:off x="548640" y="2606040"/>
-            <a:ext cx="8046720" cy="1097280"/>
-          </a:xfrm>
-          <a:prstGeom prst="rect">
-            <a:avLst/>
-          </a:prstGeom>
-          <a:noFill/>
-          <a:ln/>
-        </p:spPr>
-        <p:txBody>
-          <a:bodyPr wrap="square" rtlCol="0"/>
-          <a:lstStyle>
-            <a:lvl1pPr indent="0" marL="0">
-              <a:buNone/>
-              <a:defRPr lang="en-US" sz="1500" dirty="0">
-                <a:solidFill>
-                  <a:schemeClr val="bg1"/>
-                </a:solidFill>
-              </a:defRPr>
-            </a:lvl1pPr>
-          </a:lstStyle>
-          <a:p>
-            <a:pPr indent="0" marL="0">
-              <a:buNone/>
-            </a:pPr>
-            <a:endParaRPr lang="en-US" sz="1500" dirty="0"/>
-          </a:p>
-        </p:txBody>
-      </p:sp>
-      <p:sp>
-        <p:nvSpPr>
-          <p:cNvPr id="4" name="Text 0"/>
-          <p:cNvSpPr/>
-          <p:nvPr/>
-        </p:nvSpPr>
-        <p:spPr>
-          <a:xfrm>
-            <a:off x="548640" y="4526280"/>
-            <a:ext cx="5486400" cy="274320"/>
-          </a:xfrm>
-          <a:prstGeom prst="rect">
-            <a:avLst/>
-          </a:prstGeom>
-          <a:noFill/>
-          <a:ln/>
-        </p:spPr>
-        <p:txBody>
-          <a:bodyPr wrap="square" lIns="0" tIns="0" rIns="0" bIns="0" rtlCol="0" anchor="ctr"/>
-          <a:lstStyle/>
-          <a:p>
-            <a:pPr indent="0" marL="0">
-              <a:buNone/>
-            </a:pPr>
-            <a:r>
-              <a:rPr lang="en-US" sz="1000" dirty="0">
-                <a:solidFill>
-                  <a:schemeClr val="bg1"/>
-                </a:solidFill>
-              </a:rPr>
-              <a:t>マナベル｜AI×Lark 構築者育成講座</a:t>
-            </a:r>
-            <a:endParaRPr lang="en-US" sz="1000" dirty="0"/>
           </a:p>
         </p:txBody>
       </p:sp>
@@ -1915,8 +1661,8 @@
         </p:nvSpPr>
         <p:spPr>
           <a:xfrm>
-            <a:off x="8229600" y="4773168"/>
-            <a:ext cx="365760" cy="228600"/>
+            <a:off x="8366760" y="4754880"/>
+            <a:ext cx="365760" cy="274320"/>
           </a:xfrm>
           <a:prstGeom prst="rect">
             <a:avLst/>
@@ -1928,20 +1674,23 @@
           </a:extLst>
         </p:spPr>
         <p:txBody>
-          <a:bodyPr/>
+          <a:bodyPr anchor="ctr"/>
           <a:lstStyle>
             <a:lvl1pPr>
-              <a:defRPr sz="900">
-                <a:solidFill>
-                  <a:srgbClr val="5A6872"/>
-                </a:solidFill>
+              <a:defRPr sz="850">
+                <a:solidFill>
+                  <a:srgbClr val="FFFFFF"/>
+                </a:solidFill>
+                <a:latin typeface="Noto Sans JP"/>
+                <a:ea typeface="Noto Sans JP"/>
+                <a:cs typeface="Noto Sans JP"/>
               </a:defRPr>
             </a:lvl1pPr>
           </a:lstStyle>
           <a:p>
             <a:pPr algn="r"/>
             <a:fld id="{F7021451-1387-4CA6-816F-3879F97B5CBC}" type="slidenum">
-              <a:rPr b="0" lang="en-US"/>
+              <a:rPr b="1" lang="en-US"/>
               <a:t>null</a:t>
             </a:fld>
             <a:endParaRPr lang="en-US"/>
@@ -1955,7 +1704,6 @@
     <p:sldLayoutId id="2147483649" r:id="rId1"/>
     <p:sldLayoutId id="2147483650" r:id="rId2"/>
     <p:sldLayoutId id="2147483651" r:id="rId3"/>
-    <p:sldLayoutId id="2147483652" r:id="rId4"/>
   </p:sldLayoutIdLst>
   <p:hf sldNum="0" hdr="0" ftr="0" dt="0"/>
   <p:txStyles>
@@ -2228,50 +1976,92 @@
           <a:chExt cx="0" cy="0"/>
         </a:xfrm>
       </p:grpSpPr>
-      <p:sp>
-        <p:nvSpPr>
-          <p:cNvPr id="2" name="lesson-badge"/>
-          <p:cNvSpPr/>
-          <p:nvPr/>
-        </p:nvSpPr>
-        <p:spPr>
-          <a:xfrm>
-            <a:off x="548640" y="822960"/>
-            <a:ext cx="1828800" cy="566928"/>
-          </a:xfrm>
-          <a:prstGeom prst="roundRect">
-            <a:avLst>
-              <a:gd name="adj" fmla="val 50000"/>
-            </a:avLst>
+      <p:pic>
+        <p:nvPicPr>
+          <p:cNvPr id="2" name="portrait" descr="講師 笹原彰朗">    </p:cNvPr>
+          <p:cNvPicPr>
+            <a:picLocks noChangeAspect="1"/>
+          </p:cNvPicPr>
+          <p:nvPr/>
+        </p:nvPicPr>
+        <p:blipFill>
+          <a:blip r:embed="rId1"/>
+          <a:stretch>
+            <a:fillRect/>
+          </a:stretch>
+        </p:blipFill>
+        <p:spPr>
+          <a:xfrm>
+            <a:off x="6003588" y="1211580"/>
+            <a:ext cx="2866092" cy="3931920"/>
+          </a:xfrm>
+          <a:prstGeom prst="rect">
+            <a:avLst/>
+          </a:prstGeom>
+        </p:spPr>
+      </p:pic>
+      <p:sp>
+        <p:nvSpPr>
+          <p:cNvPr id="3" name="Text 0"/>
+          <p:cNvSpPr txBox="1"/>
+          <p:nvPr/>
+        </p:nvSpPr>
+        <p:spPr>
+          <a:xfrm rot="-240000">
+            <a:off x="457200" y="411480"/>
+            <a:ext cx="1600200" cy="603504"/>
+          </a:xfrm>
+          <a:prstGeom prst="rect">
+            <a:avLst/>
           </a:prstGeom>
           <a:solidFill>
             <a:srgbClr val="1A1A1A"/>
           </a:solidFill>
-          <a:ln w="12700">
+          <a:ln>
             <a:solidFill>
               <a:srgbClr val="1A1A1A"/>
             </a:solidFill>
-            <a:prstDash val="solid"/>
           </a:ln>
           <a:effectLst>
             <a:outerShdw sx="100000" sy="100000" kx="0" ky="0" algn="bl" rotWithShape="0" blurRad="101600" dist="38100" dir="2700000">
-              <a:srgbClr val="000000">
-                <a:alpha val="18000"/>
+              <a:srgbClr val="1A1A1A">
+                <a:alpha val="100000"/>
               </a:srgbClr>
             </a:outerShdw>
           </a:effectLst>
         </p:spPr>
-      </p:sp>
-      <p:sp>
-        <p:nvSpPr>
-          <p:cNvPr id="3" name="Text 1"/>
+        <p:txBody>
+          <a:bodyPr wrap="square" lIns="0" tIns="0" rIns="0" bIns="0" rtlCol="0" anchor="ctr"/>
+          <a:lstStyle/>
+          <a:p>
+            <a:pPr algn="ctr" indent="0" marL="0">
+              <a:buNone/>
+            </a:pPr>
+            <a:r>
+              <a:rPr lang="ja-JP" altLang="en-US" sz="2200" dirty="0">
+                <a:solidFill>
+                  <a:srgbClr val="FFD600"/>
+                </a:solidFill>
+                <a:latin typeface="Dela Gothic One" pitchFamily="34" charset="0"/>
+                <a:ea typeface="けいふぉんと" pitchFamily="34" charset="-122"/>
+                <a:cs typeface="Dela Gothic One" pitchFamily="34" charset="-120"/>
+              </a:rPr>
+              <a:t>第7回</a:t>
+            </a:r>
+            <a:endParaRPr lang="ja-JP" sz="2200" dirty="0"/>
+          </a:p>
+        </p:txBody>
+      </p:sp>
+      <p:sp>
+        <p:nvSpPr>
+          <p:cNvPr id="4" name="Text 1"/>
           <p:cNvSpPr txBox="1"/>
           <p:nvPr/>
         </p:nvSpPr>
         <p:spPr>
           <a:xfrm>
-            <a:off x="548640" y="822960"/>
-            <a:ext cx="1828800" cy="566928"/>
+            <a:off x="457200" y="1188720"/>
+            <a:ext cx="6035040" cy="1600200"/>
           </a:xfrm>
           <a:prstGeom prst="rect">
             <a:avLst/>
@@ -2280,6 +2070,63 @@
           <a:ln/>
         </p:spPr>
         <p:txBody>
+          <a:bodyPr wrap="square" lIns="0" tIns="0" rIns="0" bIns="0" rtlCol="0" anchor="ctr">
+            <a:normAutofit/>
+          </a:bodyPr>
+          <a:lstStyle/>
+          <a:p>
+            <a:pPr indent="0" marL="0">
+              <a:lnSpc>
+                <a:spcPct val="105000"/>
+              </a:lnSpc>
+              <a:buNone/>
+            </a:pPr>
+            <a:r>
+              <a:rPr lang="ja-JP" altLang="en-US" sz="4000" dirty="0">
+                <a:solidFill>
+                  <a:srgbClr val="1A1A1A"/>
+                </a:solidFill>
+                <a:latin typeface="Dela Gothic One" pitchFamily="34" charset="0"/>
+                <a:ea typeface="けいふぉんと" pitchFamily="34" charset="-122"/>
+                <a:cs typeface="Dela Gothic One" pitchFamily="34" charset="-120"/>
+              </a:rPr>
+              <a:t>Claude Code入門</a:t>
+            </a:r>
+            <a:endParaRPr lang="ja-JP" sz="4000" dirty="0"/>
+          </a:p>
+        </p:txBody>
+      </p:sp>
+      <p:sp>
+        <p:nvSpPr>
+          <p:cNvPr id="5" name="Text 2"/>
+          <p:cNvSpPr txBox="1"/>
+          <p:nvPr/>
+        </p:nvSpPr>
+        <p:spPr>
+          <a:xfrm rot="-120000">
+            <a:off x="457200" y="2971800"/>
+            <a:ext cx="4937760" cy="502920"/>
+          </a:xfrm>
+          <a:prstGeom prst="rect">
+            <a:avLst/>
+          </a:prstGeom>
+          <a:solidFill>
+            <a:srgbClr val="DD6420"/>
+          </a:solidFill>
+          <a:ln w="19050">
+            <a:solidFill>
+              <a:srgbClr val="1A1A1A"/>
+            </a:solidFill>
+          </a:ln>
+          <a:effectLst>
+            <a:outerShdw sx="100000" sy="100000" kx="0" ky="0" algn="bl" rotWithShape="0" blurRad="101600" dist="38100" dir="2700000">
+              <a:srgbClr val="1A1A1A">
+                <a:alpha val="100000"/>
+              </a:srgbClr>
+            </a:outerShdw>
+          </a:effectLst>
+        </p:spPr>
+        <p:txBody>
           <a:bodyPr wrap="square" lIns="0" tIns="0" rIns="0" bIns="0" rtlCol="0" anchor="ctr"/>
           <a:lstStyle/>
           <a:p>
@@ -2287,109 +2134,38 @@
               <a:buNone/>
             </a:pPr>
             <a:r>
-              <a:rPr lang="en-US" sz="2200" b="1" dirty="0">
-                <a:solidFill>
-                  <a:schemeClr val="accent1"/>
-                </a:solidFill>
-              </a:rPr>
-              <a:t>第7回</a:t>
-            </a:r>
-            <a:endParaRPr lang="en-US" sz="2200" dirty="0"/>
-          </a:p>
-        </p:txBody>
-      </p:sp>
-      <p:sp>
-        <p:nvSpPr>
-          <p:cNvPr id="4" name="Text 0"/>
+              <a:rPr lang="ja-JP" altLang="en-US" sz="1600" b="1" dirty="0">
+                <a:solidFill>
+                  <a:srgbClr val="FFFFFF"/>
+                </a:solidFill>
+                <a:latin typeface="Noto Sans JP" pitchFamily="34" charset="0"/>
+                <a:ea typeface="Noto Sans JP" pitchFamily="34" charset="-122"/>
+                <a:cs typeface="Noto Sans JP" pitchFamily="34" charset="-120"/>
+              </a:rPr>
+              <a:t>フェーズ3 AIで作る｜第4週</a:t>
+            </a:r>
+            <a:endParaRPr lang="ja-JP" sz="1600" dirty="0"/>
+          </a:p>
+        </p:txBody>
+      </p:sp>
+      <p:sp>
+        <p:nvSpPr>
+          <p:cNvPr id="6" name="card"/>
           <p:cNvSpPr/>
-          <p:nvPr>
-            <p:ph idx="100" type="title" hasCustomPrompt="1"/>
-          </p:nvPr>
-        </p:nvSpPr>
-        <p:spPr>
-          <a:xfrm>
-            <a:off x="548640" y="1691640"/>
-            <a:ext cx="5852160" cy="1371600"/>
-          </a:xfrm>
-          <a:prstGeom prst="rect">
-            <a:avLst/>
-          </a:prstGeom>
-          <a:noFill/>
-          <a:ln/>
-        </p:spPr>
-        <p:txBody>
-          <a:bodyPr wrap="square" lIns="0" tIns="0" rIns="0" bIns="0" rtlCol="0" anchor="t"/>
-          <a:lstStyle/>
-          <a:p>
-            <a:pPr algn="l" indent="0" marL="0">
-              <a:buNone/>
-            </a:pPr>
-            <a:r>
-              <a:rPr lang="en-US" sz="3200" b="1" dirty="0">
-                <a:solidFill>
-                  <a:schemeClr val="tx1"/>
-                </a:solidFill>
-              </a:rPr>
-              <a:t>Claude Code入門</a:t>
-            </a:r>
-            <a:endParaRPr lang="en-US" sz="3200" dirty="0"/>
-          </a:p>
-        </p:txBody>
-      </p:sp>
-      <p:sp>
-        <p:nvSpPr>
-          <p:cNvPr id="5" name="Text 0"/>
-          <p:cNvSpPr/>
-          <p:nvPr>
-            <p:ph idx="101" type="body" hasCustomPrompt="1"/>
-          </p:nvPr>
-        </p:nvSpPr>
-        <p:spPr>
-          <a:xfrm>
-            <a:off x="548640" y="3246120"/>
-            <a:ext cx="5852160" cy="457200"/>
-          </a:xfrm>
-          <a:prstGeom prst="rect">
-            <a:avLst/>
-          </a:prstGeom>
-          <a:noFill/>
-          <a:ln/>
-        </p:spPr>
-        <p:txBody>
-          <a:bodyPr wrap="square" lIns="0" tIns="0" rIns="0" bIns="0" rtlCol="0"/>
-          <a:lstStyle/>
-          <a:p>
-            <a:pPr indent="0" marL="0">
-              <a:buNone/>
-            </a:pPr>
-            <a:r>
-              <a:rPr lang="en-US" sz="1400" dirty="0">
-                <a:solidFill>
-                  <a:schemeClr val="tx1"/>
-                </a:solidFill>
-              </a:rPr>
-              <a:t>フェーズ3 AIで作る　｜　第4週</a:t>
-            </a:r>
-            <a:endParaRPr lang="en-US" sz="1400" dirty="0"/>
-          </a:p>
-        </p:txBody>
-      </p:sp>
-      <p:sp>
-        <p:nvSpPr>
-          <p:cNvPr id="6" name="title-circle"/>
-          <p:cNvSpPr/>
-          <p:nvPr/>
-        </p:nvSpPr>
-        <p:spPr>
-          <a:xfrm>
-            <a:off x="6537960" y="1188720"/>
-            <a:ext cx="2103120" cy="2103120"/>
-          </a:xfrm>
-          <a:prstGeom prst="ellipse">
-            <a:avLst/>
-          </a:prstGeom>
-          <a:solidFill>
-            <a:schemeClr val="bg1"/>
+          <p:nvPr/>
+        </p:nvSpPr>
+        <p:spPr>
+          <a:xfrm>
+            <a:off x="457200" y="3730752"/>
+            <a:ext cx="4937760" cy="896112"/>
+          </a:xfrm>
+          <a:prstGeom prst="roundRect">
+            <a:avLst>
+              <a:gd name="adj" fmla="val 10204"/>
+            </a:avLst>
+          </a:prstGeom>
+          <a:solidFill>
+            <a:srgbClr val="FFFFFF"/>
           </a:solidFill>
           <a:ln w="25400">
             <a:solidFill>
@@ -2398,38 +2174,76 @@
             <a:prstDash val="solid"/>
           </a:ln>
           <a:effectLst>
-            <a:outerShdw sx="100000" sy="100000" kx="0" ky="0" algn="bl" rotWithShape="0" blurRad="101600" dist="38100" dir="2700000">
-              <a:srgbClr val="000000">
-                <a:alpha val="18000"/>
+            <a:outerShdw sx="100000" sy="100000" kx="0" ky="0" algn="bl" rotWithShape="0" blurRad="101600" dist="50800" dir="2700000">
+              <a:srgbClr val="1A1A1A">
+                <a:alpha val="100000"/>
               </a:srgbClr>
             </a:outerShdw>
           </a:effectLst>
         </p:spPr>
       </p:sp>
-      <p:pic>
-        <p:nvPicPr>
-          <p:cNvPr id="7" name="title-icon" descr="preencoded.png">    </p:cNvPr>
-          <p:cNvPicPr>
-            <a:picLocks noChangeAspect="1"/>
-          </p:cNvPicPr>
-          <p:nvPr/>
-        </p:nvPicPr>
-        <p:blipFill>
-          <a:blip r:embed="rId1"/>
-          <a:stretch>
-            <a:fillRect/>
-          </a:stretch>
-        </p:blipFill>
-        <p:spPr>
-          <a:xfrm>
-            <a:off x="7086600" y="1737360"/>
-            <a:ext cx="1005840" cy="1005840"/>
-          </a:xfrm>
-          <a:prstGeom prst="rect">
-            <a:avLst/>
-          </a:prstGeom>
-        </p:spPr>
-      </p:pic>
+      <p:sp>
+        <p:nvSpPr>
+          <p:cNvPr id="7" name="Text 4"/>
+          <p:cNvSpPr txBox="1"/>
+          <p:nvPr/>
+        </p:nvSpPr>
+        <p:spPr>
+          <a:xfrm>
+            <a:off x="658368" y="3767328"/>
+            <a:ext cx="4572000" cy="822960"/>
+          </a:xfrm>
+          <a:prstGeom prst="rect">
+            <a:avLst/>
+          </a:prstGeom>
+          <a:noFill/>
+          <a:ln/>
+        </p:spPr>
+        <p:txBody>
+          <a:bodyPr wrap="square" lIns="0" tIns="0" rIns="0" bIns="0" rtlCol="0" anchor="ctr"/>
+          <a:lstStyle/>
+          <a:p>
+            <a:pPr indent="0" marL="0">
+              <a:spcAft>
+                <a:spcPts val="200"/>
+              </a:spcAft>
+              <a:buNone/>
+            </a:pPr>
+            <a:r>
+              <a:rPr lang="ja-JP" altLang="en-US" sz="1500" b="1" dirty="0">
+                <a:solidFill>
+                  <a:srgbClr val="1A1A1A"/>
+                </a:solidFill>
+                <a:latin typeface="Noto Sans JP" pitchFamily="34" charset="0"/>
+                <a:ea typeface="Noto Sans JP" pitchFamily="34" charset="-122"/>
+                <a:cs typeface="Noto Sans JP" pitchFamily="34" charset="-120"/>
+              </a:rPr>
+              <a:t>マナベル｜AI×Lark 構築者育成講座</a:t>
+            </a:r>
+            <a:endParaRPr lang="ja-JP" sz="1500" dirty="0"/>
+          </a:p>
+          <a:p>
+            <a:pPr indent="0" marL="0">
+              <a:spcAft>
+                <a:spcPts val="200"/>
+              </a:spcAft>
+              <a:buNone/>
+            </a:pPr>
+            <a:r>
+              <a:rPr lang="ja-JP" altLang="en-US" sz="1150" b="1" dirty="0">
+                <a:solidFill>
+                  <a:srgbClr val="DD6420"/>
+                </a:solidFill>
+                <a:latin typeface="Noto Sans JP" pitchFamily="34" charset="0"/>
+                <a:ea typeface="Noto Sans JP" pitchFamily="34" charset="-122"/>
+                <a:cs typeface="Noto Sans JP" pitchFamily="34" charset="-120"/>
+              </a:rPr>
+              <a:t>ささエール ／ OFFICE PLATA　笹原 彰朗</a:t>
+            </a:r>
+            <a:endParaRPr lang="ja-JP" sz="1500" dirty="0"/>
+          </a:p>
+        </p:txBody>
+      </p:sp>
     </p:spTree>
   </p:cSld>
   <p:clrMapOvr>
@@ -2455,18 +2269,92 @@
           <a:chExt cx="0" cy="0"/>
         </a:xfrm>
       </p:grpSpPr>
-      <p:sp>
-        <p:nvSpPr>
-          <p:cNvPr id="2" name="Text 0"/>
-          <p:cNvSpPr/>
-          <p:nvPr>
-            <p:ph idx="100" type="title" hasCustomPrompt="1"/>
-          </p:nvPr>
-        </p:nvSpPr>
-        <p:spPr>
-          <a:xfrm>
-            <a:off x="548640" y="1463040"/>
-            <a:ext cx="8046720" cy="1005840"/>
+      <p:pic>
+        <p:nvPicPr>
+          <p:cNvPr id="2" name="portrait" descr="講師 笹原彰朗">    </p:cNvPr>
+          <p:cNvPicPr>
+            <a:picLocks noChangeAspect="1"/>
+          </p:cNvPicPr>
+          <p:nvPr/>
+        </p:nvPicPr>
+        <p:blipFill>
+          <a:blip r:embed="rId1"/>
+          <a:stretch>
+            <a:fillRect/>
+          </a:stretch>
+        </p:blipFill>
+        <p:spPr>
+          <a:xfrm>
+            <a:off x="6003588" y="1211580"/>
+            <a:ext cx="2866092" cy="3931920"/>
+          </a:xfrm>
+          <a:prstGeom prst="rect">
+            <a:avLst/>
+          </a:prstGeom>
+        </p:spPr>
+      </p:pic>
+      <p:sp>
+        <p:nvSpPr>
+          <p:cNvPr id="3" name="Text 0"/>
+          <p:cNvSpPr txBox="1"/>
+          <p:nvPr/>
+        </p:nvSpPr>
+        <p:spPr>
+          <a:xfrm rot="-240000">
+            <a:off x="457200" y="548640"/>
+            <a:ext cx="1280160" cy="548640"/>
+          </a:xfrm>
+          <a:prstGeom prst="rect">
+            <a:avLst/>
+          </a:prstGeom>
+          <a:solidFill>
+            <a:srgbClr val="1A1A1A"/>
+          </a:solidFill>
+          <a:ln>
+            <a:solidFill>
+              <a:srgbClr val="1A1A1A"/>
+            </a:solidFill>
+          </a:ln>
+          <a:effectLst>
+            <a:outerShdw sx="100000" sy="100000" kx="0" ky="0" algn="bl" rotWithShape="0" blurRad="101600" dist="38100" dir="2700000">
+              <a:srgbClr val="1A1A1A">
+                <a:alpha val="100000"/>
+              </a:srgbClr>
+            </a:outerShdw>
+          </a:effectLst>
+        </p:spPr>
+        <p:txBody>
+          <a:bodyPr wrap="square" lIns="0" tIns="0" rIns="0" bIns="0" rtlCol="0" anchor="ctr"/>
+          <a:lstStyle/>
+          <a:p>
+            <a:pPr algn="ctr" indent="0" marL="0">
+              <a:buNone/>
+            </a:pPr>
+            <a:r>
+              <a:rPr lang="ja-JP" altLang="en-US" sz="2000" dirty="0">
+                <a:solidFill>
+                  <a:srgbClr val="FFD600"/>
+                </a:solidFill>
+                <a:latin typeface="Dela Gothic One" pitchFamily="34" charset="0"/>
+                <a:ea typeface="けいふぉんと" pitchFamily="34" charset="-122"/>
+                <a:cs typeface="Dela Gothic One" pitchFamily="34" charset="-120"/>
+              </a:rPr>
+              <a:t>次回</a:t>
+            </a:r>
+            <a:endParaRPr lang="ja-JP" sz="2000" dirty="0"/>
+          </a:p>
+        </p:txBody>
+      </p:sp>
+      <p:sp>
+        <p:nvSpPr>
+          <p:cNvPr id="4" name="Text 1"/>
+          <p:cNvSpPr txBox="1"/>
+          <p:nvPr/>
+        </p:nvSpPr>
+        <p:spPr>
+          <a:xfrm>
+            <a:off x="457200" y="1280160"/>
+            <a:ext cx="5852160" cy="1554480"/>
           </a:xfrm>
           <a:prstGeom prst="rect">
             <a:avLst/>
@@ -2475,36 +2363,90 @@
           <a:ln/>
         </p:spPr>
         <p:txBody>
-          <a:bodyPr wrap="square" lIns="0" tIns="0" rIns="0" bIns="0" rtlCol="0" anchor="t"/>
-          <a:lstStyle/>
-          <a:p>
-            <a:pPr algn="l" indent="0" marL="0">
-              <a:buNone/>
-            </a:pPr>
-            <a:r>
-              <a:rPr lang="en-US" sz="3000" b="1" dirty="0">
-                <a:solidFill>
-                  <a:schemeClr val="accent1"/>
-                </a:solidFill>
-              </a:rPr>
-              <a:t>次回：第8回 Webに公開する</a:t>
-            </a:r>
-            <a:endParaRPr lang="en-US" sz="3000" dirty="0"/>
-          </a:p>
-        </p:txBody>
-      </p:sp>
-      <p:sp>
-        <p:nvSpPr>
-          <p:cNvPr id="3" name="Text 0"/>
+          <a:bodyPr wrap="square" lIns="0" tIns="0" rIns="0" bIns="0" rtlCol="0" anchor="ctr">
+            <a:normAutofit/>
+          </a:bodyPr>
+          <a:lstStyle/>
+          <a:p>
+            <a:pPr indent="0" marL="0">
+              <a:buNone/>
+            </a:pPr>
+            <a:r>
+              <a:rPr lang="ja-JP" altLang="en-US" sz="3200" dirty="0">
+                <a:solidFill>
+                  <a:srgbClr val="1A1A1A"/>
+                </a:solidFill>
+                <a:latin typeface="Dela Gothic One" pitchFamily="34" charset="0"/>
+                <a:ea typeface="けいふぉんと" pitchFamily="34" charset="-122"/>
+                <a:cs typeface="Dela Gothic One" pitchFamily="34" charset="-120"/>
+              </a:rPr>
+              <a:t>第8回</a:t>
+            </a:r>
+            <a:endParaRPr lang="ja-JP" sz="3200" dirty="0"/>
+          </a:p>
+          <a:p>
+            <a:pPr indent="0" marL="0">
+              <a:buNone/>
+            </a:pPr>
+            <a:r>
+              <a:rPr lang="ja-JP" altLang="en-US" sz="3200" dirty="0">
+                <a:solidFill>
+                  <a:srgbClr val="1A1A1A"/>
+                </a:solidFill>
+                <a:latin typeface="Dela Gothic One" pitchFamily="34" charset="0"/>
+                <a:ea typeface="けいふぉんと" pitchFamily="34" charset="-122"/>
+                <a:cs typeface="Dela Gothic One" pitchFamily="34" charset="-120"/>
+              </a:rPr>
+              <a:t>Webに公開する</a:t>
+            </a:r>
+            <a:endParaRPr lang="ja-JP" sz="3200" dirty="0"/>
+          </a:p>
+        </p:txBody>
+      </p:sp>
+      <p:sp>
+        <p:nvSpPr>
+          <p:cNvPr id="5" name="card"/>
           <p:cNvSpPr/>
-          <p:nvPr>
-            <p:ph idx="101" type="body" hasCustomPrompt="1"/>
-          </p:nvPr>
-        </p:nvSpPr>
-        <p:spPr>
-          <a:xfrm>
-            <a:off x="548640" y="2606040"/>
-            <a:ext cx="8046720" cy="1097280"/>
+          <p:nvPr/>
+        </p:nvSpPr>
+        <p:spPr>
+          <a:xfrm>
+            <a:off x="457200" y="3108960"/>
+            <a:ext cx="5394960" cy="1325880"/>
+          </a:xfrm>
+          <a:prstGeom prst="roundRect">
+            <a:avLst>
+              <a:gd name="adj" fmla="val 6897"/>
+            </a:avLst>
+          </a:prstGeom>
+          <a:solidFill>
+            <a:srgbClr val="FFFFFF"/>
+          </a:solidFill>
+          <a:ln w="25400">
+            <a:solidFill>
+              <a:srgbClr val="1A1A1A"/>
+            </a:solidFill>
+            <a:prstDash val="solid"/>
+          </a:ln>
+          <a:effectLst>
+            <a:outerShdw sx="100000" sy="100000" kx="0" ky="0" algn="bl" rotWithShape="0" blurRad="101600" dist="50800" dir="2700000">
+              <a:srgbClr val="1A1A1A">
+                <a:alpha val="100000"/>
+              </a:srgbClr>
+            </a:outerShdw>
+          </a:effectLst>
+        </p:spPr>
+      </p:sp>
+      <p:sp>
+        <p:nvSpPr>
+          <p:cNvPr id="6" name="Text 3"/>
+          <p:cNvSpPr txBox="1"/>
+          <p:nvPr/>
+        </p:nvSpPr>
+        <p:spPr>
+          <a:xfrm>
+            <a:off x="685800" y="3200400"/>
+            <a:ext cx="4937760" cy="1143000"/>
           </a:xfrm>
           <a:prstGeom prst="rect">
             <a:avLst/>
@@ -2513,35 +2455,49 @@
           <a:ln/>
         </p:spPr>
         <p:txBody>
-          <a:bodyPr wrap="square" lIns="0" tIns="0" rIns="0" bIns="0" rtlCol="0" anchor="t"/>
+          <a:bodyPr wrap="square" lIns="0" tIns="0" rIns="0" bIns="0" rtlCol="0" anchor="ctr">
+            <a:normAutofit/>
+          </a:bodyPr>
           <a:lstStyle/>
           <a:p>
             <a:pPr indent="0" marL="0">
-              <a:buNone/>
-            </a:pPr>
-            <a:r>
-              <a:rPr lang="en-US" sz="1500" dirty="0">
-                <a:solidFill>
-                  <a:schemeClr val="bg1"/>
-                </a:solidFill>
+              <a:spcAft>
+                <a:spcPts val="400"/>
+              </a:spcAft>
+              <a:buNone/>
+            </a:pPr>
+            <a:r>
+              <a:rPr lang="ja-JP" altLang="en-US" sz="1400" b="1" dirty="0">
+                <a:solidFill>
+                  <a:srgbClr val="1A1A1A"/>
+                </a:solidFill>
+                <a:latin typeface="Noto Sans JP" pitchFamily="34" charset="0"/>
+                <a:ea typeface="Noto Sans JP" pitchFamily="34" charset="-122"/>
+                <a:cs typeface="Noto Sans JP" pitchFamily="34" charset="-120"/>
               </a:rPr>
               <a:t>わからないところは、講座グループでいつでも質問してください。</a:t>
             </a:r>
-            <a:endParaRPr lang="en-US" sz="1500" dirty="0"/>
+            <a:endParaRPr lang="ja-JP" sz="1400" dirty="0"/>
           </a:p>
           <a:p>
             <a:pPr indent="0" marL="0">
-              <a:buNone/>
-            </a:pPr>
-            <a:r>
-              <a:rPr lang="en-US" sz="1500" dirty="0">
-                <a:solidFill>
-                  <a:schemeClr val="bg1"/>
-                </a:solidFill>
+              <a:spcAft>
+                <a:spcPts val="400"/>
+              </a:spcAft>
+              <a:buNone/>
+            </a:pPr>
+            <a:r>
+              <a:rPr lang="ja-JP" altLang="en-US" sz="1400" b="1" dirty="0">
+                <a:solidFill>
+                  <a:srgbClr val="1A1A1A"/>
+                </a:solidFill>
+                <a:latin typeface="Noto Sans JP" pitchFamily="34" charset="0"/>
+                <a:ea typeface="Noto Sans JP" pitchFamily="34" charset="-122"/>
+                <a:cs typeface="Noto Sans JP" pitchFamily="34" charset="-120"/>
               </a:rPr>
               <a:t>APIキーやパスワードは送らないでください。</a:t>
             </a:r>
-            <a:endParaRPr lang="en-US" sz="1500" dirty="0"/>
+            <a:endParaRPr lang="ja-JP" sz="1400" dirty="0"/>
           </a:p>
         </p:txBody>
       </p:sp>
@@ -2573,15 +2529,58 @@
       <p:sp>
         <p:nvSpPr>
           <p:cNvPr id="2" name="Text 0"/>
-          <p:cNvSpPr/>
-          <p:nvPr>
-            <p:ph idx="100" type="title" hasCustomPrompt="1"/>
-          </p:nvPr>
-        </p:nvSpPr>
-        <p:spPr>
-          <a:xfrm>
-            <a:off x="548640" y="658368"/>
-            <a:ext cx="8046720" cy="566928"/>
+          <p:cNvSpPr txBox="1"/>
+          <p:nvPr/>
+        </p:nvSpPr>
+        <p:spPr>
+          <a:xfrm rot="-180000">
+            <a:off x="411480" y="201168"/>
+            <a:ext cx="1040587" cy="352044"/>
+          </a:xfrm>
+          <a:prstGeom prst="rect">
+            <a:avLst/>
+          </a:prstGeom>
+          <a:solidFill>
+            <a:srgbClr val="1A1A1A"/>
+          </a:solidFill>
+          <a:ln>
+            <a:solidFill>
+              <a:srgbClr val="1A1A1A"/>
+            </a:solidFill>
+          </a:ln>
+        </p:spPr>
+        <p:txBody>
+          <a:bodyPr wrap="square" lIns="0" tIns="0" rIns="0" bIns="0" rtlCol="0" anchor="ctr"/>
+          <a:lstStyle/>
+          <a:p>
+            <a:pPr algn="ctr" indent="0" marL="0">
+              <a:buNone/>
+            </a:pPr>
+            <a:r>
+              <a:rPr lang="ja-JP" altLang="en-US" sz="1100" dirty="0">
+                <a:solidFill>
+                  <a:srgbClr val="FFFFFF"/>
+                </a:solidFill>
+                <a:latin typeface="Dela Gothic One" pitchFamily="34" charset="0"/>
+                <a:ea typeface="けいふぉんと" pitchFamily="34" charset="-122"/>
+                <a:cs typeface="Dela Gothic One" pitchFamily="34" charset="-120"/>
+              </a:rPr>
+              <a:t>はじめに</a:t>
+            </a:r>
+            <a:endParaRPr lang="ja-JP" sz="1100" dirty="0"/>
+          </a:p>
+        </p:txBody>
+      </p:sp>
+      <p:sp>
+        <p:nvSpPr>
+          <p:cNvPr id="3" name="Text 1"/>
+          <p:cNvSpPr txBox="1"/>
+          <p:nvPr/>
+        </p:nvSpPr>
+        <p:spPr>
+          <a:xfrm>
+            <a:off x="411480" y="502920"/>
+            <a:ext cx="8321040" cy="685800"/>
           </a:xfrm>
           <a:prstGeom prst="rect">
             <a:avLst/>
@@ -2590,105 +2589,79 @@
           <a:ln/>
         </p:spPr>
         <p:txBody>
-          <a:bodyPr wrap="square" lIns="0" tIns="0" rIns="0" bIns="0" rtlCol="0" anchor="ctr"/>
-          <a:lstStyle/>
-          <a:p>
-            <a:pPr algn="l" indent="0" marL="0">
-              <a:buNone/>
-            </a:pPr>
-            <a:r>
-              <a:rPr lang="en-US" sz="2400" b="1" dirty="0">
-                <a:solidFill>
-                  <a:schemeClr val="tx1"/>
-                </a:solidFill>
+          <a:bodyPr wrap="square" lIns="0" tIns="0" rIns="0" bIns="0" rtlCol="0" anchor="ctr">
+            <a:normAutofit/>
+          </a:bodyPr>
+          <a:lstStyle/>
+          <a:p>
+            <a:pPr indent="0" marL="0">
+              <a:buNone/>
+            </a:pPr>
+            <a:r>
+              <a:rPr lang="ja-JP" altLang="en-US" sz="2600" dirty="0">
+                <a:solidFill>
+                  <a:srgbClr val="1A1A1A"/>
+                </a:solidFill>
+                <a:latin typeface="Dela Gothic One" pitchFamily="34" charset="0"/>
+                <a:ea typeface="けいふぉんと" pitchFamily="34" charset="-122"/>
+                <a:cs typeface="Dela Gothic One" pitchFamily="34" charset="-120"/>
               </a:rPr>
               <a:t>今日のゴールと流れ</a:t>
             </a:r>
-            <a:endParaRPr lang="en-US" sz="2400" dirty="0"/>
-          </a:p>
-        </p:txBody>
-      </p:sp>
-      <p:sp>
-        <p:nvSpPr>
-          <p:cNvPr id="3" name="chip"/>
+            <a:endParaRPr lang="ja-JP" sz="2600" dirty="0"/>
+          </a:p>
+        </p:txBody>
+      </p:sp>
+      <p:sp>
+        <p:nvSpPr>
+          <p:cNvPr id="4" name="card"/>
           <p:cNvSpPr/>
           <p:nvPr/>
         </p:nvSpPr>
         <p:spPr>
           <a:xfrm>
-            <a:off x="548640" y="292608"/>
-            <a:ext cx="932688" cy="292608"/>
+            <a:off x="502920" y="1371600"/>
+            <a:ext cx="3941064" cy="1280160"/>
           </a:xfrm>
           <a:prstGeom prst="roundRect">
             <a:avLst>
-              <a:gd name="adj" fmla="val 50000"/>
+              <a:gd name="adj" fmla="val 7143"/>
             </a:avLst>
           </a:prstGeom>
           <a:solidFill>
-            <a:schemeClr val="tx1"/>
-          </a:solidFill>
-          <a:ln w="12700">
+            <a:srgbClr val="FFFFFF"/>
+          </a:solidFill>
+          <a:ln w="25400">
             <a:solidFill>
-              <a:schemeClr val="tx1"/>
+              <a:srgbClr val="1A1A1A"/>
             </a:solidFill>
             <a:prstDash val="solid"/>
           </a:ln>
-        </p:spPr>
-      </p:sp>
-      <p:sp>
-        <p:nvSpPr>
-          <p:cNvPr id="4" name="chip-text"/>
-          <p:cNvSpPr txBox="1"/>
-          <p:nvPr/>
-        </p:nvSpPr>
-        <p:spPr>
-          <a:xfrm>
-            <a:off x="548640" y="292608"/>
-            <a:ext cx="932688" cy="292608"/>
-          </a:xfrm>
-          <a:prstGeom prst="rect">
-            <a:avLst/>
-          </a:prstGeom>
-          <a:noFill/>
-          <a:ln/>
-        </p:spPr>
-        <p:txBody>
-          <a:bodyPr wrap="square" lIns="0" tIns="0" rIns="0" bIns="0" rtlCol="0" anchor="ctr"/>
-          <a:lstStyle/>
-          <a:p>
-            <a:pPr algn="ctr" indent="0" marL="0">
-              <a:buNone/>
-            </a:pPr>
-            <a:r>
-              <a:rPr lang="en-US" sz="1100" b="1" dirty="0">
-                <a:solidFill>
-                  <a:schemeClr val="accent1"/>
-                </a:solidFill>
-              </a:rPr>
-              <a:t>はじめに</a:t>
-            </a:r>
-            <a:endParaRPr lang="en-US" sz="1100" dirty="0"/>
-          </a:p>
-        </p:txBody>
-      </p:sp>
-      <p:sp>
-        <p:nvSpPr>
-          <p:cNvPr id="5" name="card"/>
+          <a:effectLst>
+            <a:outerShdw sx="100000" sy="100000" kx="0" ky="0" algn="bl" rotWithShape="0" blurRad="101600" dist="50800" dir="2700000">
+              <a:srgbClr val="1A1A1A">
+                <a:alpha val="100000"/>
+              </a:srgbClr>
+            </a:outerShdw>
+          </a:effectLst>
+        </p:spPr>
+      </p:sp>
+      <p:sp>
+        <p:nvSpPr>
+          <p:cNvPr id="5" name="icon-circle"/>
           <p:cNvSpPr/>
           <p:nvPr/>
         </p:nvSpPr>
         <p:spPr>
           <a:xfrm>
-            <a:off x="548640" y="1417320"/>
-            <a:ext cx="3909060" cy="1280160"/>
-          </a:xfrm>
-          <a:prstGeom prst="roundRect">
-            <a:avLst>
-              <a:gd name="adj" fmla="val 8571"/>
-            </a:avLst>
-          </a:prstGeom>
-          <a:solidFill>
-            <a:schemeClr val="bg2"/>
+            <a:off x="685800" y="1572768"/>
+            <a:ext cx="438912" cy="438912"/>
+          </a:xfrm>
+          <a:prstGeom prst="ellipse">
+            <a:avLst/>
+          </a:prstGeom>
+          <a:solidFill>
+            <a:srgbClr val="DD6420"/>
           </a:solidFill>
           <a:ln w="19050">
             <a:solidFill>
@@ -2696,43 +2669,11 @@
             </a:solidFill>
             <a:prstDash val="solid"/>
           </a:ln>
-          <a:effectLst>
-            <a:outerShdw sx="100000" sy="100000" kx="0" ky="0" algn="bl" rotWithShape="0" blurRad="101600" dist="38100" dir="2700000">
-              <a:srgbClr val="000000">
-                <a:alpha val="18000"/>
-              </a:srgbClr>
-            </a:outerShdw>
-          </a:effectLst>
-        </p:spPr>
-      </p:sp>
-      <p:sp>
-        <p:nvSpPr>
-          <p:cNvPr id="6" name="icon-circle"/>
-          <p:cNvSpPr/>
-          <p:nvPr/>
-        </p:nvSpPr>
-        <p:spPr>
-          <a:xfrm>
-            <a:off x="731520" y="1600200"/>
-            <a:ext cx="411480" cy="411480"/>
-          </a:xfrm>
-          <a:prstGeom prst="ellipse">
-            <a:avLst/>
-          </a:prstGeom>
-          <a:solidFill>
-            <a:schemeClr val="accent1"/>
-          </a:solidFill>
-          <a:ln w="15875">
-            <a:solidFill>
-              <a:srgbClr val="1A1A1A"/>
-            </a:solidFill>
-            <a:prstDash val="solid"/>
-          </a:ln>
         </p:spPr>
       </p:sp>
       <p:pic>
         <p:nvPicPr>
-          <p:cNvPr id="7" name="icon" descr="preencoded.png">    </p:cNvPr>
+          <p:cNvPr id="6" name="icon" descr="preencoded.png">    </p:cNvPr>
           <p:cNvPicPr>
             <a:picLocks noChangeAspect="1"/>
           </p:cNvPicPr>
@@ -2746,8 +2687,8 @@
         </p:blipFill>
         <p:spPr>
           <a:xfrm>
-            <a:off x="838505" y="1707185"/>
-            <a:ext cx="197510" cy="197510"/>
+            <a:off x="795528" y="1682496"/>
+            <a:ext cx="219456" cy="219456"/>
           </a:xfrm>
           <a:prstGeom prst="rect">
             <a:avLst/>
@@ -2756,14 +2697,14 @@
       </p:pic>
       <p:sp>
         <p:nvSpPr>
-          <p:cNvPr id="8" name="goal"/>
+          <p:cNvPr id="7" name="goal"/>
           <p:cNvSpPr txBox="1"/>
           <p:nvPr/>
         </p:nvSpPr>
         <p:spPr>
           <a:xfrm>
-            <a:off x="1280160" y="1508760"/>
-            <a:ext cx="2994660" cy="1097280"/>
+            <a:off x="1252728" y="1463040"/>
+            <a:ext cx="3026664" cy="1097280"/>
           </a:xfrm>
           <a:prstGeom prst="rect">
             <a:avLst/>
@@ -2772,42 +2713,79 @@
           <a:ln/>
         </p:spPr>
         <p:txBody>
-          <a:bodyPr wrap="square" lIns="0" tIns="0" rIns="0" bIns="0" rtlCol="0" anchor="ctr"/>
+          <a:bodyPr wrap="square" lIns="0" tIns="0" rIns="0" bIns="0" rtlCol="0" anchor="ctr">
+            <a:normAutofit/>
+          </a:bodyPr>
           <a:lstStyle/>
           <a:p>
             <a:pPr indent="0" marL="0">
               <a:buNone/>
             </a:pPr>
             <a:r>
-              <a:rPr lang="en-US" sz="1400" b="1" dirty="0">
-                <a:solidFill>
-                  <a:schemeClr val="tx1"/>
-                </a:solidFill>
+              <a:rPr lang="ja-JP" altLang="en-US" sz="1400" b="1" dirty="0">
+                <a:solidFill>
+                  <a:srgbClr val="1A1A1A"/>
+                </a:solidFill>
+                <a:latin typeface="Noto Sans JP" pitchFamily="34" charset="0"/>
+                <a:ea typeface="Noto Sans JP" pitchFamily="34" charset="-122"/>
+                <a:cs typeface="Noto Sans JP" pitchFamily="34" charset="-120"/>
               </a:rPr>
               <a:t>自分のPCでClaude Codeを動かし、Webページを1枚作らせられる</a:t>
             </a:r>
-            <a:endParaRPr lang="en-US" sz="1400" dirty="0"/>
-          </a:p>
-        </p:txBody>
-      </p:sp>
-      <p:sp>
-        <p:nvSpPr>
-          <p:cNvPr id="9" name="card"/>
+            <a:endParaRPr lang="ja-JP" sz="1400" dirty="0"/>
+          </a:p>
+        </p:txBody>
+      </p:sp>
+      <p:sp>
+        <p:nvSpPr>
+          <p:cNvPr id="8" name="card"/>
           <p:cNvSpPr/>
           <p:nvPr/>
         </p:nvSpPr>
         <p:spPr>
           <a:xfrm>
-            <a:off x="4686300" y="1417320"/>
-            <a:ext cx="3909060" cy="1280160"/>
+            <a:off x="4700016" y="1371600"/>
+            <a:ext cx="3941064" cy="1280160"/>
           </a:xfrm>
           <a:prstGeom prst="roundRect">
             <a:avLst>
-              <a:gd name="adj" fmla="val 8571"/>
+              <a:gd name="adj" fmla="val 7143"/>
             </a:avLst>
           </a:prstGeom>
           <a:solidFill>
-            <a:schemeClr val="bg2"/>
+            <a:srgbClr val="FFFFFF"/>
+          </a:solidFill>
+          <a:ln w="25400">
+            <a:solidFill>
+              <a:srgbClr val="1A1A1A"/>
+            </a:solidFill>
+            <a:prstDash val="solid"/>
+          </a:ln>
+          <a:effectLst>
+            <a:outerShdw sx="100000" sy="100000" kx="0" ky="0" algn="bl" rotWithShape="0" blurRad="101600" dist="50800" dir="2700000">
+              <a:srgbClr val="1A1A1A">
+                <a:alpha val="100000"/>
+              </a:srgbClr>
+            </a:outerShdw>
+          </a:effectLst>
+        </p:spPr>
+      </p:sp>
+      <p:sp>
+        <p:nvSpPr>
+          <p:cNvPr id="9" name="icon-circle"/>
+          <p:cNvSpPr/>
+          <p:nvPr/>
+        </p:nvSpPr>
+        <p:spPr>
+          <a:xfrm>
+            <a:off x="4882896" y="1572768"/>
+            <a:ext cx="438912" cy="438912"/>
+          </a:xfrm>
+          <a:prstGeom prst="ellipse">
+            <a:avLst/>
+          </a:prstGeom>
+          <a:solidFill>
+            <a:srgbClr val="DD6420"/>
           </a:solidFill>
           <a:ln w="19050">
             <a:solidFill>
@@ -2815,43 +2793,11 @@
             </a:solidFill>
             <a:prstDash val="solid"/>
           </a:ln>
-          <a:effectLst>
-            <a:outerShdw sx="100000" sy="100000" kx="0" ky="0" algn="bl" rotWithShape="0" blurRad="101600" dist="38100" dir="2700000">
-              <a:srgbClr val="000000">
-                <a:alpha val="18000"/>
-              </a:srgbClr>
-            </a:outerShdw>
-          </a:effectLst>
-        </p:spPr>
-      </p:sp>
-      <p:sp>
-        <p:nvSpPr>
-          <p:cNvPr id="10" name="icon-circle"/>
-          <p:cNvSpPr/>
-          <p:nvPr/>
-        </p:nvSpPr>
-        <p:spPr>
-          <a:xfrm>
-            <a:off x="4869180" y="1600200"/>
-            <a:ext cx="411480" cy="411480"/>
-          </a:xfrm>
-          <a:prstGeom prst="ellipse">
-            <a:avLst/>
-          </a:prstGeom>
-          <a:solidFill>
-            <a:schemeClr val="accent1"/>
-          </a:solidFill>
-          <a:ln w="15875">
-            <a:solidFill>
-              <a:srgbClr val="1A1A1A"/>
-            </a:solidFill>
-            <a:prstDash val="solid"/>
-          </a:ln>
         </p:spPr>
       </p:sp>
       <p:pic>
         <p:nvPicPr>
-          <p:cNvPr id="11" name="icon" descr="preencoded.png">    </p:cNvPr>
+          <p:cNvPr id="10" name="icon" descr="preencoded.png">    </p:cNvPr>
           <p:cNvPicPr>
             <a:picLocks noChangeAspect="1"/>
           </p:cNvPicPr>
@@ -2865,8 +2811,8 @@
         </p:blipFill>
         <p:spPr>
           <a:xfrm>
-            <a:off x="4976165" y="1707185"/>
-            <a:ext cx="197510" cy="197510"/>
+            <a:off x="4992624" y="1682496"/>
+            <a:ext cx="219456" cy="219456"/>
           </a:xfrm>
           <a:prstGeom prst="rect">
             <a:avLst/>
@@ -2875,14 +2821,14 @@
       </p:pic>
       <p:sp>
         <p:nvSpPr>
-          <p:cNvPr id="12" name="goal"/>
+          <p:cNvPr id="11" name="goal"/>
           <p:cNvSpPr txBox="1"/>
           <p:nvPr/>
         </p:nvSpPr>
         <p:spPr>
           <a:xfrm>
-            <a:off x="5417820" y="1508760"/>
-            <a:ext cx="2994660" cy="1097280"/>
+            <a:off x="5449824" y="1463040"/>
+            <a:ext cx="3026664" cy="1097280"/>
           </a:xfrm>
           <a:prstGeom prst="rect">
             <a:avLst/>
@@ -2891,59 +2837,105 @@
           <a:ln/>
         </p:spPr>
         <p:txBody>
+          <a:bodyPr wrap="square" lIns="0" tIns="0" rIns="0" bIns="0" rtlCol="0" anchor="ctr">
+            <a:normAutofit/>
+          </a:bodyPr>
+          <a:lstStyle/>
+          <a:p>
+            <a:pPr indent="0" marL="0">
+              <a:buNone/>
+            </a:pPr>
+            <a:r>
+              <a:rPr lang="ja-JP" altLang="en-US" sz="1400" b="1" dirty="0">
+                <a:solidFill>
+                  <a:srgbClr val="1A1A1A"/>
+                </a:solidFill>
+                <a:latin typeface="Noto Sans JP" pitchFamily="34" charset="0"/>
+                <a:ea typeface="Noto Sans JP" pitchFamily="34" charset="-122"/>
+                <a:cs typeface="Noto Sans JP" pitchFamily="34" charset="-120"/>
+              </a:rPr>
+              <a:t>修正を頼み、Gitで記録してGitHubに保存できる</a:t>
+            </a:r>
+            <a:endParaRPr lang="ja-JP" sz="1400" dirty="0"/>
+          </a:p>
+        </p:txBody>
+      </p:sp>
+      <p:sp>
+        <p:nvSpPr>
+          <p:cNvPr id="12" name="Text 8"/>
+          <p:cNvSpPr txBox="1"/>
+          <p:nvPr/>
+        </p:nvSpPr>
+        <p:spPr>
+          <a:xfrm rot="-120000">
+            <a:off x="457200" y="2907792"/>
+            <a:ext cx="1915668" cy="352044"/>
+          </a:xfrm>
+          <a:prstGeom prst="rect">
+            <a:avLst/>
+          </a:prstGeom>
+          <a:solidFill>
+            <a:srgbClr val="1A1A1A"/>
+          </a:solidFill>
+          <a:ln>
+            <a:solidFill>
+              <a:srgbClr val="1A1A1A"/>
+            </a:solidFill>
+          </a:ln>
+        </p:spPr>
+        <p:txBody>
           <a:bodyPr wrap="square" lIns="0" tIns="0" rIns="0" bIns="0" rtlCol="0" anchor="ctr"/>
           <a:lstStyle/>
           <a:p>
-            <a:pPr indent="0" marL="0">
-              <a:buNone/>
-            </a:pPr>
-            <a:r>
-              <a:rPr lang="en-US" sz="1400" b="1" dirty="0">
-                <a:solidFill>
-                  <a:schemeClr val="tx1"/>
-                </a:solidFill>
-              </a:rPr>
-              <a:t>修正を頼み、Gitで記録してGitHubに保存できる</a:t>
-            </a:r>
-            <a:endParaRPr lang="en-US" sz="1400" dirty="0"/>
-          </a:p>
-        </p:txBody>
-      </p:sp>
-      <p:sp>
-        <p:nvSpPr>
-          <p:cNvPr id="13" name="Text 9"/>
-          <p:cNvSpPr txBox="1"/>
-          <p:nvPr/>
-        </p:nvSpPr>
-        <p:spPr>
-          <a:xfrm>
-            <a:off x="548640" y="2971800"/>
-            <a:ext cx="3657600" cy="320040"/>
-          </a:xfrm>
-          <a:prstGeom prst="rect">
-            <a:avLst/>
-          </a:prstGeom>
-          <a:noFill/>
-          <a:ln/>
-        </p:spPr>
-        <p:txBody>
-          <a:bodyPr wrap="square" lIns="0" tIns="0" rIns="0" bIns="0" rtlCol="0" anchor="ctr"/>
-          <a:lstStyle/>
-          <a:p>
-            <a:pPr indent="0" marL="0">
-              <a:buNone/>
-            </a:pPr>
-            <a:r>
-              <a:rPr lang="en-US" sz="1300" b="1" dirty="0">
-                <a:solidFill>
-                  <a:schemeClr val="tx1"/>
-                </a:solidFill>
+            <a:pPr algn="ctr" indent="0" marL="0">
+              <a:buNone/>
+            </a:pPr>
+            <a:r>
+              <a:rPr lang="ja-JP" altLang="en-US" sz="1100" dirty="0">
+                <a:solidFill>
+                  <a:srgbClr val="FFFFFF"/>
+                </a:solidFill>
+                <a:latin typeface="Dela Gothic One" pitchFamily="34" charset="0"/>
+                <a:ea typeface="けいふぉんと" pitchFamily="34" charset="-122"/>
+                <a:cs typeface="Dela Gothic One" pitchFamily="34" charset="-120"/>
               </a:rPr>
               <a:t>今日の流れ（90分）</a:t>
             </a:r>
-            <a:endParaRPr lang="en-US" sz="1300" dirty="0"/>
-          </a:p>
-        </p:txBody>
+            <a:endParaRPr lang="ja-JP" sz="1100" dirty="0"/>
+          </a:p>
+        </p:txBody>
+      </p:sp>
+      <p:sp>
+        <p:nvSpPr>
+          <p:cNvPr id="13" name="Shape 9"/>
+          <p:cNvSpPr/>
+          <p:nvPr/>
+        </p:nvSpPr>
+        <p:spPr>
+          <a:xfrm>
+            <a:off x="502920" y="3364992"/>
+            <a:ext cx="8138160" cy="685800"/>
+          </a:xfrm>
+          <a:prstGeom prst="rect">
+            <a:avLst/>
+          </a:prstGeom>
+          <a:solidFill>
+            <a:srgbClr val="FFFFFF"/>
+          </a:solidFill>
+          <a:ln w="25400">
+            <a:solidFill>
+              <a:srgbClr val="1A1A1A"/>
+            </a:solidFill>
+            <a:prstDash val="solid"/>
+          </a:ln>
+          <a:effectLst>
+            <a:outerShdw sx="100000" sy="100000" kx="0" ky="0" algn="bl" rotWithShape="0" blurRad="101600" dist="50800" dir="2700000">
+              <a:srgbClr val="1A1A1A">
+                <a:alpha val="100000"/>
+              </a:srgbClr>
+            </a:outerShdw>
+          </a:effectLst>
+        </p:spPr>
       </p:sp>
       <p:sp>
         <p:nvSpPr>
@@ -2953,8 +2945,8 @@
         </p:nvSpPr>
         <p:spPr>
           <a:xfrm>
-            <a:off x="548640" y="3383280"/>
-            <a:ext cx="894080" cy="685800"/>
+            <a:off x="502920" y="3364992"/>
+            <a:ext cx="904240" cy="685800"/>
           </a:xfrm>
           <a:prstGeom prst="rect">
             <a:avLst/>
@@ -2978,8 +2970,8 @@
         </p:nvSpPr>
         <p:spPr>
           <a:xfrm>
-            <a:off x="548640" y="3383280"/>
-            <a:ext cx="894080" cy="685800"/>
+            <a:off x="502920" y="3364992"/>
+            <a:ext cx="904240" cy="685800"/>
           </a:xfrm>
           <a:prstGeom prst="rect">
             <a:avLst/>
@@ -2995,28 +2987,34 @@
               <a:buNone/>
             </a:pPr>
             <a:r>
-              <a:rPr lang="en-US" sz="1050" b="1" dirty="0">
+              <a:rPr lang="ja-JP" altLang="en-US" sz="1050" b="1" dirty="0">
                 <a:solidFill>
                   <a:srgbClr val="FFD600"/>
                 </a:solidFill>
+                <a:latin typeface="Noto Sans JP" pitchFamily="34" charset="0"/>
+                <a:ea typeface="Noto Sans JP" pitchFamily="34" charset="-122"/>
+                <a:cs typeface="Noto Sans JP" pitchFamily="34" charset="-120"/>
               </a:rPr>
               <a:t>ふりかえり</a:t>
             </a:r>
-            <a:endParaRPr lang="en-US" sz="1050" dirty="0"/>
+            <a:endParaRPr lang="ja-JP" sz="1050" dirty="0"/>
           </a:p>
           <a:p>
             <a:pPr algn="ctr" indent="0" marL="0">
               <a:buNone/>
             </a:pPr>
             <a:r>
-              <a:rPr lang="en-US" sz="900" b="1" dirty="0">
+              <a:rPr lang="ja-JP" altLang="en-US" sz="900" b="1" dirty="0">
                 <a:solidFill>
                   <a:srgbClr val="FFD600"/>
                 </a:solidFill>
+                <a:latin typeface="Noto Sans JP" pitchFamily="34" charset="0"/>
+                <a:ea typeface="Noto Sans JP" pitchFamily="34" charset="-122"/>
+                <a:cs typeface="Noto Sans JP" pitchFamily="34" charset="-120"/>
               </a:rPr>
               <a:t>10分</a:t>
             </a:r>
-            <a:endParaRPr lang="en-US" sz="1050" dirty="0"/>
+            <a:endParaRPr lang="ja-JP" sz="1050" dirty="0"/>
           </a:p>
         </p:txBody>
       </p:sp>
@@ -3028,8 +3026,8 @@
         </p:nvSpPr>
         <p:spPr>
           <a:xfrm>
-            <a:off x="1442720" y="3383280"/>
-            <a:ext cx="894080" cy="685800"/>
+            <a:off x="1407160" y="3364992"/>
+            <a:ext cx="904240" cy="685800"/>
           </a:xfrm>
           <a:prstGeom prst="rect">
             <a:avLst/>
@@ -3053,8 +3051,8 @@
         </p:nvSpPr>
         <p:spPr>
           <a:xfrm>
-            <a:off x="1442720" y="3383280"/>
-            <a:ext cx="894080" cy="685800"/>
+            <a:off x="1407160" y="3364992"/>
+            <a:ext cx="904240" cy="685800"/>
           </a:xfrm>
           <a:prstGeom prst="rect">
             <a:avLst/>
@@ -3070,28 +3068,34 @@
               <a:buNone/>
             </a:pPr>
             <a:r>
-              <a:rPr lang="en-US" sz="1050" b="1" dirty="0">
+              <a:rPr lang="ja-JP" altLang="en-US" sz="1050" b="1" dirty="0">
                 <a:solidFill>
                   <a:srgbClr val="FFD600"/>
                 </a:solidFill>
+                <a:latin typeface="Noto Sans JP" pitchFamily="34" charset="0"/>
+                <a:ea typeface="Noto Sans JP" pitchFamily="34" charset="-122"/>
+                <a:cs typeface="Noto Sans JP" pitchFamily="34" charset="-120"/>
               </a:rPr>
               <a:t>説明①</a:t>
             </a:r>
-            <a:endParaRPr lang="en-US" sz="1050" dirty="0"/>
+            <a:endParaRPr lang="ja-JP" sz="1050" dirty="0"/>
           </a:p>
           <a:p>
             <a:pPr algn="ctr" indent="0" marL="0">
               <a:buNone/>
             </a:pPr>
             <a:r>
-              <a:rPr lang="en-US" sz="900" b="1" dirty="0">
+              <a:rPr lang="ja-JP" altLang="en-US" sz="900" b="1" dirty="0">
                 <a:solidFill>
                   <a:srgbClr val="FFD600"/>
                 </a:solidFill>
+                <a:latin typeface="Noto Sans JP" pitchFamily="34" charset="0"/>
+                <a:ea typeface="Noto Sans JP" pitchFamily="34" charset="-122"/>
+                <a:cs typeface="Noto Sans JP" pitchFamily="34" charset="-120"/>
               </a:rPr>
               <a:t>10分</a:t>
             </a:r>
-            <a:endParaRPr lang="en-US" sz="1050" dirty="0"/>
+            <a:endParaRPr lang="ja-JP" sz="1050" dirty="0"/>
           </a:p>
         </p:txBody>
       </p:sp>
@@ -3103,8 +3107,8 @@
         </p:nvSpPr>
         <p:spPr>
           <a:xfrm>
-            <a:off x="2336800" y="3383280"/>
-            <a:ext cx="1788160" cy="685800"/>
+            <a:off x="2311400" y="3364992"/>
+            <a:ext cx="1808480" cy="685800"/>
           </a:xfrm>
           <a:prstGeom prst="rect">
             <a:avLst/>
@@ -3128,8 +3132,8 @@
         </p:nvSpPr>
         <p:spPr>
           <a:xfrm>
-            <a:off x="2336800" y="3383280"/>
-            <a:ext cx="1788160" cy="685800"/>
+            <a:off x="2311400" y="3364992"/>
+            <a:ext cx="1808480" cy="685800"/>
           </a:xfrm>
           <a:prstGeom prst="rect">
             <a:avLst/>
@@ -3145,28 +3149,34 @@
               <a:buNone/>
             </a:pPr>
             <a:r>
-              <a:rPr lang="en-US" sz="1050" b="1" dirty="0">
+              <a:rPr lang="ja-JP" altLang="en-US" sz="1050" b="1" dirty="0">
                 <a:solidFill>
                   <a:srgbClr val="FFFFFF"/>
                 </a:solidFill>
+                <a:latin typeface="Noto Sans JP" pitchFamily="34" charset="0"/>
+                <a:ea typeface="Noto Sans JP" pitchFamily="34" charset="-122"/>
+                <a:cs typeface="Noto Sans JP" pitchFamily="34" charset="-120"/>
               </a:rPr>
               <a:t>ハンズオン①</a:t>
             </a:r>
-            <a:endParaRPr lang="en-US" sz="1050" dirty="0"/>
+            <a:endParaRPr lang="ja-JP" sz="1050" dirty="0"/>
           </a:p>
           <a:p>
             <a:pPr algn="ctr" indent="0" marL="0">
               <a:buNone/>
             </a:pPr>
             <a:r>
-              <a:rPr lang="en-US" sz="900" b="1" dirty="0">
+              <a:rPr lang="ja-JP" altLang="en-US" sz="900" b="1" dirty="0">
                 <a:solidFill>
                   <a:srgbClr val="FFFFFF"/>
                 </a:solidFill>
+                <a:latin typeface="Noto Sans JP" pitchFamily="34" charset="0"/>
+                <a:ea typeface="Noto Sans JP" pitchFamily="34" charset="-122"/>
+                <a:cs typeface="Noto Sans JP" pitchFamily="34" charset="-120"/>
               </a:rPr>
               <a:t>20分</a:t>
             </a:r>
-            <a:endParaRPr lang="en-US" sz="1050" dirty="0"/>
+            <a:endParaRPr lang="ja-JP" sz="1050" dirty="0"/>
           </a:p>
         </p:txBody>
       </p:sp>
@@ -3178,8 +3188,8 @@
         </p:nvSpPr>
         <p:spPr>
           <a:xfrm>
-            <a:off x="4124960" y="3383280"/>
-            <a:ext cx="894080" cy="685800"/>
+            <a:off x="4119880" y="3364992"/>
+            <a:ext cx="904240" cy="685800"/>
           </a:xfrm>
           <a:prstGeom prst="rect">
             <a:avLst/>
@@ -3203,8 +3213,8 @@
         </p:nvSpPr>
         <p:spPr>
           <a:xfrm>
-            <a:off x="4124960" y="3383280"/>
-            <a:ext cx="894080" cy="685800"/>
+            <a:off x="4119880" y="3364992"/>
+            <a:ext cx="904240" cy="685800"/>
           </a:xfrm>
           <a:prstGeom prst="rect">
             <a:avLst/>
@@ -3220,28 +3230,34 @@
               <a:buNone/>
             </a:pPr>
             <a:r>
-              <a:rPr lang="en-US" sz="1050" b="1" dirty="0">
+              <a:rPr lang="ja-JP" altLang="en-US" sz="1050" b="1" dirty="0">
                 <a:solidFill>
                   <a:srgbClr val="FFD600"/>
                 </a:solidFill>
+                <a:latin typeface="Noto Sans JP" pitchFamily="34" charset="0"/>
+                <a:ea typeface="Noto Sans JP" pitchFamily="34" charset="-122"/>
+                <a:cs typeface="Noto Sans JP" pitchFamily="34" charset="-120"/>
               </a:rPr>
               <a:t>説明②</a:t>
             </a:r>
-            <a:endParaRPr lang="en-US" sz="1050" dirty="0"/>
+            <a:endParaRPr lang="ja-JP" sz="1050" dirty="0"/>
           </a:p>
           <a:p>
             <a:pPr algn="ctr" indent="0" marL="0">
               <a:buNone/>
             </a:pPr>
             <a:r>
-              <a:rPr lang="en-US" sz="900" b="1" dirty="0">
+              <a:rPr lang="ja-JP" altLang="en-US" sz="900" b="1" dirty="0">
                 <a:solidFill>
                   <a:srgbClr val="FFD600"/>
                 </a:solidFill>
+                <a:latin typeface="Noto Sans JP" pitchFamily="34" charset="0"/>
+                <a:ea typeface="Noto Sans JP" pitchFamily="34" charset="-122"/>
+                <a:cs typeface="Noto Sans JP" pitchFamily="34" charset="-120"/>
               </a:rPr>
               <a:t>10分</a:t>
             </a:r>
-            <a:endParaRPr lang="en-US" sz="1050" dirty="0"/>
+            <a:endParaRPr lang="ja-JP" sz="1050" dirty="0"/>
           </a:p>
         </p:txBody>
       </p:sp>
@@ -3253,8 +3269,8 @@
         </p:nvSpPr>
         <p:spPr>
           <a:xfrm>
-            <a:off x="5019040" y="3383280"/>
-            <a:ext cx="1788160" cy="685800"/>
+            <a:off x="5024120" y="3364992"/>
+            <a:ext cx="1808480" cy="685800"/>
           </a:xfrm>
           <a:prstGeom prst="rect">
             <a:avLst/>
@@ -3278,8 +3294,8 @@
         </p:nvSpPr>
         <p:spPr>
           <a:xfrm>
-            <a:off x="5019040" y="3383280"/>
-            <a:ext cx="1788160" cy="685800"/>
+            <a:off x="5024120" y="3364992"/>
+            <a:ext cx="1808480" cy="685800"/>
           </a:xfrm>
           <a:prstGeom prst="rect">
             <a:avLst/>
@@ -3295,28 +3311,34 @@
               <a:buNone/>
             </a:pPr>
             <a:r>
-              <a:rPr lang="en-US" sz="1050" b="1" dirty="0">
+              <a:rPr lang="ja-JP" altLang="en-US" sz="1050" b="1" dirty="0">
                 <a:solidFill>
                   <a:srgbClr val="FFFFFF"/>
                 </a:solidFill>
+                <a:latin typeface="Noto Sans JP" pitchFamily="34" charset="0"/>
+                <a:ea typeface="Noto Sans JP" pitchFamily="34" charset="-122"/>
+                <a:cs typeface="Noto Sans JP" pitchFamily="34" charset="-120"/>
               </a:rPr>
               <a:t>ハンズオン②</a:t>
             </a:r>
-            <a:endParaRPr lang="en-US" sz="1050" dirty="0"/>
+            <a:endParaRPr lang="ja-JP" sz="1050" dirty="0"/>
           </a:p>
           <a:p>
             <a:pPr algn="ctr" indent="0" marL="0">
               <a:buNone/>
             </a:pPr>
             <a:r>
-              <a:rPr lang="en-US" sz="900" b="1" dirty="0">
+              <a:rPr lang="ja-JP" altLang="en-US" sz="900" b="1" dirty="0">
                 <a:solidFill>
                   <a:srgbClr val="FFFFFF"/>
                 </a:solidFill>
+                <a:latin typeface="Noto Sans JP" pitchFamily="34" charset="0"/>
+                <a:ea typeface="Noto Sans JP" pitchFamily="34" charset="-122"/>
+                <a:cs typeface="Noto Sans JP" pitchFamily="34" charset="-120"/>
               </a:rPr>
               <a:t>20分</a:t>
             </a:r>
-            <a:endParaRPr lang="en-US" sz="1050" dirty="0"/>
+            <a:endParaRPr lang="ja-JP" sz="1050" dirty="0"/>
           </a:p>
         </p:txBody>
       </p:sp>
@@ -3328,8 +3350,8 @@
         </p:nvSpPr>
         <p:spPr>
           <a:xfrm>
-            <a:off x="6807200" y="3383280"/>
-            <a:ext cx="1341120" cy="685800"/>
+            <a:off x="6832600" y="3364992"/>
+            <a:ext cx="1356360" cy="685800"/>
           </a:xfrm>
           <a:prstGeom prst="rect">
             <a:avLst/>
@@ -3353,8 +3375,8 @@
         </p:nvSpPr>
         <p:spPr>
           <a:xfrm>
-            <a:off x="6807200" y="3383280"/>
-            <a:ext cx="1341120" cy="685800"/>
+            <a:off x="6832600" y="3364992"/>
+            <a:ext cx="1356360" cy="685800"/>
           </a:xfrm>
           <a:prstGeom prst="rect">
             <a:avLst/>
@@ -3370,28 +3392,34 @@
               <a:buNone/>
             </a:pPr>
             <a:r>
-              <a:rPr lang="en-US" sz="1050" b="1" dirty="0">
+              <a:rPr lang="ja-JP" altLang="en-US" sz="1050" b="1" dirty="0">
                 <a:solidFill>
                   <a:srgbClr val="FFD600"/>
                 </a:solidFill>
+                <a:latin typeface="Noto Sans JP" pitchFamily="34" charset="0"/>
+                <a:ea typeface="Noto Sans JP" pitchFamily="34" charset="-122"/>
+                <a:cs typeface="Noto Sans JP" pitchFamily="34" charset="-120"/>
               </a:rPr>
               <a:t>質問・共有</a:t>
             </a:r>
-            <a:endParaRPr lang="en-US" sz="1050" dirty="0"/>
+            <a:endParaRPr lang="ja-JP" sz="1050" dirty="0"/>
           </a:p>
           <a:p>
             <a:pPr algn="ctr" indent="0" marL="0">
               <a:buNone/>
             </a:pPr>
             <a:r>
-              <a:rPr lang="en-US" sz="900" b="1" dirty="0">
+              <a:rPr lang="ja-JP" altLang="en-US" sz="900" b="1" dirty="0">
                 <a:solidFill>
                   <a:srgbClr val="FFD600"/>
                 </a:solidFill>
+                <a:latin typeface="Noto Sans JP" pitchFamily="34" charset="0"/>
+                <a:ea typeface="Noto Sans JP" pitchFamily="34" charset="-122"/>
+                <a:cs typeface="Noto Sans JP" pitchFamily="34" charset="-120"/>
               </a:rPr>
               <a:t>15分</a:t>
             </a:r>
-            <a:endParaRPr lang="en-US" sz="1050" dirty="0"/>
+            <a:endParaRPr lang="ja-JP" sz="1050" dirty="0"/>
           </a:p>
         </p:txBody>
       </p:sp>
@@ -3403,8 +3431,8 @@
         </p:nvSpPr>
         <p:spPr>
           <a:xfrm>
-            <a:off x="8148320" y="3383280"/>
-            <a:ext cx="447040" cy="685800"/>
+            <a:off x="8188960" y="3364992"/>
+            <a:ext cx="452120" cy="685800"/>
           </a:xfrm>
           <a:prstGeom prst="rect">
             <a:avLst/>
@@ -3428,8 +3456,8 @@
         </p:nvSpPr>
         <p:spPr>
           <a:xfrm>
-            <a:off x="8148320" y="3383280"/>
-            <a:ext cx="447040" cy="685800"/>
+            <a:off x="8188960" y="3364992"/>
+            <a:ext cx="452120" cy="685800"/>
           </a:xfrm>
           <a:prstGeom prst="rect">
             <a:avLst/>
@@ -3445,28 +3473,34 @@
               <a:buNone/>
             </a:pPr>
             <a:r>
-              <a:rPr lang="en-US" sz="850" b="1" dirty="0">
+              <a:rPr lang="ja-JP" altLang="en-US" sz="850" b="1" dirty="0">
                 <a:solidFill>
                   <a:srgbClr val="FFD600"/>
                 </a:solidFill>
+                <a:latin typeface="Noto Sans JP" pitchFamily="34" charset="0"/>
+                <a:ea typeface="Noto Sans JP" pitchFamily="34" charset="-122"/>
+                <a:cs typeface="Noto Sans JP" pitchFamily="34" charset="-120"/>
               </a:rPr>
               <a:t>宿題</a:t>
             </a:r>
-            <a:endParaRPr lang="en-US" sz="850" dirty="0"/>
+            <a:endParaRPr lang="ja-JP" sz="850" dirty="0"/>
           </a:p>
           <a:p>
             <a:pPr algn="ctr" indent="0" marL="0">
               <a:buNone/>
             </a:pPr>
             <a:r>
-              <a:rPr lang="en-US" sz="900" b="1" dirty="0">
+              <a:rPr lang="ja-JP" altLang="en-US" sz="900" b="1" dirty="0">
                 <a:solidFill>
                   <a:srgbClr val="FFD600"/>
                 </a:solidFill>
+                <a:latin typeface="Noto Sans JP" pitchFamily="34" charset="0"/>
+                <a:ea typeface="Noto Sans JP" pitchFamily="34" charset="-122"/>
+                <a:cs typeface="Noto Sans JP" pitchFamily="34" charset="-120"/>
               </a:rPr>
               <a:t>5分</a:t>
             </a:r>
-            <a:endParaRPr lang="en-US" sz="850" dirty="0"/>
+            <a:endParaRPr lang="ja-JP" sz="850" dirty="0"/>
           </a:p>
         </p:txBody>
       </p:sp>
@@ -3478,7 +3512,7 @@
         </p:nvSpPr>
         <p:spPr>
           <a:xfrm>
-            <a:off x="548640" y="4160520"/>
+            <a:off x="502920" y="4187952"/>
             <a:ext cx="3657600" cy="274320"/>
           </a:xfrm>
           <a:prstGeom prst="rect">
@@ -3495,10 +3529,13 @@
               <a:buNone/>
             </a:pPr>
             <a:r>
-              <a:rPr lang="en-US" sz="1000" dirty="0">
+              <a:rPr lang="ja-JP" altLang="en-US" sz="1050" b="1" dirty="0">
                 <a:solidFill>
                   <a:srgbClr val="1A1A1A"/>
                 </a:solidFill>
+                <a:latin typeface="Noto Sans JP" pitchFamily="34" charset="0"/>
+                <a:ea typeface="Noto Sans JP" pitchFamily="34" charset="-122"/>
+                <a:cs typeface="Noto Sans JP" pitchFamily="34" charset="-120"/>
               </a:rPr>
               <a:t>■ </a:t>
             </a:r>
@@ -3506,10 +3543,13 @@
               <a:buNone/>
             </a:pPr>
             <a:r>
-              <a:rPr lang="en-US" sz="1000" dirty="0">
-                <a:solidFill>
-                  <a:schemeClr val="tx2"/>
-                </a:solidFill>
+              <a:rPr lang="ja-JP" altLang="en-US" sz="1050" b="1" dirty="0">
+                <a:solidFill>
+                  <a:srgbClr val="1A1A1A"/>
+                </a:solidFill>
+                <a:latin typeface="Noto Sans JP" pitchFamily="34" charset="0"/>
+                <a:ea typeface="Noto Sans JP" pitchFamily="34" charset="-122"/>
+                <a:cs typeface="Noto Sans JP" pitchFamily="34" charset="-120"/>
               </a:rPr>
               <a:t>聞く　</a:t>
             </a:r>
@@ -3517,10 +3557,13 @@
               <a:buNone/>
             </a:pPr>
             <a:r>
-              <a:rPr lang="en-US" sz="1000" dirty="0">
+              <a:rPr lang="ja-JP" altLang="en-US" sz="1050" b="1" dirty="0">
                 <a:solidFill>
                   <a:srgbClr val="DD6420"/>
                 </a:solidFill>
+                <a:latin typeface="Noto Sans JP" pitchFamily="34" charset="0"/>
+                <a:ea typeface="Noto Sans JP" pitchFamily="34" charset="-122"/>
+                <a:cs typeface="Noto Sans JP" pitchFamily="34" charset="-120"/>
               </a:rPr>
               <a:t>■ </a:t>
             </a:r>
@@ -3528,14 +3571,17 @@
               <a:buNone/>
             </a:pPr>
             <a:r>
-              <a:rPr lang="en-US" sz="1000" dirty="0">
-                <a:solidFill>
-                  <a:schemeClr val="tx2"/>
-                </a:solidFill>
+              <a:rPr lang="ja-JP" altLang="en-US" sz="1050" b="1" dirty="0">
+                <a:solidFill>
+                  <a:srgbClr val="1A1A1A"/>
+                </a:solidFill>
+                <a:latin typeface="Noto Sans JP" pitchFamily="34" charset="0"/>
+                <a:ea typeface="Noto Sans JP" pitchFamily="34" charset="-122"/>
+                <a:cs typeface="Noto Sans JP" pitchFamily="34" charset="-120"/>
               </a:rPr>
               <a:t>手を動かす</a:t>
             </a:r>
-            <a:endParaRPr lang="en-US" sz="1000" dirty="0"/>
+            <a:endParaRPr lang="ja-JP" sz="1050" dirty="0"/>
           </a:p>
         </p:txBody>
       </p:sp>
@@ -3551,8 +3597,8 @@
         </p:nvSpPr>
         <p:spPr>
           <a:xfrm>
-            <a:off x="8229600" y="4773168"/>
-            <a:ext cx="365760" cy="228600"/>
+            <a:off x="8366760" y="4754880"/>
+            <a:ext cx="365760" cy="274320"/>
           </a:xfrm>
           <a:prstGeom prst="rect">
             <a:avLst/>
@@ -3564,20 +3610,23 @@
           </a:extLst>
         </p:spPr>
         <p:txBody>
-          <a:bodyPr/>
+          <a:bodyPr anchor="ctr"/>
           <a:lstStyle>
             <a:lvl1pPr>
-              <a:defRPr sz="900">
-                <a:solidFill>
-                  <a:srgbClr val="5A6872"/>
-                </a:solidFill>
+              <a:defRPr sz="850">
+                <a:solidFill>
+                  <a:srgbClr val="FFFFFF"/>
+                </a:solidFill>
+                <a:latin typeface="Noto Sans JP"/>
+                <a:ea typeface="Noto Sans JP"/>
+                <a:cs typeface="Noto Sans JP"/>
               </a:defRPr>
             </a:lvl1pPr>
           </a:lstStyle>
           <a:p>
             <a:pPr algn="r"/>
             <a:fld id="{F7021451-1387-4CA6-816F-3879F97B5CBC}" type="slidenum">
-              <a:rPr b="0" lang="en-US"/>
+              <a:rPr b="1" lang="en-US"/>
               <a:t>2</a:t>
             </a:fld>
             <a:endParaRPr lang="en-US"/>
@@ -3612,15 +3661,58 @@
       <p:sp>
         <p:nvSpPr>
           <p:cNvPr id="2" name="Text 0"/>
-          <p:cNvSpPr/>
-          <p:nvPr>
-            <p:ph idx="100" type="title" hasCustomPrompt="1"/>
-          </p:nvPr>
-        </p:nvSpPr>
-        <p:spPr>
-          <a:xfrm>
-            <a:off x="548640" y="658368"/>
-            <a:ext cx="8046720" cy="566928"/>
+          <p:cNvSpPr txBox="1"/>
+          <p:nvPr/>
+        </p:nvSpPr>
+        <p:spPr>
+          <a:xfrm rot="-180000">
+            <a:off x="411480" y="201168"/>
+            <a:ext cx="1478128" cy="352044"/>
+          </a:xfrm>
+          <a:prstGeom prst="rect">
+            <a:avLst/>
+          </a:prstGeom>
+          <a:solidFill>
+            <a:srgbClr val="1A1A1A"/>
+          </a:solidFill>
+          <a:ln>
+            <a:solidFill>
+              <a:srgbClr val="1A1A1A"/>
+            </a:solidFill>
+          </a:ln>
+        </p:spPr>
+        <p:txBody>
+          <a:bodyPr wrap="square" lIns="0" tIns="0" rIns="0" bIns="0" rtlCol="0" anchor="ctr"/>
+          <a:lstStyle/>
+          <a:p>
+            <a:pPr algn="ctr" indent="0" marL="0">
+              <a:buNone/>
+            </a:pPr>
+            <a:r>
+              <a:rPr lang="ja-JP" altLang="en-US" sz="1100" dirty="0">
+                <a:solidFill>
+                  <a:srgbClr val="FFFFFF"/>
+                </a:solidFill>
+                <a:latin typeface="Dela Gothic One" pitchFamily="34" charset="0"/>
+                <a:ea typeface="けいふぉんと" pitchFamily="34" charset="-122"/>
+                <a:cs typeface="Dela Gothic One" pitchFamily="34" charset="-120"/>
+              </a:rPr>
+              <a:t>説明① 10分</a:t>
+            </a:r>
+            <a:endParaRPr lang="ja-JP" sz="1100" dirty="0"/>
+          </a:p>
+        </p:txBody>
+      </p:sp>
+      <p:sp>
+        <p:nvSpPr>
+          <p:cNvPr id="3" name="Text 1"/>
+          <p:cNvSpPr txBox="1"/>
+          <p:nvPr/>
+        </p:nvSpPr>
+        <p:spPr>
+          <a:xfrm>
+            <a:off x="411480" y="502920"/>
+            <a:ext cx="8321040" cy="685800"/>
           </a:xfrm>
           <a:prstGeom prst="rect">
             <a:avLst/>
@@ -3629,61 +3721,122 @@
           <a:ln/>
         </p:spPr>
         <p:txBody>
-          <a:bodyPr wrap="square" lIns="0" tIns="0" rIns="0" bIns="0" rtlCol="0" anchor="ctr"/>
-          <a:lstStyle/>
-          <a:p>
-            <a:pPr algn="l" indent="0" marL="0">
-              <a:buNone/>
-            </a:pPr>
-            <a:r>
-              <a:rPr lang="en-US" sz="2400" b="1" dirty="0">
-                <a:solidFill>
-                  <a:schemeClr val="tx1"/>
-                </a:solidFill>
+          <a:bodyPr wrap="square" lIns="0" tIns="0" rIns="0" bIns="0" rtlCol="0" anchor="ctr">
+            <a:normAutofit/>
+          </a:bodyPr>
+          <a:lstStyle/>
+          <a:p>
+            <a:pPr indent="0" marL="0">
+              <a:buNone/>
+            </a:pPr>
+            <a:r>
+              <a:rPr lang="ja-JP" altLang="en-US" sz="2600" dirty="0">
+                <a:solidFill>
+                  <a:srgbClr val="1A1A1A"/>
+                </a:solidFill>
+                <a:latin typeface="Dela Gothic One" pitchFamily="34" charset="0"/>
+                <a:ea typeface="けいふぉんと" pitchFamily="34" charset="-122"/>
+                <a:cs typeface="Dela Gothic One" pitchFamily="34" charset="-120"/>
               </a:rPr>
               <a:t>チャットAIとClaude Codeの違い</a:t>
             </a:r>
-            <a:endParaRPr lang="en-US" sz="2400" dirty="0"/>
-          </a:p>
-        </p:txBody>
-      </p:sp>
-      <p:sp>
-        <p:nvSpPr>
-          <p:cNvPr id="3" name="chip"/>
+            <a:endParaRPr lang="ja-JP" sz="2600" dirty="0"/>
+          </a:p>
+        </p:txBody>
+      </p:sp>
+      <p:sp>
+        <p:nvSpPr>
+          <p:cNvPr id="5" name="card"/>
           <p:cNvSpPr/>
           <p:nvPr/>
         </p:nvSpPr>
         <p:spPr>
           <a:xfrm>
-            <a:off x="548640" y="292608"/>
-            <a:ext cx="1344168" cy="292608"/>
+            <a:off x="502920" y="1417320"/>
+            <a:ext cx="3611880" cy="3063240"/>
           </a:xfrm>
           <a:prstGeom prst="roundRect">
             <a:avLst>
-              <a:gd name="adj" fmla="val 50000"/>
+              <a:gd name="adj" fmla="val 2985"/>
             </a:avLst>
           </a:prstGeom>
           <a:solidFill>
-            <a:schemeClr val="tx1"/>
-          </a:solidFill>
-          <a:ln w="12700">
+            <a:srgbClr val="FFFFFF"/>
+          </a:solidFill>
+          <a:ln w="25400">
             <a:solidFill>
-              <a:schemeClr val="tx1"/>
+              <a:srgbClr val="1A1A1A"/>
             </a:solidFill>
             <a:prstDash val="solid"/>
           </a:ln>
-        </p:spPr>
-      </p:sp>
-      <p:sp>
-        <p:nvSpPr>
-          <p:cNvPr id="4" name="chip-text"/>
+          <a:effectLst>
+            <a:outerShdw sx="100000" sy="100000" kx="0" ky="0" algn="bl" rotWithShape="0" blurRad="101600" dist="50800" dir="2700000">
+              <a:srgbClr val="1A1A1A">
+                <a:alpha val="100000"/>
+              </a:srgbClr>
+            </a:outerShdw>
+          </a:effectLst>
+        </p:spPr>
+      </p:sp>
+      <p:sp>
+        <p:nvSpPr>
+          <p:cNvPr id="6" name="Text 3"/>
           <p:cNvSpPr txBox="1"/>
           <p:nvPr/>
         </p:nvSpPr>
         <p:spPr>
           <a:xfrm>
-            <a:off x="548640" y="292608"/>
-            <a:ext cx="1344168" cy="292608"/>
+            <a:off x="704088" y="1618488"/>
+            <a:ext cx="2414016" cy="329184"/>
+          </a:xfrm>
+          <a:prstGeom prst="roundRect">
+            <a:avLst>
+              <a:gd name="adj" fmla="val 16667"/>
+            </a:avLst>
+          </a:prstGeom>
+          <a:solidFill>
+            <a:srgbClr val="1A1A1A"/>
+          </a:solidFill>
+          <a:ln>
+            <a:solidFill>
+              <a:srgbClr val="1A1A1A"/>
+            </a:solidFill>
+          </a:ln>
+        </p:spPr>
+        <p:txBody>
+          <a:bodyPr wrap="square" lIns="0" tIns="0" rIns="0" bIns="0" rtlCol="0" anchor="ctr">
+            <a:normAutofit/>
+          </a:bodyPr>
+          <a:lstStyle/>
+          <a:p>
+            <a:pPr algn="ctr" indent="0" marL="0">
+              <a:buNone/>
+            </a:pPr>
+            <a:r>
+              <a:rPr lang="ja-JP" altLang="en-US" sz="1300" b="1" dirty="0">
+                <a:solidFill>
+                  <a:srgbClr val="FFFFFF"/>
+                </a:solidFill>
+                <a:latin typeface="Noto Sans JP" pitchFamily="34" charset="0"/>
+                <a:ea typeface="Noto Sans JP" pitchFamily="34" charset="-122"/>
+                <a:cs typeface="Noto Sans JP" pitchFamily="34" charset="-120"/>
+              </a:rPr>
+              <a:t>チャットAI（相談相手）</a:t>
+            </a:r>
+            <a:endParaRPr lang="ja-JP" sz="1300" dirty="0"/>
+          </a:p>
+        </p:txBody>
+      </p:sp>
+      <p:sp>
+        <p:nvSpPr>
+          <p:cNvPr id="7" name="Text 4"/>
+          <p:cNvSpPr txBox="1"/>
+          <p:nvPr/>
+        </p:nvSpPr>
+        <p:spPr>
+          <a:xfrm>
+            <a:off x="731520" y="2130552"/>
+            <a:ext cx="3154680" cy="2194560"/>
           </a:xfrm>
           <a:prstGeom prst="rect">
             <a:avLst/>
@@ -3692,42 +3845,261 @@
           <a:ln/>
         </p:spPr>
         <p:txBody>
-          <a:bodyPr wrap="square" lIns="0" tIns="0" rIns="0" bIns="0" rtlCol="0" anchor="ctr"/>
-          <a:lstStyle/>
-          <a:p>
-            <a:pPr algn="ctr" indent="0" marL="0">
-              <a:buNone/>
-            </a:pPr>
-            <a:r>
-              <a:rPr lang="en-US" sz="1100" b="1" dirty="0">
-                <a:solidFill>
-                  <a:schemeClr val="accent1"/>
-                </a:solidFill>
-              </a:rPr>
-              <a:t>説明① 10分</a:t>
-            </a:r>
-            <a:endParaRPr lang="en-US" sz="1100" dirty="0"/>
-          </a:p>
-        </p:txBody>
-      </p:sp>
-      <p:sp>
-        <p:nvSpPr>
-          <p:cNvPr id="6" name="card"/>
+          <a:bodyPr wrap="square" lIns="0" tIns="0" rIns="0" bIns="0" rtlCol="0" anchor="t">
+            <a:normAutofit/>
+          </a:bodyPr>
+          <a:lstStyle/>
+          <a:p>
+            <a:pPr marL="342900" indent="-342900">
+              <a:spcAft>
+                <a:spcPts val="800"/>
+              </a:spcAft>
+              <a:buSzPct val="100000"/>
+              <a:buChar char="●"/>
+            </a:pPr>
+            <a:r>
+              <a:rPr lang="ja-JP" altLang="en-US" sz="1350" b="1" dirty="0">
+                <a:solidFill>
+                  <a:srgbClr val="1A1A1A"/>
+                </a:solidFill>
+                <a:latin typeface="Noto Sans JP" pitchFamily="34" charset="0"/>
+                <a:ea typeface="Noto Sans JP" pitchFamily="34" charset="-122"/>
+                <a:cs typeface="Noto Sans JP" pitchFamily="34" charset="-120"/>
+              </a:rPr>
+              <a:t>ブラウザ・アプリで使う</a:t>
+            </a:r>
+            <a:endParaRPr lang="ja-JP" sz="1350" dirty="0"/>
+          </a:p>
+          <a:p>
+            <a:pPr marL="342900" indent="-342900">
+              <a:spcAft>
+                <a:spcPts val="800"/>
+              </a:spcAft>
+              <a:buSzPct val="100000"/>
+              <a:buChar char="●"/>
+            </a:pPr>
+            <a:r>
+              <a:rPr lang="ja-JP" altLang="en-US" sz="1350" b="1" dirty="0">
+                <a:solidFill>
+                  <a:srgbClr val="1A1A1A"/>
+                </a:solidFill>
+                <a:latin typeface="Noto Sans JP" pitchFamily="34" charset="0"/>
+                <a:ea typeface="Noto Sans JP" pitchFamily="34" charset="-122"/>
+                <a:cs typeface="Noto Sans JP" pitchFamily="34" charset="-120"/>
+              </a:rPr>
+              <a:t>答えを文章で返す</a:t>
+            </a:r>
+            <a:endParaRPr lang="ja-JP" sz="1350" dirty="0"/>
+          </a:p>
+          <a:p>
+            <a:pPr marL="342900" indent="-342900">
+              <a:spcAft>
+                <a:spcPts val="800"/>
+              </a:spcAft>
+              <a:buSzPct val="100000"/>
+              <a:buChar char="●"/>
+            </a:pPr>
+            <a:r>
+              <a:rPr lang="ja-JP" altLang="en-US" sz="1350" b="1" dirty="0">
+                <a:solidFill>
+                  <a:srgbClr val="1A1A1A"/>
+                </a:solidFill>
+                <a:latin typeface="Noto Sans JP" pitchFamily="34" charset="0"/>
+                <a:ea typeface="Noto Sans JP" pitchFamily="34" charset="-122"/>
+                <a:cs typeface="Noto Sans JP" pitchFamily="34" charset="-120"/>
+              </a:rPr>
+              <a:t>ファイルは自分でコピーする</a:t>
+            </a:r>
+            <a:endParaRPr lang="ja-JP" sz="1350" dirty="0"/>
+          </a:p>
+        </p:txBody>
+      </p:sp>
+      <p:sp>
+        <p:nvSpPr>
+          <p:cNvPr id="8" name="card"/>
           <p:cNvSpPr/>
           <p:nvPr/>
         </p:nvSpPr>
         <p:spPr>
           <a:xfrm>
-            <a:off x="548640" y="1463040"/>
-            <a:ext cx="3611880" cy="3017520"/>
+            <a:off x="5029200" y="1417320"/>
+            <a:ext cx="3611880" cy="3063240"/>
           </a:xfrm>
           <a:prstGeom prst="roundRect">
             <a:avLst>
-              <a:gd name="adj" fmla="val 3636"/>
+              <a:gd name="adj" fmla="val 2985"/>
             </a:avLst>
           </a:prstGeom>
           <a:solidFill>
-            <a:srgbClr val="F4F4F4"/>
+            <a:srgbClr val="FFFFFF"/>
+          </a:solidFill>
+          <a:ln w="25400">
+            <a:solidFill>
+              <a:srgbClr val="1A1A1A"/>
+            </a:solidFill>
+            <a:prstDash val="solid"/>
+          </a:ln>
+          <a:effectLst>
+            <a:outerShdw sx="100000" sy="100000" kx="0" ky="0" algn="bl" rotWithShape="0" blurRad="101600" dist="50800" dir="2700000">
+              <a:srgbClr val="1A1A1A">
+                <a:alpha val="100000"/>
+              </a:srgbClr>
+            </a:outerShdw>
+          </a:effectLst>
+        </p:spPr>
+      </p:sp>
+      <p:sp>
+        <p:nvSpPr>
+          <p:cNvPr id="9" name="Text 6"/>
+          <p:cNvSpPr txBox="1"/>
+          <p:nvPr/>
+        </p:nvSpPr>
+        <p:spPr>
+          <a:xfrm>
+            <a:off x="5230368" y="1618488"/>
+            <a:ext cx="3209544" cy="329184"/>
+          </a:xfrm>
+          <a:prstGeom prst="roundRect">
+            <a:avLst>
+              <a:gd name="adj" fmla="val 16667"/>
+            </a:avLst>
+          </a:prstGeom>
+          <a:solidFill>
+            <a:srgbClr val="DD6420"/>
+          </a:solidFill>
+          <a:ln>
+            <a:solidFill>
+              <a:srgbClr val="DD6420"/>
+            </a:solidFill>
+          </a:ln>
+        </p:spPr>
+        <p:txBody>
+          <a:bodyPr wrap="square" lIns="0" tIns="0" rIns="0" bIns="0" rtlCol="0" anchor="ctr">
+            <a:normAutofit/>
+          </a:bodyPr>
+          <a:lstStyle/>
+          <a:p>
+            <a:pPr algn="ctr" indent="0" marL="0">
+              <a:buNone/>
+            </a:pPr>
+            <a:r>
+              <a:rPr lang="ja-JP" altLang="en-US" sz="1300" b="1" dirty="0">
+                <a:solidFill>
+                  <a:srgbClr val="FFFFFF"/>
+                </a:solidFill>
+                <a:latin typeface="Noto Sans JP" pitchFamily="34" charset="0"/>
+                <a:ea typeface="Noto Sans JP" pitchFamily="34" charset="-122"/>
+                <a:cs typeface="Noto Sans JP" pitchFamily="34" charset="-120"/>
+              </a:rPr>
+              <a:t>Claude Code（隣に座る開発者）</a:t>
+            </a:r>
+            <a:endParaRPr lang="ja-JP" sz="1300" dirty="0"/>
+          </a:p>
+        </p:txBody>
+      </p:sp>
+      <p:sp>
+        <p:nvSpPr>
+          <p:cNvPr id="10" name="Text 7"/>
+          <p:cNvSpPr txBox="1"/>
+          <p:nvPr/>
+        </p:nvSpPr>
+        <p:spPr>
+          <a:xfrm>
+            <a:off x="5257800" y="2130552"/>
+            <a:ext cx="3154680" cy="2194560"/>
+          </a:xfrm>
+          <a:prstGeom prst="rect">
+            <a:avLst/>
+          </a:prstGeom>
+          <a:noFill/>
+          <a:ln/>
+        </p:spPr>
+        <p:txBody>
+          <a:bodyPr wrap="square" lIns="0" tIns="0" rIns="0" bIns="0" rtlCol="0" anchor="t">
+            <a:normAutofit/>
+          </a:bodyPr>
+          <a:lstStyle/>
+          <a:p>
+            <a:pPr marL="342900" indent="-342900">
+              <a:spcAft>
+                <a:spcPts val="800"/>
+              </a:spcAft>
+              <a:buSzPct val="100000"/>
+              <a:buChar char="●"/>
+            </a:pPr>
+            <a:r>
+              <a:rPr lang="ja-JP" altLang="en-US" sz="1350" b="1" dirty="0">
+                <a:solidFill>
+                  <a:srgbClr val="1A1A1A"/>
+                </a:solidFill>
+                <a:latin typeface="Noto Sans JP" pitchFamily="34" charset="0"/>
+                <a:ea typeface="Noto Sans JP" pitchFamily="34" charset="-122"/>
+                <a:cs typeface="Noto Sans JP" pitchFamily="34" charset="-120"/>
+              </a:rPr>
+              <a:t>PCのターミナルで使う</a:t>
+            </a:r>
+            <a:endParaRPr lang="ja-JP" sz="1350" dirty="0"/>
+          </a:p>
+          <a:p>
+            <a:pPr marL="342900" indent="-342900">
+              <a:spcAft>
+                <a:spcPts val="800"/>
+              </a:spcAft>
+              <a:buSzPct val="100000"/>
+              <a:buChar char="●"/>
+            </a:pPr>
+            <a:r>
+              <a:rPr lang="ja-JP" altLang="en-US" sz="1350" b="1" dirty="0">
+                <a:solidFill>
+                  <a:srgbClr val="1A1A1A"/>
+                </a:solidFill>
+                <a:latin typeface="Noto Sans JP" pitchFamily="34" charset="0"/>
+                <a:ea typeface="Noto Sans JP" pitchFamily="34" charset="-122"/>
+                <a:cs typeface="Noto Sans JP" pitchFamily="34" charset="-120"/>
+              </a:rPr>
+              <a:t>フォルダの中のファイルを直接作る・直す</a:t>
+            </a:r>
+            <a:endParaRPr lang="ja-JP" sz="1350" dirty="0"/>
+          </a:p>
+          <a:p>
+            <a:pPr marL="342900" indent="-342900">
+              <a:spcAft>
+                <a:spcPts val="800"/>
+              </a:spcAft>
+              <a:buSzPct val="100000"/>
+              <a:buChar char="●"/>
+            </a:pPr>
+            <a:r>
+              <a:rPr lang="ja-JP" altLang="en-US" sz="1350" b="1" dirty="0">
+                <a:solidFill>
+                  <a:srgbClr val="1A1A1A"/>
+                </a:solidFill>
+                <a:latin typeface="Noto Sans JP" pitchFamily="34" charset="0"/>
+                <a:ea typeface="Noto Sans JP" pitchFamily="34" charset="-122"/>
+                <a:cs typeface="Noto Sans JP" pitchFamily="34" charset="-120"/>
+              </a:rPr>
+              <a:t>動かして確かめることもできる</a:t>
+            </a:r>
+            <a:endParaRPr lang="ja-JP" sz="1350" dirty="0"/>
+          </a:p>
+        </p:txBody>
+      </p:sp>
+      <p:sp>
+        <p:nvSpPr>
+          <p:cNvPr id="11" name="icon-circle"/>
+          <p:cNvSpPr/>
+          <p:nvPr/>
+        </p:nvSpPr>
+        <p:spPr>
+          <a:xfrm>
+            <a:off x="4325112" y="2702052"/>
+            <a:ext cx="493776" cy="493776"/>
+          </a:xfrm>
+          <a:prstGeom prst="ellipse">
+            <a:avLst/>
+          </a:prstGeom>
+          <a:solidFill>
+            <a:srgbClr val="DD6420"/>
           </a:solidFill>
           <a:ln w="19050">
             <a:solidFill>
@@ -3735,301 +4107,11 @@
             </a:solidFill>
             <a:prstDash val="solid"/>
           </a:ln>
-          <a:effectLst>
-            <a:outerShdw sx="100000" sy="100000" kx="0" ky="0" algn="bl" rotWithShape="0" blurRad="101600" dist="38100" dir="2700000">
-              <a:srgbClr val="000000">
-                <a:alpha val="18000"/>
-              </a:srgbClr>
-            </a:outerShdw>
-          </a:effectLst>
-        </p:spPr>
-      </p:sp>
-      <p:sp>
-        <p:nvSpPr>
-          <p:cNvPr id="7" name="Text 4"/>
-          <p:cNvSpPr txBox="1"/>
-          <p:nvPr/>
-        </p:nvSpPr>
-        <p:spPr>
-          <a:xfrm>
-            <a:off x="777240" y="1645920"/>
-            <a:ext cx="3154680" cy="411480"/>
-          </a:xfrm>
-          <a:prstGeom prst="rect">
-            <a:avLst/>
-          </a:prstGeom>
-          <a:noFill/>
-          <a:ln/>
-        </p:spPr>
-        <p:txBody>
-          <a:bodyPr wrap="square" lIns="0" tIns="0" rIns="0" bIns="0" rtlCol="0" anchor="ctr"/>
-          <a:lstStyle/>
-          <a:p>
-            <a:pPr indent="0" marL="0">
-              <a:buNone/>
-            </a:pPr>
-            <a:r>
-              <a:rPr lang="en-US" sz="1600" b="1" dirty="0">
-                <a:solidFill>
-                  <a:schemeClr val="tx1"/>
-                </a:solidFill>
-              </a:rPr>
-              <a:t>チャットAI（相談相手）</a:t>
-            </a:r>
-            <a:endParaRPr lang="en-US" sz="1600" dirty="0"/>
-          </a:p>
-        </p:txBody>
-      </p:sp>
-      <p:sp>
-        <p:nvSpPr>
-          <p:cNvPr id="8" name="Text 5"/>
-          <p:cNvSpPr txBox="1"/>
-          <p:nvPr/>
-        </p:nvSpPr>
-        <p:spPr>
-          <a:xfrm>
-            <a:off x="777240" y="2194560"/>
-            <a:ext cx="3154680" cy="2103120"/>
-          </a:xfrm>
-          <a:prstGeom prst="rect">
-            <a:avLst/>
-          </a:prstGeom>
-          <a:noFill/>
-          <a:ln/>
-        </p:spPr>
-        <p:txBody>
-          <a:bodyPr wrap="square" lIns="0" tIns="0" rIns="0" bIns="0" rtlCol="0" anchor="t"/>
-          <a:lstStyle/>
-          <a:p>
-            <a:pPr marL="342900" indent="-342900">
-              <a:spcAft>
-                <a:spcPts val="800"/>
-              </a:spcAft>
-              <a:buSzPct val="100000"/>
-              <a:buChar char="•"/>
-            </a:pPr>
-            <a:r>
-              <a:rPr lang="en-US" sz="1300" dirty="0">
-                <a:solidFill>
-                  <a:schemeClr val="tx1"/>
-                </a:solidFill>
-              </a:rPr>
-              <a:t>ブラウザ・アプリで使う</a:t>
-            </a:r>
-            <a:endParaRPr lang="en-US" sz="1300" dirty="0"/>
-          </a:p>
-          <a:p>
-            <a:pPr marL="342900" indent="-342900">
-              <a:spcAft>
-                <a:spcPts val="800"/>
-              </a:spcAft>
-              <a:buSzPct val="100000"/>
-              <a:buChar char="•"/>
-            </a:pPr>
-            <a:r>
-              <a:rPr lang="en-US" sz="1300" dirty="0">
-                <a:solidFill>
-                  <a:schemeClr val="tx1"/>
-                </a:solidFill>
-              </a:rPr>
-              <a:t>答えを文章で返す</a:t>
-            </a:r>
-            <a:endParaRPr lang="en-US" sz="1300" dirty="0"/>
-          </a:p>
-          <a:p>
-            <a:pPr marL="342900" indent="-342900">
-              <a:spcAft>
-                <a:spcPts val="800"/>
-              </a:spcAft>
-              <a:buSzPct val="100000"/>
-              <a:buChar char="•"/>
-            </a:pPr>
-            <a:r>
-              <a:rPr lang="en-US" sz="1300" dirty="0">
-                <a:solidFill>
-                  <a:schemeClr val="tx1"/>
-                </a:solidFill>
-              </a:rPr>
-              <a:t>ファイルは自分でコピーする</a:t>
-            </a:r>
-            <a:endParaRPr lang="en-US" sz="1300" dirty="0"/>
-          </a:p>
-        </p:txBody>
-      </p:sp>
-      <p:sp>
-        <p:nvSpPr>
-          <p:cNvPr id="9" name="card"/>
-          <p:cNvSpPr/>
-          <p:nvPr/>
-        </p:nvSpPr>
-        <p:spPr>
-          <a:xfrm>
-            <a:off x="4983480" y="1463040"/>
-            <a:ext cx="3611880" cy="3017520"/>
-          </a:xfrm>
-          <a:prstGeom prst="roundRect">
-            <a:avLst>
-              <a:gd name="adj" fmla="val 3636"/>
-            </a:avLst>
-          </a:prstGeom>
-          <a:solidFill>
-            <a:schemeClr val="bg2"/>
-          </a:solidFill>
-          <a:ln w="19050">
-            <a:solidFill>
-              <a:srgbClr val="DD6420"/>
-            </a:solidFill>
-            <a:prstDash val="solid"/>
-          </a:ln>
-          <a:effectLst>
-            <a:outerShdw sx="100000" sy="100000" kx="0" ky="0" algn="bl" rotWithShape="0" blurRad="101600" dist="38100" dir="2700000">
-              <a:srgbClr val="000000">
-                <a:alpha val="18000"/>
-              </a:srgbClr>
-            </a:outerShdw>
-          </a:effectLst>
-        </p:spPr>
-      </p:sp>
-      <p:sp>
-        <p:nvSpPr>
-          <p:cNvPr id="10" name="Text 7"/>
-          <p:cNvSpPr txBox="1"/>
-          <p:nvPr/>
-        </p:nvSpPr>
-        <p:spPr>
-          <a:xfrm>
-            <a:off x="5212080" y="1645920"/>
-            <a:ext cx="3154680" cy="411480"/>
-          </a:xfrm>
-          <a:prstGeom prst="rect">
-            <a:avLst/>
-          </a:prstGeom>
-          <a:noFill/>
-          <a:ln/>
-        </p:spPr>
-        <p:txBody>
-          <a:bodyPr wrap="square" lIns="0" tIns="0" rIns="0" bIns="0" rtlCol="0" anchor="ctr"/>
-          <a:lstStyle/>
-          <a:p>
-            <a:pPr indent="0" marL="0">
-              <a:buNone/>
-            </a:pPr>
-            <a:r>
-              <a:rPr lang="en-US" sz="1600" b="1" dirty="0">
-                <a:solidFill>
-                  <a:schemeClr val="accent2"/>
-                </a:solidFill>
-              </a:rPr>
-              <a:t>Claude Code（隣に座る開発者）</a:t>
-            </a:r>
-            <a:endParaRPr lang="en-US" sz="1600" dirty="0"/>
-          </a:p>
-        </p:txBody>
-      </p:sp>
-      <p:sp>
-        <p:nvSpPr>
-          <p:cNvPr id="11" name="Text 8"/>
-          <p:cNvSpPr txBox="1"/>
-          <p:nvPr/>
-        </p:nvSpPr>
-        <p:spPr>
-          <a:xfrm>
-            <a:off x="5212080" y="2194560"/>
-            <a:ext cx="3154680" cy="2103120"/>
-          </a:xfrm>
-          <a:prstGeom prst="rect">
-            <a:avLst/>
-          </a:prstGeom>
-          <a:noFill/>
-          <a:ln/>
-        </p:spPr>
-        <p:txBody>
-          <a:bodyPr wrap="square" lIns="0" tIns="0" rIns="0" bIns="0" rtlCol="0" anchor="t"/>
-          <a:lstStyle/>
-          <a:p>
-            <a:pPr marL="342900" indent="-342900">
-              <a:spcAft>
-                <a:spcPts val="800"/>
-              </a:spcAft>
-              <a:buSzPct val="100000"/>
-              <a:buChar char="•"/>
-            </a:pPr>
-            <a:r>
-              <a:rPr lang="en-US" sz="1300" dirty="0">
-                <a:solidFill>
-                  <a:schemeClr val="tx1"/>
-                </a:solidFill>
-              </a:rPr>
-              <a:t>PCのターミナルで使う</a:t>
-            </a:r>
-            <a:endParaRPr lang="en-US" sz="1300" dirty="0"/>
-          </a:p>
-          <a:p>
-            <a:pPr marL="342900" indent="-342900">
-              <a:spcAft>
-                <a:spcPts val="800"/>
-              </a:spcAft>
-              <a:buSzPct val="100000"/>
-              <a:buChar char="•"/>
-            </a:pPr>
-            <a:r>
-              <a:rPr lang="en-US" sz="1300" dirty="0">
-                <a:solidFill>
-                  <a:schemeClr val="tx1"/>
-                </a:solidFill>
-              </a:rPr>
-              <a:t>フォルダの中のファイルを直接作る・直す</a:t>
-            </a:r>
-            <a:endParaRPr lang="en-US" sz="1300" dirty="0"/>
-          </a:p>
-          <a:p>
-            <a:pPr marL="342900" indent="-342900">
-              <a:spcAft>
-                <a:spcPts val="800"/>
-              </a:spcAft>
-              <a:buSzPct val="100000"/>
-              <a:buChar char="•"/>
-            </a:pPr>
-            <a:r>
-              <a:rPr lang="en-US" sz="1300" dirty="0">
-                <a:solidFill>
-                  <a:schemeClr val="tx1"/>
-                </a:solidFill>
-              </a:rPr>
-              <a:t>動かして確かめることもできる</a:t>
-            </a:r>
-            <a:endParaRPr lang="en-US" sz="1300" dirty="0"/>
-          </a:p>
-        </p:txBody>
-      </p:sp>
-      <p:sp>
-        <p:nvSpPr>
-          <p:cNvPr id="12" name="icon-circle"/>
-          <p:cNvSpPr/>
-          <p:nvPr/>
-        </p:nvSpPr>
-        <p:spPr>
-          <a:xfrm>
-            <a:off x="4325112" y="2724912"/>
-            <a:ext cx="493776" cy="493776"/>
-          </a:xfrm>
-          <a:prstGeom prst="ellipse">
-            <a:avLst/>
-          </a:prstGeom>
-          <a:solidFill>
-            <a:schemeClr val="accent2"/>
-          </a:solidFill>
-          <a:ln w="15875">
-            <a:solidFill>
-              <a:srgbClr val="1A1A1A"/>
-            </a:solidFill>
-            <a:prstDash val="solid"/>
-          </a:ln>
         </p:spPr>
       </p:sp>
       <p:pic>
         <p:nvPicPr>
-          <p:cNvPr id="13" name="icon" descr="preencoded.png">    </p:cNvPr>
+          <p:cNvPr id="12" name="icon" descr="preencoded.png">    </p:cNvPr>
           <p:cNvPicPr>
             <a:picLocks noChangeAspect="1"/>
           </p:cNvPicPr>
@@ -4043,8 +4125,8 @@
         </p:blipFill>
         <p:spPr>
           <a:xfrm>
-            <a:off x="4453494" y="2853294"/>
-            <a:ext cx="237012" cy="237012"/>
+            <a:off x="4448556" y="2825496"/>
+            <a:ext cx="246888" cy="246888"/>
           </a:xfrm>
           <a:prstGeom prst="rect">
             <a:avLst/>
@@ -4063,8 +4145,8 @@
         </p:nvSpPr>
         <p:spPr>
           <a:xfrm>
-            <a:off x="8229600" y="4773168"/>
-            <a:ext cx="365760" cy="228600"/>
+            <a:off x="8366760" y="4754880"/>
+            <a:ext cx="365760" cy="274320"/>
           </a:xfrm>
           <a:prstGeom prst="rect">
             <a:avLst/>
@@ -4076,20 +4158,23 @@
           </a:extLst>
         </p:spPr>
         <p:txBody>
-          <a:bodyPr/>
+          <a:bodyPr anchor="ctr"/>
           <a:lstStyle>
             <a:lvl1pPr>
-              <a:defRPr sz="900">
-                <a:solidFill>
-                  <a:srgbClr val="5A6872"/>
-                </a:solidFill>
+              <a:defRPr sz="850">
+                <a:solidFill>
+                  <a:srgbClr val="FFFFFF"/>
+                </a:solidFill>
+                <a:latin typeface="Noto Sans JP"/>
+                <a:ea typeface="Noto Sans JP"/>
+                <a:cs typeface="Noto Sans JP"/>
               </a:defRPr>
             </a:lvl1pPr>
           </a:lstStyle>
           <a:p>
             <a:pPr algn="r"/>
             <a:fld id="{F7021451-1387-4CA6-816F-3879F97B5CBC}" type="slidenum">
-              <a:rPr b="0" lang="en-US"/>
+              <a:rPr b="1" lang="en-US"/>
               <a:t>3</a:t>
             </a:fld>
             <a:endParaRPr lang="en-US"/>
@@ -4124,15 +4209,58 @@
       <p:sp>
         <p:nvSpPr>
           <p:cNvPr id="2" name="Text 0"/>
-          <p:cNvSpPr/>
-          <p:nvPr>
-            <p:ph idx="100" type="title" hasCustomPrompt="1"/>
-          </p:nvPr>
-        </p:nvSpPr>
-        <p:spPr>
-          <a:xfrm>
-            <a:off x="548640" y="658368"/>
-            <a:ext cx="8046720" cy="566928"/>
+          <p:cNvSpPr txBox="1"/>
+          <p:nvPr/>
+        </p:nvSpPr>
+        <p:spPr>
+          <a:xfrm rot="-180000">
+            <a:off x="411480" y="201168"/>
+            <a:ext cx="1478128" cy="352044"/>
+          </a:xfrm>
+          <a:prstGeom prst="rect">
+            <a:avLst/>
+          </a:prstGeom>
+          <a:solidFill>
+            <a:srgbClr val="1A1A1A"/>
+          </a:solidFill>
+          <a:ln>
+            <a:solidFill>
+              <a:srgbClr val="1A1A1A"/>
+            </a:solidFill>
+          </a:ln>
+        </p:spPr>
+        <p:txBody>
+          <a:bodyPr wrap="square" lIns="0" tIns="0" rIns="0" bIns="0" rtlCol="0" anchor="ctr"/>
+          <a:lstStyle/>
+          <a:p>
+            <a:pPr algn="ctr" indent="0" marL="0">
+              <a:buNone/>
+            </a:pPr>
+            <a:r>
+              <a:rPr lang="ja-JP" altLang="en-US" sz="1100" dirty="0">
+                <a:solidFill>
+                  <a:srgbClr val="FFFFFF"/>
+                </a:solidFill>
+                <a:latin typeface="Dela Gothic One" pitchFamily="34" charset="0"/>
+                <a:ea typeface="けいふぉんと" pitchFamily="34" charset="-122"/>
+                <a:cs typeface="Dela Gothic One" pitchFamily="34" charset="-120"/>
+              </a:rPr>
+              <a:t>説明① 10分</a:t>
+            </a:r>
+            <a:endParaRPr lang="ja-JP" sz="1100" dirty="0"/>
+          </a:p>
+        </p:txBody>
+      </p:sp>
+      <p:sp>
+        <p:nvSpPr>
+          <p:cNvPr id="3" name="Text 1"/>
+          <p:cNvSpPr txBox="1"/>
+          <p:nvPr/>
+        </p:nvSpPr>
+        <p:spPr>
+          <a:xfrm>
+            <a:off x="411480" y="502920"/>
+            <a:ext cx="8321040" cy="685800"/>
           </a:xfrm>
           <a:prstGeom prst="rect">
             <a:avLst/>
@@ -4141,86 +4269,60 @@
           <a:ln/>
         </p:spPr>
         <p:txBody>
-          <a:bodyPr wrap="square" lIns="0" tIns="0" rIns="0" bIns="0" rtlCol="0" anchor="ctr"/>
-          <a:lstStyle/>
-          <a:p>
-            <a:pPr algn="l" indent="0" marL="0">
-              <a:buNone/>
-            </a:pPr>
-            <a:r>
-              <a:rPr lang="en-US" sz="2400" b="1" dirty="0">
-                <a:solidFill>
-                  <a:schemeClr val="tx1"/>
-                </a:solidFill>
+          <a:bodyPr wrap="square" lIns="0" tIns="0" rIns="0" bIns="0" rtlCol="0" anchor="ctr">
+            <a:normAutofit/>
+          </a:bodyPr>
+          <a:lstStyle/>
+          <a:p>
+            <a:pPr indent="0" marL="0">
+              <a:buNone/>
+            </a:pPr>
+            <a:r>
+              <a:rPr lang="ja-JP" altLang="en-US" sz="2600" dirty="0">
+                <a:solidFill>
+                  <a:srgbClr val="1A1A1A"/>
+                </a:solidFill>
+                <a:latin typeface="Dela Gothic One" pitchFamily="34" charset="0"/>
+                <a:ea typeface="けいふぉんと" pitchFamily="34" charset="-122"/>
+                <a:cs typeface="Dela Gothic One" pitchFamily="34" charset="-120"/>
               </a:rPr>
               <a:t>最低限おぼえる言葉</a:t>
             </a:r>
-            <a:endParaRPr lang="en-US" sz="2400" dirty="0"/>
-          </a:p>
-        </p:txBody>
-      </p:sp>
-      <p:sp>
-        <p:nvSpPr>
-          <p:cNvPr id="3" name="chip"/>
+            <a:endParaRPr lang="ja-JP" sz="2600" dirty="0"/>
+          </a:p>
+        </p:txBody>
+      </p:sp>
+      <p:sp>
+        <p:nvSpPr>
+          <p:cNvPr id="4" name="Shape 2"/>
           <p:cNvSpPr/>
           <p:nvPr/>
         </p:nvSpPr>
         <p:spPr>
           <a:xfrm>
-            <a:off x="548640" y="292608"/>
-            <a:ext cx="1344168" cy="292608"/>
-          </a:xfrm>
-          <a:prstGeom prst="roundRect">
-            <a:avLst>
-              <a:gd name="adj" fmla="val 50000"/>
-            </a:avLst>
-          </a:prstGeom>
-          <a:solidFill>
-            <a:schemeClr val="tx1"/>
-          </a:solidFill>
-          <a:ln w="12700">
+            <a:off x="502920" y="1417320"/>
+            <a:ext cx="8138160" cy="2194560"/>
+          </a:xfrm>
+          <a:prstGeom prst="rect">
+            <a:avLst/>
+          </a:prstGeom>
+          <a:solidFill>
+            <a:srgbClr val="FFFFFF"/>
+          </a:solidFill>
+          <a:ln w="25400">
             <a:solidFill>
-              <a:schemeClr val="tx1"/>
+              <a:srgbClr val="1A1A1A"/>
             </a:solidFill>
             <a:prstDash val="solid"/>
           </a:ln>
-        </p:spPr>
-      </p:sp>
-      <p:sp>
-        <p:nvSpPr>
-          <p:cNvPr id="4" name="chip-text"/>
-          <p:cNvSpPr txBox="1"/>
-          <p:nvPr/>
-        </p:nvSpPr>
-        <p:spPr>
-          <a:xfrm>
-            <a:off x="548640" y="292608"/>
-            <a:ext cx="1344168" cy="292608"/>
-          </a:xfrm>
-          <a:prstGeom prst="rect">
-            <a:avLst/>
-          </a:prstGeom>
-          <a:noFill/>
-          <a:ln/>
-        </p:spPr>
-        <p:txBody>
-          <a:bodyPr wrap="square" lIns="0" tIns="0" rIns="0" bIns="0" rtlCol="0" anchor="ctr"/>
-          <a:lstStyle/>
-          <a:p>
-            <a:pPr algn="ctr" indent="0" marL="0">
-              <a:buNone/>
-            </a:pPr>
-            <a:r>
-              <a:rPr lang="en-US" sz="1100" b="1" dirty="0">
-                <a:solidFill>
-                  <a:schemeClr val="accent1"/>
-                </a:solidFill>
-              </a:rPr>
-              <a:t>説明① 10分</a:t>
-            </a:r>
-            <a:endParaRPr lang="en-US" sz="1100" dirty="0"/>
-          </a:p>
-        </p:txBody>
+          <a:effectLst>
+            <a:outerShdw sx="100000" sy="100000" kx="0" ky="0" algn="bl" rotWithShape="0" blurRad="101600" dist="50800" dir="2700000">
+              <a:srgbClr val="1A1A1A">
+                <a:alpha val="100000"/>
+              </a:srgbClr>
+            </a:outerShdw>
+          </a:effectLst>
+        </p:spPr>
       </p:sp>
       <p:graphicFrame>
         <p:nvGraphicFramePr>
@@ -4237,16 +4339,16 @@
           </p:nvPr>
         </p:nvGraphicFramePr>
         <p:xfrm>
-          <a:off x="548640" y="1463040"/>
-          <a:ext cx="8046720" cy="914400"/>
+          <a:off x="502920" y="1417320"/>
+          <a:ext cx="8138160" cy="914400"/>
         </p:xfrm>
         <a:graphic>
           <a:graphicData uri="http://schemas.openxmlformats.org/drawingml/2006/table">
             <a:tbl>
               <a:tblPr/>
               <a:tblGrid>
-                <a:gridCol w="2324608"/>
-                <a:gridCol w="5722112"/>
+                <a:gridCol w="2351024"/>
+                <a:gridCol w="5787136"/>
               </a:tblGrid>
               <a:tr h="365760">
                 <a:tc>
@@ -4258,47 +4360,54 @@
                         <a:buNone/>
                       </a:pPr>
                       <a:r>
-                        <a:rPr lang="en-US" sz="1200" b="1" dirty="0">
+                        <a:rPr lang="en-US" sz="1250" b="1" dirty="0">
                           <a:solidFill>
-                            <a:srgbClr val="FFD600"/>
+                            <a:srgbClr val="FFFFFF"/>
                           </a:solidFill>
+                          <a:latin typeface="Noto Sans JP" pitchFamily="34" charset="0"/>
+                          <a:ea typeface="Noto Sans JP" pitchFamily="34" charset="-122"/>
+                          <a:cs typeface="Noto Sans JP" pitchFamily="34" charset="-120"/>
                         </a:rPr>
                         <a:t>言葉</a:t>
                       </a:r>
-                      <a:endParaRPr lang="en-US" sz="1200" dirty="0"/>
+                      <a:endParaRPr lang="en-US" sz="1250" dirty="0">
+                        <a:latin typeface="Noto Sans JP" charset="0"/>
+                        <a:ea typeface="Noto Sans JP" charset="0"/>
+                        <a:cs typeface="Noto Sans JP" charset="0"/>
+                      </a:endParaRPr>
                     </a:p>
                   </a:txBody>
                   <a:tcPr marL="91440" marR="91440" marT="0" marB="0" anchor="ctr">
-                    <a:lnL w="9525" cap="flat" cmpd="sng" algn="ctr">
+                    <a:lnL w="12700" cap="flat" cmpd="sng" algn="ctr">
                       <a:solidFill>
-                        <a:srgbClr val="BBBBBB"/>
+                        <a:srgbClr val="1A1A1A"/>
                       </a:solidFill>
                       <a:prstDash val="solid"/>
                       <a:round/>
                       <a:headEnd type="none" w="med" len="med"/>
                       <a:tailEnd type="none" w="med" len="med"/>
                     </a:lnL>
-                    <a:lnR w="9525" cap="flat" cmpd="sng" algn="ctr">
+                    <a:lnR w="12700" cap="flat" cmpd="sng" algn="ctr">
                       <a:solidFill>
-                        <a:srgbClr val="BBBBBB"/>
+                        <a:srgbClr val="1A1A1A"/>
                       </a:solidFill>
                       <a:prstDash val="solid"/>
                       <a:round/>
                       <a:headEnd type="none" w="med" len="med"/>
                       <a:tailEnd type="none" w="med" len="med"/>
                     </a:lnR>
-                    <a:lnT w="9525" cap="flat" cmpd="sng" algn="ctr">
+                    <a:lnT w="12700" cap="flat" cmpd="sng" algn="ctr">
                       <a:solidFill>
-                        <a:srgbClr val="BBBBBB"/>
+                        <a:srgbClr val="1A1A1A"/>
                       </a:solidFill>
                       <a:prstDash val="solid"/>
                       <a:round/>
                       <a:headEnd type="none" w="med" len="med"/>
                       <a:tailEnd type="none" w="med" len="med"/>
                     </a:lnT>
-                    <a:lnB w="9525" cap="flat" cmpd="sng" algn="ctr">
+                    <a:lnB w="12700" cap="flat" cmpd="sng" algn="ctr">
                       <a:solidFill>
-                        <a:srgbClr val="BBBBBB"/>
+                        <a:srgbClr val="1A1A1A"/>
                       </a:solidFill>
                       <a:prstDash val="solid"/>
                       <a:round/>
@@ -4319,47 +4428,54 @@
                         <a:buNone/>
                       </a:pPr>
                       <a:r>
-                        <a:rPr lang="en-US" sz="1200" b="1" dirty="0">
+                        <a:rPr lang="en-US" sz="1250" b="1" dirty="0">
                           <a:solidFill>
-                            <a:srgbClr val="FFD600"/>
+                            <a:srgbClr val="FFFFFF"/>
                           </a:solidFill>
+                          <a:latin typeface="Noto Sans JP" pitchFamily="34" charset="0"/>
+                          <a:ea typeface="Noto Sans JP" pitchFamily="34" charset="-122"/>
+                          <a:cs typeface="Noto Sans JP" pitchFamily="34" charset="-120"/>
                         </a:rPr>
                         <a:t>意味</a:t>
                       </a:r>
-                      <a:endParaRPr lang="en-US" sz="1200" dirty="0"/>
+                      <a:endParaRPr lang="en-US" sz="1250" dirty="0">
+                        <a:latin typeface="Noto Sans JP" charset="0"/>
+                        <a:ea typeface="Noto Sans JP" charset="0"/>
+                        <a:cs typeface="Noto Sans JP" charset="0"/>
+                      </a:endParaRPr>
                     </a:p>
                   </a:txBody>
                   <a:tcPr marL="91440" marR="91440" marT="0" marB="0" anchor="ctr">
-                    <a:lnL w="9525" cap="flat" cmpd="sng" algn="ctr">
+                    <a:lnL w="12700" cap="flat" cmpd="sng" algn="ctr">
                       <a:solidFill>
-                        <a:srgbClr val="BBBBBB"/>
+                        <a:srgbClr val="1A1A1A"/>
                       </a:solidFill>
                       <a:prstDash val="solid"/>
                       <a:round/>
                       <a:headEnd type="none" w="med" len="med"/>
                       <a:tailEnd type="none" w="med" len="med"/>
                     </a:lnL>
-                    <a:lnR w="9525" cap="flat" cmpd="sng" algn="ctr">
+                    <a:lnR w="12700" cap="flat" cmpd="sng" algn="ctr">
                       <a:solidFill>
-                        <a:srgbClr val="BBBBBB"/>
+                        <a:srgbClr val="1A1A1A"/>
                       </a:solidFill>
                       <a:prstDash val="solid"/>
                       <a:round/>
                       <a:headEnd type="none" w="med" len="med"/>
                       <a:tailEnd type="none" w="med" len="med"/>
                     </a:lnR>
-                    <a:lnT w="9525" cap="flat" cmpd="sng" algn="ctr">
+                    <a:lnT w="12700" cap="flat" cmpd="sng" algn="ctr">
                       <a:solidFill>
-                        <a:srgbClr val="BBBBBB"/>
+                        <a:srgbClr val="1A1A1A"/>
                       </a:solidFill>
                       <a:prstDash val="solid"/>
                       <a:round/>
                       <a:headEnd type="none" w="med" len="med"/>
                       <a:tailEnd type="none" w="med" len="med"/>
                     </a:lnT>
-                    <a:lnB w="9525" cap="flat" cmpd="sng" algn="ctr">
+                    <a:lnB w="12700" cap="flat" cmpd="sng" algn="ctr">
                       <a:solidFill>
-                        <a:srgbClr val="BBBBBB"/>
+                        <a:srgbClr val="1A1A1A"/>
                       </a:solidFill>
                       <a:prstDash val="solid"/>
                       <a:round/>
@@ -4384,45 +4500,52 @@
                       <a:r>
                         <a:rPr lang="en-US" sz="1200" b="1" dirty="0">
                           <a:solidFill>
-                            <a:srgbClr val="1A1A1A"/>
+                            <a:srgbClr val="DD6420"/>
                           </a:solidFill>
+                          <a:latin typeface="Noto Sans JP" pitchFamily="34" charset="0"/>
+                          <a:ea typeface="Noto Sans JP" pitchFamily="34" charset="-122"/>
+                          <a:cs typeface="Noto Sans JP" pitchFamily="34" charset="-120"/>
                         </a:rPr>
                         <a:t>フォルダ</a:t>
                       </a:r>
-                      <a:endParaRPr lang="en-US" sz="1200" dirty="0"/>
+                      <a:endParaRPr lang="en-US" sz="1200" dirty="0">
+                        <a:latin typeface="Noto Sans JP" charset="0"/>
+                        <a:ea typeface="Noto Sans JP" charset="0"/>
+                        <a:cs typeface="Noto Sans JP" charset="0"/>
+                      </a:endParaRPr>
                     </a:p>
                   </a:txBody>
                   <a:tcPr marL="91440" marR="91440" marT="0" marB="0" anchor="ctr">
-                    <a:lnL w="9525" cap="flat" cmpd="sng" algn="ctr">
+                    <a:lnL w="12700" cap="flat" cmpd="sng" algn="ctr">
                       <a:solidFill>
-                        <a:srgbClr val="BBBBBB"/>
+                        <a:srgbClr val="1A1A1A"/>
                       </a:solidFill>
                       <a:prstDash val="solid"/>
                       <a:round/>
                       <a:headEnd type="none" w="med" len="med"/>
                       <a:tailEnd type="none" w="med" len="med"/>
                     </a:lnL>
-                    <a:lnR w="9525" cap="flat" cmpd="sng" algn="ctr">
+                    <a:lnR w="12700" cap="flat" cmpd="sng" algn="ctr">
                       <a:solidFill>
-                        <a:srgbClr val="BBBBBB"/>
+                        <a:srgbClr val="1A1A1A"/>
                       </a:solidFill>
                       <a:prstDash val="solid"/>
                       <a:round/>
                       <a:headEnd type="none" w="med" len="med"/>
                       <a:tailEnd type="none" w="med" len="med"/>
                     </a:lnR>
-                    <a:lnT w="9525" cap="flat" cmpd="sng" algn="ctr">
+                    <a:lnT w="12700" cap="flat" cmpd="sng" algn="ctr">
                       <a:solidFill>
-                        <a:srgbClr val="BBBBBB"/>
+                        <a:srgbClr val="1A1A1A"/>
                       </a:solidFill>
                       <a:prstDash val="solid"/>
                       <a:round/>
                       <a:headEnd type="none" w="med" len="med"/>
                       <a:tailEnd type="none" w="med" len="med"/>
                     </a:lnT>
-                    <a:lnB w="9525" cap="flat" cmpd="sng" algn="ctr">
+                    <a:lnB w="12700" cap="flat" cmpd="sng" algn="ctr">
                       <a:solidFill>
-                        <a:srgbClr val="BBBBBB"/>
+                        <a:srgbClr val="1A1A1A"/>
                       </a:solidFill>
                       <a:prstDash val="solid"/>
                       <a:round/>
@@ -4443,47 +4566,54 @@
                         <a:buNone/>
                       </a:pPr>
                       <a:r>
-                        <a:rPr lang="en-US" sz="1200" dirty="0">
+                        <a:rPr lang="en-US" sz="1200" b="1" dirty="0">
                           <a:solidFill>
                             <a:srgbClr val="1A1A1A"/>
                           </a:solidFill>
+                          <a:latin typeface="Noto Sans JP Medium" pitchFamily="34" charset="0"/>
+                          <a:ea typeface="Noto Sans JP Medium" pitchFamily="34" charset="-122"/>
+                          <a:cs typeface="Noto Sans JP Medium" pitchFamily="34" charset="-120"/>
                         </a:rPr>
                         <a:t>作るもの1つ分の箱。1つのアプリ＝1つのフォルダ</a:t>
                       </a:r>
-                      <a:endParaRPr lang="en-US" sz="1200" dirty="0"/>
+                      <a:endParaRPr lang="en-US" sz="1200" dirty="0">
+                        <a:latin typeface="Noto Sans JP Medium" charset="0"/>
+                        <a:ea typeface="Noto Sans JP Medium" charset="0"/>
+                        <a:cs typeface="Noto Sans JP Medium" charset="0"/>
+                      </a:endParaRPr>
                     </a:p>
                   </a:txBody>
                   <a:tcPr marL="91440" marR="91440" marT="0" marB="0" anchor="ctr">
-                    <a:lnL w="9525" cap="flat" cmpd="sng" algn="ctr">
+                    <a:lnL w="12700" cap="flat" cmpd="sng" algn="ctr">
                       <a:solidFill>
-                        <a:srgbClr val="BBBBBB"/>
+                        <a:srgbClr val="1A1A1A"/>
                       </a:solidFill>
                       <a:prstDash val="solid"/>
                       <a:round/>
                       <a:headEnd type="none" w="med" len="med"/>
                       <a:tailEnd type="none" w="med" len="med"/>
                     </a:lnL>
-                    <a:lnR w="9525" cap="flat" cmpd="sng" algn="ctr">
+                    <a:lnR w="12700" cap="flat" cmpd="sng" algn="ctr">
                       <a:solidFill>
-                        <a:srgbClr val="BBBBBB"/>
+                        <a:srgbClr val="1A1A1A"/>
                       </a:solidFill>
                       <a:prstDash val="solid"/>
                       <a:round/>
                       <a:headEnd type="none" w="med" len="med"/>
                       <a:tailEnd type="none" w="med" len="med"/>
                     </a:lnR>
-                    <a:lnT w="9525" cap="flat" cmpd="sng" algn="ctr">
+                    <a:lnT w="12700" cap="flat" cmpd="sng" algn="ctr">
                       <a:solidFill>
-                        <a:srgbClr val="BBBBBB"/>
+                        <a:srgbClr val="1A1A1A"/>
                       </a:solidFill>
                       <a:prstDash val="solid"/>
                       <a:round/>
                       <a:headEnd type="none" w="med" len="med"/>
                       <a:tailEnd type="none" w="med" len="med"/>
                     </a:lnT>
-                    <a:lnB w="9525" cap="flat" cmpd="sng" algn="ctr">
+                    <a:lnB w="12700" cap="flat" cmpd="sng" algn="ctr">
                       <a:solidFill>
-                        <a:srgbClr val="BBBBBB"/>
+                        <a:srgbClr val="1A1A1A"/>
                       </a:solidFill>
                       <a:prstDash val="solid"/>
                       <a:round/>
@@ -4508,169 +4638,52 @@
                       <a:r>
                         <a:rPr lang="en-US" sz="1200" b="1" dirty="0">
                           <a:solidFill>
-                            <a:srgbClr val="1A1A1A"/>
+                            <a:srgbClr val="DD6420"/>
                           </a:solidFill>
+                          <a:latin typeface="Noto Sans JP" pitchFamily="34" charset="0"/>
+                          <a:ea typeface="Noto Sans JP" pitchFamily="34" charset="-122"/>
+                          <a:cs typeface="Noto Sans JP" pitchFamily="34" charset="-120"/>
                         </a:rPr>
                         <a:t>ターミナル</a:t>
                       </a:r>
-                      <a:endParaRPr lang="en-US" sz="1200" dirty="0"/>
+                      <a:endParaRPr lang="en-US" sz="1200" dirty="0">
+                        <a:latin typeface="Noto Sans JP" charset="0"/>
+                        <a:ea typeface="Noto Sans JP" charset="0"/>
+                        <a:cs typeface="Noto Sans JP" charset="0"/>
+                      </a:endParaRPr>
                     </a:p>
                   </a:txBody>
                   <a:tcPr marL="91440" marR="91440" marT="0" marB="0" anchor="ctr">
-                    <a:lnL w="9525" cap="flat" cmpd="sng" algn="ctr">
+                    <a:lnL w="12700" cap="flat" cmpd="sng" algn="ctr">
                       <a:solidFill>
-                        <a:srgbClr val="BBBBBB"/>
+                        <a:srgbClr val="1A1A1A"/>
                       </a:solidFill>
                       <a:prstDash val="solid"/>
                       <a:round/>
                       <a:headEnd type="none" w="med" len="med"/>
                       <a:tailEnd type="none" w="med" len="med"/>
                     </a:lnL>
-                    <a:lnR w="9525" cap="flat" cmpd="sng" algn="ctr">
+                    <a:lnR w="12700" cap="flat" cmpd="sng" algn="ctr">
                       <a:solidFill>
-                        <a:srgbClr val="BBBBBB"/>
+                        <a:srgbClr val="1A1A1A"/>
                       </a:solidFill>
                       <a:prstDash val="solid"/>
                       <a:round/>
                       <a:headEnd type="none" w="med" len="med"/>
                       <a:tailEnd type="none" w="med" len="med"/>
                     </a:lnR>
-                    <a:lnT w="9525" cap="flat" cmpd="sng" algn="ctr">
+                    <a:lnT w="12700" cap="flat" cmpd="sng" algn="ctr">
                       <a:solidFill>
-                        <a:srgbClr val="BBBBBB"/>
+                        <a:srgbClr val="1A1A1A"/>
                       </a:solidFill>
                       <a:prstDash val="solid"/>
                       <a:round/>
                       <a:headEnd type="none" w="med" len="med"/>
                       <a:tailEnd type="none" w="med" len="med"/>
                     </a:lnT>
-                    <a:lnB w="9525" cap="flat" cmpd="sng" algn="ctr">
+                    <a:lnB w="12700" cap="flat" cmpd="sng" algn="ctr">
                       <a:solidFill>
-                        <a:srgbClr val="BBBBBB"/>
-                      </a:solidFill>
-                      <a:prstDash val="solid"/>
-                      <a:round/>
-                      <a:headEnd type="none" w="med" len="med"/>
-                      <a:tailEnd type="none" w="med" len="med"/>
-                    </a:lnB>
-                    <a:solidFill>
-                      <a:srgbClr val="F4F4F4"/>
-                    </a:solidFill>
-                  </a:tcPr>
-                </a:tc>
-                <a:tc>
-                  <a:txBody>
-                    <a:bodyPr/>
-                    <a:lstStyle/>
-                    <a:p>
-                      <a:pPr indent="0" marL="0">
-                        <a:buNone/>
-                      </a:pPr>
-                      <a:r>
-                        <a:rPr lang="en-US" sz="1200" dirty="0">
-                          <a:solidFill>
-                            <a:srgbClr val="1A1A1A"/>
-                          </a:solidFill>
-                        </a:rPr>
-                        <a:t>文字で命令する画面。Claude Codeはここで動く</a:t>
-                      </a:r>
-                      <a:endParaRPr lang="en-US" sz="1200" dirty="0"/>
-                    </a:p>
-                  </a:txBody>
-                  <a:tcPr marL="91440" marR="91440" marT="0" marB="0" anchor="ctr">
-                    <a:lnL w="9525" cap="flat" cmpd="sng" algn="ctr">
-                      <a:solidFill>
-                        <a:srgbClr val="BBBBBB"/>
-                      </a:solidFill>
-                      <a:prstDash val="solid"/>
-                      <a:round/>
-                      <a:headEnd type="none" w="med" len="med"/>
-                      <a:tailEnd type="none" w="med" len="med"/>
-                    </a:lnL>
-                    <a:lnR w="9525" cap="flat" cmpd="sng" algn="ctr">
-                      <a:solidFill>
-                        <a:srgbClr val="BBBBBB"/>
-                      </a:solidFill>
-                      <a:prstDash val="solid"/>
-                      <a:round/>
-                      <a:headEnd type="none" w="med" len="med"/>
-                      <a:tailEnd type="none" w="med" len="med"/>
-                    </a:lnR>
-                    <a:lnT w="9525" cap="flat" cmpd="sng" algn="ctr">
-                      <a:solidFill>
-                        <a:srgbClr val="BBBBBB"/>
-                      </a:solidFill>
-                      <a:prstDash val="solid"/>
-                      <a:round/>
-                      <a:headEnd type="none" w="med" len="med"/>
-                      <a:tailEnd type="none" w="med" len="med"/>
-                    </a:lnT>
-                    <a:lnB w="9525" cap="flat" cmpd="sng" algn="ctr">
-                      <a:solidFill>
-                        <a:srgbClr val="BBBBBB"/>
-                      </a:solidFill>
-                      <a:prstDash val="solid"/>
-                      <a:round/>
-                      <a:headEnd type="none" w="med" len="med"/>
-                      <a:tailEnd type="none" w="med" len="med"/>
-                    </a:lnB>
-                    <a:solidFill>
-                      <a:srgbClr val="F4F4F4"/>
-                    </a:solidFill>
-                  </a:tcPr>
-                </a:tc>
-              </a:tr>
-              <a:tr h="365760">
-                <a:tc>
-                  <a:txBody>
-                    <a:bodyPr/>
-                    <a:lstStyle/>
-                    <a:p>
-                      <a:pPr indent="0" marL="0">
-                        <a:buNone/>
-                      </a:pPr>
-                      <a:r>
-                        <a:rPr lang="en-US" sz="1200" b="1" dirty="0">
-                          <a:solidFill>
-                            <a:srgbClr val="1A1A1A"/>
-                          </a:solidFill>
-                        </a:rPr>
-                        <a:t>HTML / CSS / JS</a:t>
-                      </a:r>
-                      <a:endParaRPr lang="en-US" sz="1200" dirty="0"/>
-                    </a:p>
-                  </a:txBody>
-                  <a:tcPr marL="91440" marR="91440" marT="0" marB="0" anchor="ctr">
-                    <a:lnL w="9525" cap="flat" cmpd="sng" algn="ctr">
-                      <a:solidFill>
-                        <a:srgbClr val="BBBBBB"/>
-                      </a:solidFill>
-                      <a:prstDash val="solid"/>
-                      <a:round/>
-                      <a:headEnd type="none" w="med" len="med"/>
-                      <a:tailEnd type="none" w="med" len="med"/>
-                    </a:lnL>
-                    <a:lnR w="9525" cap="flat" cmpd="sng" algn="ctr">
-                      <a:solidFill>
-                        <a:srgbClr val="BBBBBB"/>
-                      </a:solidFill>
-                      <a:prstDash val="solid"/>
-                      <a:round/>
-                      <a:headEnd type="none" w="med" len="med"/>
-                      <a:tailEnd type="none" w="med" len="med"/>
-                    </a:lnR>
-                    <a:lnT w="9525" cap="flat" cmpd="sng" algn="ctr">
-                      <a:solidFill>
-                        <a:srgbClr val="BBBBBB"/>
-                      </a:solidFill>
-                      <a:prstDash val="solid"/>
-                      <a:round/>
-                      <a:headEnd type="none" w="med" len="med"/>
-                      <a:tailEnd type="none" w="med" len="med"/>
-                    </a:lnT>
-                    <a:lnB w="9525" cap="flat" cmpd="sng" algn="ctr">
-                      <a:solidFill>
-                        <a:srgbClr val="BBBBBB"/>
+                        <a:srgbClr val="1A1A1A"/>
                       </a:solidFill>
                       <a:prstDash val="solid"/>
                       <a:round/>
@@ -4691,47 +4704,54 @@
                         <a:buNone/>
                       </a:pPr>
                       <a:r>
-                        <a:rPr lang="en-US" sz="1200" dirty="0">
+                        <a:rPr lang="en-US" sz="1200" b="1" dirty="0">
                           <a:solidFill>
                             <a:srgbClr val="1A1A1A"/>
                           </a:solidFill>
+                          <a:latin typeface="Noto Sans JP Medium" pitchFamily="34" charset="0"/>
+                          <a:ea typeface="Noto Sans JP Medium" pitchFamily="34" charset="-122"/>
+                          <a:cs typeface="Noto Sans JP Medium" pitchFamily="34" charset="-120"/>
                         </a:rPr>
-                        <a:t>Webページの「中身／見た目／動き」</a:t>
+                        <a:t>文字で命令する画面。Claude Codeはここで動く</a:t>
                       </a:r>
-                      <a:endParaRPr lang="en-US" sz="1200" dirty="0"/>
+                      <a:endParaRPr lang="en-US" sz="1200" dirty="0">
+                        <a:latin typeface="Noto Sans JP Medium" charset="0"/>
+                        <a:ea typeface="Noto Sans JP Medium" charset="0"/>
+                        <a:cs typeface="Noto Sans JP Medium" charset="0"/>
+                      </a:endParaRPr>
                     </a:p>
                   </a:txBody>
                   <a:tcPr marL="91440" marR="91440" marT="0" marB="0" anchor="ctr">
-                    <a:lnL w="9525" cap="flat" cmpd="sng" algn="ctr">
+                    <a:lnL w="12700" cap="flat" cmpd="sng" algn="ctr">
                       <a:solidFill>
-                        <a:srgbClr val="BBBBBB"/>
+                        <a:srgbClr val="1A1A1A"/>
                       </a:solidFill>
                       <a:prstDash val="solid"/>
                       <a:round/>
                       <a:headEnd type="none" w="med" len="med"/>
                       <a:tailEnd type="none" w="med" len="med"/>
                     </a:lnL>
-                    <a:lnR w="9525" cap="flat" cmpd="sng" algn="ctr">
+                    <a:lnR w="12700" cap="flat" cmpd="sng" algn="ctr">
                       <a:solidFill>
-                        <a:srgbClr val="BBBBBB"/>
+                        <a:srgbClr val="1A1A1A"/>
                       </a:solidFill>
                       <a:prstDash val="solid"/>
                       <a:round/>
                       <a:headEnd type="none" w="med" len="med"/>
                       <a:tailEnd type="none" w="med" len="med"/>
                     </a:lnR>
-                    <a:lnT w="9525" cap="flat" cmpd="sng" algn="ctr">
+                    <a:lnT w="12700" cap="flat" cmpd="sng" algn="ctr">
                       <a:solidFill>
-                        <a:srgbClr val="BBBBBB"/>
+                        <a:srgbClr val="1A1A1A"/>
                       </a:solidFill>
                       <a:prstDash val="solid"/>
                       <a:round/>
                       <a:headEnd type="none" w="med" len="med"/>
                       <a:tailEnd type="none" w="med" len="med"/>
                     </a:lnT>
-                    <a:lnB w="9525" cap="flat" cmpd="sng" algn="ctr">
+                    <a:lnB w="12700" cap="flat" cmpd="sng" algn="ctr">
                       <a:solidFill>
-                        <a:srgbClr val="BBBBBB"/>
+                        <a:srgbClr val="1A1A1A"/>
                       </a:solidFill>
                       <a:prstDash val="solid"/>
                       <a:round/>
@@ -4756,169 +4776,52 @@
                       <a:r>
                         <a:rPr lang="en-US" sz="1200" b="1" dirty="0">
                           <a:solidFill>
-                            <a:srgbClr val="1A1A1A"/>
+                            <a:srgbClr val="DD6420"/>
                           </a:solidFill>
+                          <a:latin typeface="Noto Sans JP" pitchFamily="34" charset="0"/>
+                          <a:ea typeface="Noto Sans JP" pitchFamily="34" charset="-122"/>
+                          <a:cs typeface="Noto Sans JP" pitchFamily="34" charset="-120"/>
                         </a:rPr>
-                        <a:t>Git</a:t>
+                        <a:t>HTML / CSS / JS</a:t>
                       </a:r>
-                      <a:endParaRPr lang="en-US" sz="1200" dirty="0"/>
+                      <a:endParaRPr lang="en-US" sz="1200" dirty="0">
+                        <a:latin typeface="Noto Sans JP" charset="0"/>
+                        <a:ea typeface="Noto Sans JP" charset="0"/>
+                        <a:cs typeface="Noto Sans JP" charset="0"/>
+                      </a:endParaRPr>
                     </a:p>
                   </a:txBody>
                   <a:tcPr marL="91440" marR="91440" marT="0" marB="0" anchor="ctr">
-                    <a:lnL w="9525" cap="flat" cmpd="sng" algn="ctr">
+                    <a:lnL w="12700" cap="flat" cmpd="sng" algn="ctr">
                       <a:solidFill>
-                        <a:srgbClr val="BBBBBB"/>
+                        <a:srgbClr val="1A1A1A"/>
                       </a:solidFill>
                       <a:prstDash val="solid"/>
                       <a:round/>
                       <a:headEnd type="none" w="med" len="med"/>
                       <a:tailEnd type="none" w="med" len="med"/>
                     </a:lnL>
-                    <a:lnR w="9525" cap="flat" cmpd="sng" algn="ctr">
+                    <a:lnR w="12700" cap="flat" cmpd="sng" algn="ctr">
                       <a:solidFill>
-                        <a:srgbClr val="BBBBBB"/>
+                        <a:srgbClr val="1A1A1A"/>
                       </a:solidFill>
                       <a:prstDash val="solid"/>
                       <a:round/>
                       <a:headEnd type="none" w="med" len="med"/>
                       <a:tailEnd type="none" w="med" len="med"/>
                     </a:lnR>
-                    <a:lnT w="9525" cap="flat" cmpd="sng" algn="ctr">
+                    <a:lnT w="12700" cap="flat" cmpd="sng" algn="ctr">
                       <a:solidFill>
-                        <a:srgbClr val="BBBBBB"/>
+                        <a:srgbClr val="1A1A1A"/>
                       </a:solidFill>
                       <a:prstDash val="solid"/>
                       <a:round/>
                       <a:headEnd type="none" w="med" len="med"/>
                       <a:tailEnd type="none" w="med" len="med"/>
                     </a:lnT>
-                    <a:lnB w="9525" cap="flat" cmpd="sng" algn="ctr">
+                    <a:lnB w="12700" cap="flat" cmpd="sng" algn="ctr">
                       <a:solidFill>
-                        <a:srgbClr val="BBBBBB"/>
-                      </a:solidFill>
-                      <a:prstDash val="solid"/>
-                      <a:round/>
-                      <a:headEnd type="none" w="med" len="med"/>
-                      <a:tailEnd type="none" w="med" len="med"/>
-                    </a:lnB>
-                    <a:solidFill>
-                      <a:srgbClr val="F4F4F4"/>
-                    </a:solidFill>
-                  </a:tcPr>
-                </a:tc>
-                <a:tc>
-                  <a:txBody>
-                    <a:bodyPr/>
-                    <a:lstStyle/>
-                    <a:p>
-                      <a:pPr indent="0" marL="0">
-                        <a:buNone/>
-                      </a:pPr>
-                      <a:r>
-                        <a:rPr lang="en-US" sz="1200" dirty="0">
-                          <a:solidFill>
-                            <a:srgbClr val="1A1A1A"/>
-                          </a:solidFill>
-                        </a:rPr>
-                        <a:t>変更の記録（ゲームのセーブポイント）。いつでも前に戻れる</a:t>
-                      </a:r>
-                      <a:endParaRPr lang="en-US" sz="1200" dirty="0"/>
-                    </a:p>
-                  </a:txBody>
-                  <a:tcPr marL="91440" marR="91440" marT="0" marB="0" anchor="ctr">
-                    <a:lnL w="9525" cap="flat" cmpd="sng" algn="ctr">
-                      <a:solidFill>
-                        <a:srgbClr val="BBBBBB"/>
-                      </a:solidFill>
-                      <a:prstDash val="solid"/>
-                      <a:round/>
-                      <a:headEnd type="none" w="med" len="med"/>
-                      <a:tailEnd type="none" w="med" len="med"/>
-                    </a:lnL>
-                    <a:lnR w="9525" cap="flat" cmpd="sng" algn="ctr">
-                      <a:solidFill>
-                        <a:srgbClr val="BBBBBB"/>
-                      </a:solidFill>
-                      <a:prstDash val="solid"/>
-                      <a:round/>
-                      <a:headEnd type="none" w="med" len="med"/>
-                      <a:tailEnd type="none" w="med" len="med"/>
-                    </a:lnR>
-                    <a:lnT w="9525" cap="flat" cmpd="sng" algn="ctr">
-                      <a:solidFill>
-                        <a:srgbClr val="BBBBBB"/>
-                      </a:solidFill>
-                      <a:prstDash val="solid"/>
-                      <a:round/>
-                      <a:headEnd type="none" w="med" len="med"/>
-                      <a:tailEnd type="none" w="med" len="med"/>
-                    </a:lnT>
-                    <a:lnB w="9525" cap="flat" cmpd="sng" algn="ctr">
-                      <a:solidFill>
-                        <a:srgbClr val="BBBBBB"/>
-                      </a:solidFill>
-                      <a:prstDash val="solid"/>
-                      <a:round/>
-                      <a:headEnd type="none" w="med" len="med"/>
-                      <a:tailEnd type="none" w="med" len="med"/>
-                    </a:lnB>
-                    <a:solidFill>
-                      <a:srgbClr val="F4F4F4"/>
-                    </a:solidFill>
-                  </a:tcPr>
-                </a:tc>
-              </a:tr>
-              <a:tr h="365760">
-                <a:tc>
-                  <a:txBody>
-                    <a:bodyPr/>
-                    <a:lstStyle/>
-                    <a:p>
-                      <a:pPr indent="0" marL="0">
-                        <a:buNone/>
-                      </a:pPr>
-                      <a:r>
-                        <a:rPr lang="en-US" sz="1200" b="1" dirty="0">
-                          <a:solidFill>
-                            <a:srgbClr val="1A1A1A"/>
-                          </a:solidFill>
-                        </a:rPr>
-                        <a:t>GitHub</a:t>
-                      </a:r>
-                      <a:endParaRPr lang="en-US" sz="1200" dirty="0"/>
-                    </a:p>
-                  </a:txBody>
-                  <a:tcPr marL="91440" marR="91440" marT="0" marB="0" anchor="ctr">
-                    <a:lnL w="9525" cap="flat" cmpd="sng" algn="ctr">
-                      <a:solidFill>
-                        <a:srgbClr val="BBBBBB"/>
-                      </a:solidFill>
-                      <a:prstDash val="solid"/>
-                      <a:round/>
-                      <a:headEnd type="none" w="med" len="med"/>
-                      <a:tailEnd type="none" w="med" len="med"/>
-                    </a:lnL>
-                    <a:lnR w="9525" cap="flat" cmpd="sng" algn="ctr">
-                      <a:solidFill>
-                        <a:srgbClr val="BBBBBB"/>
-                      </a:solidFill>
-                      <a:prstDash val="solid"/>
-                      <a:round/>
-                      <a:headEnd type="none" w="med" len="med"/>
-                      <a:tailEnd type="none" w="med" len="med"/>
-                    </a:lnR>
-                    <a:lnT w="9525" cap="flat" cmpd="sng" algn="ctr">
-                      <a:solidFill>
-                        <a:srgbClr val="BBBBBB"/>
-                      </a:solidFill>
-                      <a:prstDash val="solid"/>
-                      <a:round/>
-                      <a:headEnd type="none" w="med" len="med"/>
-                      <a:tailEnd type="none" w="med" len="med"/>
-                    </a:lnT>
-                    <a:lnB w="9525" cap="flat" cmpd="sng" algn="ctr">
-                      <a:solidFill>
-                        <a:srgbClr val="BBBBBB"/>
+                        <a:srgbClr val="1A1A1A"/>
                       </a:solidFill>
                       <a:prstDash val="solid"/>
                       <a:round/>
@@ -4939,47 +4842,330 @@
                         <a:buNone/>
                       </a:pPr>
                       <a:r>
-                        <a:rPr lang="en-US" sz="1200" dirty="0">
+                        <a:rPr lang="en-US" sz="1200" b="1" dirty="0">
                           <a:solidFill>
                             <a:srgbClr val="1A1A1A"/>
                           </a:solidFill>
+                          <a:latin typeface="Noto Sans JP Medium" pitchFamily="34" charset="0"/>
+                          <a:ea typeface="Noto Sans JP Medium" pitchFamily="34" charset="-122"/>
+                          <a:cs typeface="Noto Sans JP Medium" pitchFamily="34" charset="-120"/>
                         </a:rPr>
-                        <a:t>Gitの記録をネット上に保管する場所</a:t>
+                        <a:t>Webページの「中身／見た目／動き」</a:t>
                       </a:r>
-                      <a:endParaRPr lang="en-US" sz="1200" dirty="0"/>
+                      <a:endParaRPr lang="en-US" sz="1200" dirty="0">
+                        <a:latin typeface="Noto Sans JP Medium" charset="0"/>
+                        <a:ea typeface="Noto Sans JP Medium" charset="0"/>
+                        <a:cs typeface="Noto Sans JP Medium" charset="0"/>
+                      </a:endParaRPr>
                     </a:p>
                   </a:txBody>
                   <a:tcPr marL="91440" marR="91440" marT="0" marB="0" anchor="ctr">
-                    <a:lnL w="9525" cap="flat" cmpd="sng" algn="ctr">
+                    <a:lnL w="12700" cap="flat" cmpd="sng" algn="ctr">
                       <a:solidFill>
-                        <a:srgbClr val="BBBBBB"/>
+                        <a:srgbClr val="1A1A1A"/>
                       </a:solidFill>
                       <a:prstDash val="solid"/>
                       <a:round/>
                       <a:headEnd type="none" w="med" len="med"/>
                       <a:tailEnd type="none" w="med" len="med"/>
                     </a:lnL>
-                    <a:lnR w="9525" cap="flat" cmpd="sng" algn="ctr">
+                    <a:lnR w="12700" cap="flat" cmpd="sng" algn="ctr">
                       <a:solidFill>
-                        <a:srgbClr val="BBBBBB"/>
+                        <a:srgbClr val="1A1A1A"/>
                       </a:solidFill>
                       <a:prstDash val="solid"/>
                       <a:round/>
                       <a:headEnd type="none" w="med" len="med"/>
                       <a:tailEnd type="none" w="med" len="med"/>
                     </a:lnR>
-                    <a:lnT w="9525" cap="flat" cmpd="sng" algn="ctr">
+                    <a:lnT w="12700" cap="flat" cmpd="sng" algn="ctr">
                       <a:solidFill>
-                        <a:srgbClr val="BBBBBB"/>
+                        <a:srgbClr val="1A1A1A"/>
                       </a:solidFill>
                       <a:prstDash val="solid"/>
                       <a:round/>
                       <a:headEnd type="none" w="med" len="med"/>
                       <a:tailEnd type="none" w="med" len="med"/>
                     </a:lnT>
-                    <a:lnB w="9525" cap="flat" cmpd="sng" algn="ctr">
+                    <a:lnB w="12700" cap="flat" cmpd="sng" algn="ctr">
                       <a:solidFill>
-                        <a:srgbClr val="BBBBBB"/>
+                        <a:srgbClr val="1A1A1A"/>
+                      </a:solidFill>
+                      <a:prstDash val="solid"/>
+                      <a:round/>
+                      <a:headEnd type="none" w="med" len="med"/>
+                      <a:tailEnd type="none" w="med" len="med"/>
+                    </a:lnB>
+                    <a:solidFill>
+                      <a:srgbClr val="FFFFFF"/>
+                    </a:solidFill>
+                  </a:tcPr>
+                </a:tc>
+              </a:tr>
+              <a:tr h="365760">
+                <a:tc>
+                  <a:txBody>
+                    <a:bodyPr/>
+                    <a:lstStyle/>
+                    <a:p>
+                      <a:pPr indent="0" marL="0">
+                        <a:buNone/>
+                      </a:pPr>
+                      <a:r>
+                        <a:rPr lang="en-US" sz="1200" b="1" dirty="0">
+                          <a:solidFill>
+                            <a:srgbClr val="DD6420"/>
+                          </a:solidFill>
+                          <a:latin typeface="Noto Sans JP" pitchFamily="34" charset="0"/>
+                          <a:ea typeface="Noto Sans JP" pitchFamily="34" charset="-122"/>
+                          <a:cs typeface="Noto Sans JP" pitchFamily="34" charset="-120"/>
+                        </a:rPr>
+                        <a:t>Git</a:t>
+                      </a:r>
+                      <a:endParaRPr lang="en-US" sz="1200" dirty="0">
+                        <a:latin typeface="Noto Sans JP" charset="0"/>
+                        <a:ea typeface="Noto Sans JP" charset="0"/>
+                        <a:cs typeface="Noto Sans JP" charset="0"/>
+                      </a:endParaRPr>
+                    </a:p>
+                  </a:txBody>
+                  <a:tcPr marL="91440" marR="91440" marT="0" marB="0" anchor="ctr">
+                    <a:lnL w="12700" cap="flat" cmpd="sng" algn="ctr">
+                      <a:solidFill>
+                        <a:srgbClr val="1A1A1A"/>
+                      </a:solidFill>
+                      <a:prstDash val="solid"/>
+                      <a:round/>
+                      <a:headEnd type="none" w="med" len="med"/>
+                      <a:tailEnd type="none" w="med" len="med"/>
+                    </a:lnL>
+                    <a:lnR w="12700" cap="flat" cmpd="sng" algn="ctr">
+                      <a:solidFill>
+                        <a:srgbClr val="1A1A1A"/>
+                      </a:solidFill>
+                      <a:prstDash val="solid"/>
+                      <a:round/>
+                      <a:headEnd type="none" w="med" len="med"/>
+                      <a:tailEnd type="none" w="med" len="med"/>
+                    </a:lnR>
+                    <a:lnT w="12700" cap="flat" cmpd="sng" algn="ctr">
+                      <a:solidFill>
+                        <a:srgbClr val="1A1A1A"/>
+                      </a:solidFill>
+                      <a:prstDash val="solid"/>
+                      <a:round/>
+                      <a:headEnd type="none" w="med" len="med"/>
+                      <a:tailEnd type="none" w="med" len="med"/>
+                    </a:lnT>
+                    <a:lnB w="12700" cap="flat" cmpd="sng" algn="ctr">
+                      <a:solidFill>
+                        <a:srgbClr val="1A1A1A"/>
+                      </a:solidFill>
+                      <a:prstDash val="solid"/>
+                      <a:round/>
+                      <a:headEnd type="none" w="med" len="med"/>
+                      <a:tailEnd type="none" w="med" len="med"/>
+                    </a:lnB>
+                    <a:solidFill>
+                      <a:srgbClr val="FFFFFF"/>
+                    </a:solidFill>
+                  </a:tcPr>
+                </a:tc>
+                <a:tc>
+                  <a:txBody>
+                    <a:bodyPr/>
+                    <a:lstStyle/>
+                    <a:p>
+                      <a:pPr indent="0" marL="0">
+                        <a:buNone/>
+                      </a:pPr>
+                      <a:r>
+                        <a:rPr lang="en-US" sz="1200" b="1" dirty="0">
+                          <a:solidFill>
+                            <a:srgbClr val="1A1A1A"/>
+                          </a:solidFill>
+                          <a:latin typeface="Noto Sans JP Medium" pitchFamily="34" charset="0"/>
+                          <a:ea typeface="Noto Sans JP Medium" pitchFamily="34" charset="-122"/>
+                          <a:cs typeface="Noto Sans JP Medium" pitchFamily="34" charset="-120"/>
+                        </a:rPr>
+                        <a:t>変更の記録（ゲームのセーブポイント）。いつでも前に戻れる</a:t>
+                      </a:r>
+                      <a:endParaRPr lang="en-US" sz="1200" dirty="0">
+                        <a:latin typeface="Noto Sans JP Medium" charset="0"/>
+                        <a:ea typeface="Noto Sans JP Medium" charset="0"/>
+                        <a:cs typeface="Noto Sans JP Medium" charset="0"/>
+                      </a:endParaRPr>
+                    </a:p>
+                  </a:txBody>
+                  <a:tcPr marL="91440" marR="91440" marT="0" marB="0" anchor="ctr">
+                    <a:lnL w="12700" cap="flat" cmpd="sng" algn="ctr">
+                      <a:solidFill>
+                        <a:srgbClr val="1A1A1A"/>
+                      </a:solidFill>
+                      <a:prstDash val="solid"/>
+                      <a:round/>
+                      <a:headEnd type="none" w="med" len="med"/>
+                      <a:tailEnd type="none" w="med" len="med"/>
+                    </a:lnL>
+                    <a:lnR w="12700" cap="flat" cmpd="sng" algn="ctr">
+                      <a:solidFill>
+                        <a:srgbClr val="1A1A1A"/>
+                      </a:solidFill>
+                      <a:prstDash val="solid"/>
+                      <a:round/>
+                      <a:headEnd type="none" w="med" len="med"/>
+                      <a:tailEnd type="none" w="med" len="med"/>
+                    </a:lnR>
+                    <a:lnT w="12700" cap="flat" cmpd="sng" algn="ctr">
+                      <a:solidFill>
+                        <a:srgbClr val="1A1A1A"/>
+                      </a:solidFill>
+                      <a:prstDash val="solid"/>
+                      <a:round/>
+                      <a:headEnd type="none" w="med" len="med"/>
+                      <a:tailEnd type="none" w="med" len="med"/>
+                    </a:lnT>
+                    <a:lnB w="12700" cap="flat" cmpd="sng" algn="ctr">
+                      <a:solidFill>
+                        <a:srgbClr val="1A1A1A"/>
+                      </a:solidFill>
+                      <a:prstDash val="solid"/>
+                      <a:round/>
+                      <a:headEnd type="none" w="med" len="med"/>
+                      <a:tailEnd type="none" w="med" len="med"/>
+                    </a:lnB>
+                    <a:solidFill>
+                      <a:srgbClr val="FFFFFF"/>
+                    </a:solidFill>
+                  </a:tcPr>
+                </a:tc>
+              </a:tr>
+              <a:tr h="365760">
+                <a:tc>
+                  <a:txBody>
+                    <a:bodyPr/>
+                    <a:lstStyle/>
+                    <a:p>
+                      <a:pPr indent="0" marL="0">
+                        <a:buNone/>
+                      </a:pPr>
+                      <a:r>
+                        <a:rPr lang="en-US" sz="1200" b="1" dirty="0">
+                          <a:solidFill>
+                            <a:srgbClr val="DD6420"/>
+                          </a:solidFill>
+                          <a:latin typeface="Noto Sans JP" pitchFamily="34" charset="0"/>
+                          <a:ea typeface="Noto Sans JP" pitchFamily="34" charset="-122"/>
+                          <a:cs typeface="Noto Sans JP" pitchFamily="34" charset="-120"/>
+                        </a:rPr>
+                        <a:t>GitHub</a:t>
+                      </a:r>
+                      <a:endParaRPr lang="en-US" sz="1200" dirty="0">
+                        <a:latin typeface="Noto Sans JP" charset="0"/>
+                        <a:ea typeface="Noto Sans JP" charset="0"/>
+                        <a:cs typeface="Noto Sans JP" charset="0"/>
+                      </a:endParaRPr>
+                    </a:p>
+                  </a:txBody>
+                  <a:tcPr marL="91440" marR="91440" marT="0" marB="0" anchor="ctr">
+                    <a:lnL w="12700" cap="flat" cmpd="sng" algn="ctr">
+                      <a:solidFill>
+                        <a:srgbClr val="1A1A1A"/>
+                      </a:solidFill>
+                      <a:prstDash val="solid"/>
+                      <a:round/>
+                      <a:headEnd type="none" w="med" len="med"/>
+                      <a:tailEnd type="none" w="med" len="med"/>
+                    </a:lnL>
+                    <a:lnR w="12700" cap="flat" cmpd="sng" algn="ctr">
+                      <a:solidFill>
+                        <a:srgbClr val="1A1A1A"/>
+                      </a:solidFill>
+                      <a:prstDash val="solid"/>
+                      <a:round/>
+                      <a:headEnd type="none" w="med" len="med"/>
+                      <a:tailEnd type="none" w="med" len="med"/>
+                    </a:lnR>
+                    <a:lnT w="12700" cap="flat" cmpd="sng" algn="ctr">
+                      <a:solidFill>
+                        <a:srgbClr val="1A1A1A"/>
+                      </a:solidFill>
+                      <a:prstDash val="solid"/>
+                      <a:round/>
+                      <a:headEnd type="none" w="med" len="med"/>
+                      <a:tailEnd type="none" w="med" len="med"/>
+                    </a:lnT>
+                    <a:lnB w="12700" cap="flat" cmpd="sng" algn="ctr">
+                      <a:solidFill>
+                        <a:srgbClr val="1A1A1A"/>
+                      </a:solidFill>
+                      <a:prstDash val="solid"/>
+                      <a:round/>
+                      <a:headEnd type="none" w="med" len="med"/>
+                      <a:tailEnd type="none" w="med" len="med"/>
+                    </a:lnB>
+                    <a:solidFill>
+                      <a:srgbClr val="FFFFFF"/>
+                    </a:solidFill>
+                  </a:tcPr>
+                </a:tc>
+                <a:tc>
+                  <a:txBody>
+                    <a:bodyPr/>
+                    <a:lstStyle/>
+                    <a:p>
+                      <a:pPr indent="0" marL="0">
+                        <a:buNone/>
+                      </a:pPr>
+                      <a:r>
+                        <a:rPr lang="en-US" sz="1200" b="1" dirty="0">
+                          <a:solidFill>
+                            <a:srgbClr val="1A1A1A"/>
+                          </a:solidFill>
+                          <a:latin typeface="Noto Sans JP Medium" pitchFamily="34" charset="0"/>
+                          <a:ea typeface="Noto Sans JP Medium" pitchFamily="34" charset="-122"/>
+                          <a:cs typeface="Noto Sans JP Medium" pitchFamily="34" charset="-120"/>
+                        </a:rPr>
+                        <a:t>Gitの記録をネット上に保管する場所</a:t>
+                      </a:r>
+                      <a:endParaRPr lang="en-US" sz="1200" dirty="0">
+                        <a:latin typeface="Noto Sans JP Medium" charset="0"/>
+                        <a:ea typeface="Noto Sans JP Medium" charset="0"/>
+                        <a:cs typeface="Noto Sans JP Medium" charset="0"/>
+                      </a:endParaRPr>
+                    </a:p>
+                  </a:txBody>
+                  <a:tcPr marL="91440" marR="91440" marT="0" marB="0" anchor="ctr">
+                    <a:lnL w="12700" cap="flat" cmpd="sng" algn="ctr">
+                      <a:solidFill>
+                        <a:srgbClr val="1A1A1A"/>
+                      </a:solidFill>
+                      <a:prstDash val="solid"/>
+                      <a:round/>
+                      <a:headEnd type="none" w="med" len="med"/>
+                      <a:tailEnd type="none" w="med" len="med"/>
+                    </a:lnL>
+                    <a:lnR w="12700" cap="flat" cmpd="sng" algn="ctr">
+                      <a:solidFill>
+                        <a:srgbClr val="1A1A1A"/>
+                      </a:solidFill>
+                      <a:prstDash val="solid"/>
+                      <a:round/>
+                      <a:headEnd type="none" w="med" len="med"/>
+                      <a:tailEnd type="none" w="med" len="med"/>
+                    </a:lnR>
+                    <a:lnT w="12700" cap="flat" cmpd="sng" algn="ctr">
+                      <a:solidFill>
+                        <a:srgbClr val="1A1A1A"/>
+                      </a:solidFill>
+                      <a:prstDash val="solid"/>
+                      <a:round/>
+                      <a:headEnd type="none" w="med" len="med"/>
+                      <a:tailEnd type="none" w="med" len="med"/>
+                    </a:lnT>
+                    <a:lnB w="12700" cap="flat" cmpd="sng" algn="ctr">
+                      <a:solidFill>
+                        <a:srgbClr val="1A1A1A"/>
                       </a:solidFill>
                       <a:prstDash val="solid"/>
                       <a:round/>
@@ -5008,8 +5194,8 @@
         </p:nvSpPr>
         <p:spPr>
           <a:xfrm>
-            <a:off x="8229600" y="4773168"/>
-            <a:ext cx="365760" cy="228600"/>
+            <a:off x="8366760" y="4754880"/>
+            <a:ext cx="365760" cy="274320"/>
           </a:xfrm>
           <a:prstGeom prst="rect">
             <a:avLst/>
@@ -5021,20 +5207,23 @@
           </a:extLst>
         </p:spPr>
         <p:txBody>
-          <a:bodyPr/>
+          <a:bodyPr anchor="ctr"/>
           <a:lstStyle>
             <a:lvl1pPr>
-              <a:defRPr sz="900">
-                <a:solidFill>
-                  <a:srgbClr val="5A6872"/>
-                </a:solidFill>
+              <a:defRPr sz="850">
+                <a:solidFill>
+                  <a:srgbClr val="FFFFFF"/>
+                </a:solidFill>
+                <a:latin typeface="Noto Sans JP"/>
+                <a:ea typeface="Noto Sans JP"/>
+                <a:cs typeface="Noto Sans JP"/>
               </a:defRPr>
             </a:lvl1pPr>
           </a:lstStyle>
           <a:p>
             <a:pPr algn="r"/>
             <a:fld id="{F7021451-1387-4CA6-816F-3879F97B5CBC}" type="slidenum">
-              <a:rPr b="0" lang="en-US"/>
+              <a:rPr b="1" lang="en-US"/>
               <a:t>4</a:t>
             </a:fld>
             <a:endParaRPr lang="en-US"/>
@@ -5069,15 +5258,58 @@
       <p:sp>
         <p:nvSpPr>
           <p:cNvPr id="2" name="Text 0"/>
-          <p:cNvSpPr/>
-          <p:nvPr>
-            <p:ph idx="100" type="title" hasCustomPrompt="1"/>
-          </p:nvPr>
-        </p:nvSpPr>
-        <p:spPr>
-          <a:xfrm>
-            <a:off x="548640" y="658368"/>
-            <a:ext cx="8046720" cy="566928"/>
+          <p:cNvSpPr txBox="1"/>
+          <p:nvPr/>
+        </p:nvSpPr>
+        <p:spPr>
+          <a:xfrm rot="-180000">
+            <a:off x="411480" y="201168"/>
+            <a:ext cx="1915668" cy="352044"/>
+          </a:xfrm>
+          <a:prstGeom prst="rect">
+            <a:avLst/>
+          </a:prstGeom>
+          <a:solidFill>
+            <a:srgbClr val="DD6420"/>
+          </a:solidFill>
+          <a:ln>
+            <a:solidFill>
+              <a:srgbClr val="DD6420"/>
+            </a:solidFill>
+          </a:ln>
+        </p:spPr>
+        <p:txBody>
+          <a:bodyPr wrap="square" lIns="0" tIns="0" rIns="0" bIns="0" rtlCol="0" anchor="ctr"/>
+          <a:lstStyle/>
+          <a:p>
+            <a:pPr algn="ctr" indent="0" marL="0">
+              <a:buNone/>
+            </a:pPr>
+            <a:r>
+              <a:rPr lang="ja-JP" altLang="en-US" sz="1100" dirty="0">
+                <a:solidFill>
+                  <a:srgbClr val="FFFFFF"/>
+                </a:solidFill>
+                <a:latin typeface="Dela Gothic One" pitchFamily="34" charset="0"/>
+                <a:ea typeface="けいふぉんと" pitchFamily="34" charset="-122"/>
+                <a:cs typeface="Dela Gothic One" pitchFamily="34" charset="-120"/>
+              </a:rPr>
+              <a:t>ハンズオン① 20分</a:t>
+            </a:r>
+            <a:endParaRPr lang="ja-JP" sz="1100" dirty="0"/>
+          </a:p>
+        </p:txBody>
+      </p:sp>
+      <p:sp>
+        <p:nvSpPr>
+          <p:cNvPr id="3" name="Text 1"/>
+          <p:cNvSpPr txBox="1"/>
+          <p:nvPr/>
+        </p:nvSpPr>
+        <p:spPr>
+          <a:xfrm>
+            <a:off x="411480" y="502920"/>
+            <a:ext cx="8321040" cy="685800"/>
           </a:xfrm>
           <a:prstGeom prst="rect">
             <a:avLst/>
@@ -5086,122 +5318,118 @@
           <a:ln/>
         </p:spPr>
         <p:txBody>
-          <a:bodyPr wrap="square" lIns="0" tIns="0" rIns="0" bIns="0" rtlCol="0" anchor="ctr"/>
-          <a:lstStyle/>
-          <a:p>
-            <a:pPr algn="l" indent="0" marL="0">
-              <a:buNone/>
-            </a:pPr>
-            <a:r>
-              <a:rPr lang="en-US" sz="2400" b="1" dirty="0">
-                <a:solidFill>
-                  <a:schemeClr val="tx1"/>
-                </a:solidFill>
+          <a:bodyPr wrap="square" lIns="0" tIns="0" rIns="0" bIns="0" rtlCol="0" anchor="ctr">
+            <a:normAutofit/>
+          </a:bodyPr>
+          <a:lstStyle/>
+          <a:p>
+            <a:pPr indent="0" marL="0">
+              <a:buNone/>
+            </a:pPr>
+            <a:r>
+              <a:rPr lang="ja-JP" altLang="en-US" sz="2600" dirty="0">
+                <a:solidFill>
+                  <a:srgbClr val="1A1A1A"/>
+                </a:solidFill>
+                <a:latin typeface="Dela Gothic One" pitchFamily="34" charset="0"/>
+                <a:ea typeface="けいふぉんと" pitchFamily="34" charset="-122"/>
+                <a:cs typeface="Dela Gothic One" pitchFamily="34" charset="-120"/>
               </a:rPr>
               <a:t>最初の1ページを作る</a:t>
             </a:r>
-            <a:endParaRPr lang="en-US" sz="2400" dirty="0"/>
-          </a:p>
-        </p:txBody>
-      </p:sp>
-      <p:sp>
-        <p:nvSpPr>
-          <p:cNvPr id="3" name="chip"/>
+            <a:endParaRPr lang="ja-JP" sz="2600" dirty="0"/>
+          </a:p>
+        </p:txBody>
+      </p:sp>
+      <p:sp>
+        <p:nvSpPr>
+          <p:cNvPr id="5" name="card"/>
           <p:cNvSpPr/>
           <p:nvPr/>
         </p:nvSpPr>
         <p:spPr>
           <a:xfrm>
-            <a:off x="548640" y="292608"/>
-            <a:ext cx="1755648" cy="292608"/>
+            <a:off x="502920" y="1417320"/>
+            <a:ext cx="8138160" cy="509778"/>
           </a:xfrm>
           <a:prstGeom prst="roundRect">
             <a:avLst>
-              <a:gd name="adj" fmla="val 50000"/>
+              <a:gd name="adj" fmla="val 17937"/>
             </a:avLst>
           </a:prstGeom>
           <a:solidFill>
-            <a:schemeClr val="accent2"/>
-          </a:solidFill>
-          <a:ln w="12700">
-            <a:solidFill>
-              <a:schemeClr val="accent2"/>
-            </a:solidFill>
-            <a:prstDash val="solid"/>
-          </a:ln>
-        </p:spPr>
-      </p:sp>
-      <p:sp>
-        <p:nvSpPr>
-          <p:cNvPr id="4" name="chip-text"/>
-          <p:cNvSpPr txBox="1"/>
-          <p:nvPr/>
-        </p:nvSpPr>
-        <p:spPr>
-          <a:xfrm>
-            <a:off x="548640" y="292608"/>
-            <a:ext cx="1755648" cy="292608"/>
-          </a:xfrm>
-          <a:prstGeom prst="rect">
-            <a:avLst/>
-          </a:prstGeom>
-          <a:noFill/>
-          <a:ln/>
-        </p:spPr>
-        <p:txBody>
-          <a:bodyPr wrap="square" lIns="0" tIns="0" rIns="0" bIns="0" rtlCol="0" anchor="ctr"/>
-          <a:lstStyle/>
-          <a:p>
-            <a:pPr algn="ctr" indent="0" marL="0">
-              <a:buNone/>
-            </a:pPr>
-            <a:r>
-              <a:rPr lang="en-US" sz="1100" b="1" dirty="0">
-                <a:solidFill>
-                  <a:schemeClr val="bg1"/>
-                </a:solidFill>
-              </a:rPr>
-              <a:t>ハンズオン① 20分</a:t>
-            </a:r>
-            <a:endParaRPr lang="en-US" sz="1100" dirty="0"/>
-          </a:p>
-        </p:txBody>
-      </p:sp>
-      <p:sp>
-        <p:nvSpPr>
-          <p:cNvPr id="6" name="step-num"/>
-          <p:cNvSpPr/>
-          <p:nvPr/>
-        </p:nvSpPr>
-        <p:spPr>
-          <a:xfrm>
-            <a:off x="548640" y="1572768"/>
-            <a:ext cx="384048" cy="384048"/>
-          </a:xfrm>
-          <a:prstGeom prst="ellipse">
-            <a:avLst/>
-          </a:prstGeom>
-          <a:solidFill>
-            <a:schemeClr val="accent1"/>
-          </a:solidFill>
-          <a:ln w="15875">
+            <a:srgbClr val="FFFFFF"/>
+          </a:solidFill>
+          <a:ln w="25400">
             <a:solidFill>
               <a:srgbClr val="1A1A1A"/>
             </a:solidFill>
             <a:prstDash val="solid"/>
           </a:ln>
-        </p:spPr>
-      </p:sp>
-      <p:sp>
-        <p:nvSpPr>
-          <p:cNvPr id="7" name="step-num-text"/>
+          <a:effectLst>
+            <a:outerShdw sx="100000" sy="100000" kx="0" ky="0" algn="bl" rotWithShape="0" blurRad="101600" dist="38100" dir="2700000">
+              <a:srgbClr val="1A1A1A">
+                <a:alpha val="100000"/>
+              </a:srgbClr>
+            </a:outerShdw>
+          </a:effectLst>
+        </p:spPr>
+      </p:sp>
+      <p:sp>
+        <p:nvSpPr>
+          <p:cNvPr id="6" name="Text 3"/>
           <p:cNvSpPr txBox="1"/>
           <p:nvPr/>
         </p:nvSpPr>
         <p:spPr>
           <a:xfrm>
-            <a:off x="548640" y="1572768"/>
-            <a:ext cx="384048" cy="384048"/>
+            <a:off x="640080" y="1472184"/>
+            <a:ext cx="400050" cy="400050"/>
+          </a:xfrm>
+          <a:prstGeom prst="ellipse">
+            <a:avLst/>
+          </a:prstGeom>
+          <a:solidFill>
+            <a:srgbClr val="DD6420"/>
+          </a:solidFill>
+          <a:ln w="19050">
+            <a:solidFill>
+              <a:srgbClr val="1A1A1A"/>
+            </a:solidFill>
+          </a:ln>
+        </p:spPr>
+        <p:txBody>
+          <a:bodyPr wrap="square" lIns="0" tIns="0" rIns="0" bIns="0" rtlCol="0" anchor="ctr"/>
+          <a:lstStyle/>
+          <a:p>
+            <a:pPr algn="ctr" indent="0" marL="0">
+              <a:buNone/>
+            </a:pPr>
+            <a:r>
+              <a:rPr lang="ja-JP" altLang="en-US" sz="1500" dirty="0">
+                <a:solidFill>
+                  <a:srgbClr val="FFFFFF"/>
+                </a:solidFill>
+                <a:latin typeface="Dela Gothic One" pitchFamily="34" charset="0"/>
+                <a:ea typeface="けいふぉんと" pitchFamily="34" charset="-122"/>
+                <a:cs typeface="Dela Gothic One" pitchFamily="34" charset="-120"/>
+              </a:rPr>
+              <a:t>1</a:t>
+            </a:r>
+            <a:endParaRPr lang="ja-JP" sz="1500" dirty="0"/>
+          </a:p>
+        </p:txBody>
+      </p:sp>
+      <p:sp>
+        <p:nvSpPr>
+          <p:cNvPr id="7" name="step-text"/>
+          <p:cNvSpPr txBox="1"/>
+          <p:nvPr/>
+        </p:nvSpPr>
+        <p:spPr>
+          <a:xfrm>
+            <a:off x="1234440" y="1417320"/>
+            <a:ext cx="7269480" cy="509778"/>
           </a:xfrm>
           <a:prstGeom prst="rect">
             <a:avLst/>
@@ -5210,95 +5438,118 @@
           <a:ln/>
         </p:spPr>
         <p:txBody>
-          <a:bodyPr wrap="square" lIns="0" tIns="0" rIns="0" bIns="0" rtlCol="0" anchor="ctr"/>
-          <a:lstStyle/>
-          <a:p>
-            <a:pPr algn="ctr" indent="0" marL="0">
-              <a:buNone/>
-            </a:pPr>
-            <a:r>
-              <a:rPr lang="en-US" sz="1400" b="1" dirty="0">
-                <a:solidFill>
-                  <a:schemeClr val="tx1"/>
-                </a:solidFill>
-              </a:rPr>
-              <a:t>1</a:t>
-            </a:r>
-            <a:endParaRPr lang="en-US" sz="1400" dirty="0"/>
-          </a:p>
-        </p:txBody>
-      </p:sp>
-      <p:sp>
-        <p:nvSpPr>
-          <p:cNvPr id="8" name="step-text"/>
-          <p:cNvSpPr txBox="1"/>
-          <p:nvPr/>
-        </p:nvSpPr>
-        <p:spPr>
-          <a:xfrm>
-            <a:off x="1097280" y="1463040"/>
-            <a:ext cx="7498080" cy="603504"/>
-          </a:xfrm>
-          <a:prstGeom prst="rect">
-            <a:avLst/>
-          </a:prstGeom>
-          <a:noFill/>
-          <a:ln/>
-        </p:spPr>
-        <p:txBody>
-          <a:bodyPr wrap="square" lIns="0" tIns="0" rIns="0" bIns="0" rtlCol="0" anchor="ctr"/>
+          <a:bodyPr wrap="square" lIns="0" tIns="0" rIns="0" bIns="0" rtlCol="0" anchor="ctr">
+            <a:normAutofit/>
+          </a:bodyPr>
           <a:lstStyle/>
           <a:p>
             <a:pPr indent="0" marL="0">
               <a:buNone/>
             </a:pPr>
             <a:r>
-              <a:rPr lang="en-US" sz="1450" dirty="0">
-                <a:solidFill>
-                  <a:schemeClr val="tx1"/>
-                </a:solidFill>
+              <a:rPr lang="ja-JP" altLang="en-US" sz="1400" b="1" dirty="0">
+                <a:solidFill>
+                  <a:srgbClr val="1A1A1A"/>
+                </a:solidFill>
+                <a:latin typeface="Noto Sans JP" pitchFamily="34" charset="0"/>
+                <a:ea typeface="Noto Sans JP" pitchFamily="34" charset="-122"/>
+                <a:cs typeface="Noto Sans JP" pitchFamily="34" charset="-120"/>
               </a:rPr>
               <a:t>作業用フォルダを作り、その中で claude と入力して起動</a:t>
             </a:r>
-            <a:endParaRPr lang="en-US" sz="1450" dirty="0"/>
-          </a:p>
-        </p:txBody>
-      </p:sp>
-      <p:sp>
-        <p:nvSpPr>
-          <p:cNvPr id="9" name="step-num"/>
+            <a:endParaRPr lang="ja-JP" sz="1400" dirty="0"/>
+          </a:p>
+        </p:txBody>
+      </p:sp>
+      <p:sp>
+        <p:nvSpPr>
+          <p:cNvPr id="8" name="card"/>
           <p:cNvSpPr/>
           <p:nvPr/>
         </p:nvSpPr>
         <p:spPr>
           <a:xfrm>
-            <a:off x="548640" y="2176272"/>
-            <a:ext cx="384048" cy="384048"/>
-          </a:xfrm>
-          <a:prstGeom prst="ellipse">
-            <a:avLst/>
-          </a:prstGeom>
-          <a:solidFill>
-            <a:schemeClr val="accent1"/>
-          </a:solidFill>
-          <a:ln w="15875">
+            <a:off x="502920" y="2055114"/>
+            <a:ext cx="8138160" cy="509778"/>
+          </a:xfrm>
+          <a:prstGeom prst="roundRect">
+            <a:avLst>
+              <a:gd name="adj" fmla="val 17937"/>
+            </a:avLst>
+          </a:prstGeom>
+          <a:solidFill>
+            <a:srgbClr val="FFFFFF"/>
+          </a:solidFill>
+          <a:ln w="25400">
             <a:solidFill>
               <a:srgbClr val="1A1A1A"/>
             </a:solidFill>
             <a:prstDash val="solid"/>
           </a:ln>
-        </p:spPr>
-      </p:sp>
-      <p:sp>
-        <p:nvSpPr>
-          <p:cNvPr id="10" name="step-num-text"/>
+          <a:effectLst>
+            <a:outerShdw sx="100000" sy="100000" kx="0" ky="0" algn="bl" rotWithShape="0" blurRad="101600" dist="38100" dir="2700000">
+              <a:srgbClr val="1A1A1A">
+                <a:alpha val="100000"/>
+              </a:srgbClr>
+            </a:outerShdw>
+          </a:effectLst>
+        </p:spPr>
+      </p:sp>
+      <p:sp>
+        <p:nvSpPr>
+          <p:cNvPr id="9" name="Text 6"/>
           <p:cNvSpPr txBox="1"/>
           <p:nvPr/>
         </p:nvSpPr>
         <p:spPr>
           <a:xfrm>
-            <a:off x="548640" y="2176272"/>
-            <a:ext cx="384048" cy="384048"/>
+            <a:off x="640080" y="2109978"/>
+            <a:ext cx="400050" cy="400050"/>
+          </a:xfrm>
+          <a:prstGeom prst="ellipse">
+            <a:avLst/>
+          </a:prstGeom>
+          <a:solidFill>
+            <a:srgbClr val="DD6420"/>
+          </a:solidFill>
+          <a:ln w="19050">
+            <a:solidFill>
+              <a:srgbClr val="1A1A1A"/>
+            </a:solidFill>
+          </a:ln>
+        </p:spPr>
+        <p:txBody>
+          <a:bodyPr wrap="square" lIns="0" tIns="0" rIns="0" bIns="0" rtlCol="0" anchor="ctr"/>
+          <a:lstStyle/>
+          <a:p>
+            <a:pPr algn="ctr" indent="0" marL="0">
+              <a:buNone/>
+            </a:pPr>
+            <a:r>
+              <a:rPr lang="ja-JP" altLang="en-US" sz="1500" dirty="0">
+                <a:solidFill>
+                  <a:srgbClr val="FFFFFF"/>
+                </a:solidFill>
+                <a:latin typeface="Dela Gothic One" pitchFamily="34" charset="0"/>
+                <a:ea typeface="けいふぉんと" pitchFamily="34" charset="-122"/>
+                <a:cs typeface="Dela Gothic One" pitchFamily="34" charset="-120"/>
+              </a:rPr>
+              <a:t>2</a:t>
+            </a:r>
+            <a:endParaRPr lang="ja-JP" sz="1500" dirty="0"/>
+          </a:p>
+        </p:txBody>
+      </p:sp>
+      <p:sp>
+        <p:nvSpPr>
+          <p:cNvPr id="10" name="step-text"/>
+          <p:cNvSpPr txBox="1"/>
+          <p:nvPr/>
+        </p:nvSpPr>
+        <p:spPr>
+          <a:xfrm>
+            <a:off x="1234440" y="2055114"/>
+            <a:ext cx="7269480" cy="509778"/>
           </a:xfrm>
           <a:prstGeom prst="rect">
             <a:avLst/>
@@ -5307,95 +5558,118 @@
           <a:ln/>
         </p:spPr>
         <p:txBody>
-          <a:bodyPr wrap="square" lIns="0" tIns="0" rIns="0" bIns="0" rtlCol="0" anchor="ctr"/>
-          <a:lstStyle/>
-          <a:p>
-            <a:pPr algn="ctr" indent="0" marL="0">
-              <a:buNone/>
-            </a:pPr>
-            <a:r>
-              <a:rPr lang="en-US" sz="1400" b="1" dirty="0">
-                <a:solidFill>
-                  <a:schemeClr val="tx1"/>
-                </a:solidFill>
-              </a:rPr>
-              <a:t>2</a:t>
-            </a:r>
-            <a:endParaRPr lang="en-US" sz="1400" dirty="0"/>
-          </a:p>
-        </p:txBody>
-      </p:sp>
-      <p:sp>
-        <p:nvSpPr>
-          <p:cNvPr id="11" name="step-text"/>
-          <p:cNvSpPr txBox="1"/>
-          <p:nvPr/>
-        </p:nvSpPr>
-        <p:spPr>
-          <a:xfrm>
-            <a:off x="1097280" y="2066544"/>
-            <a:ext cx="7498080" cy="603504"/>
-          </a:xfrm>
-          <a:prstGeom prst="rect">
-            <a:avLst/>
-          </a:prstGeom>
-          <a:noFill/>
-          <a:ln/>
-        </p:spPr>
-        <p:txBody>
-          <a:bodyPr wrap="square" lIns="0" tIns="0" rIns="0" bIns="0" rtlCol="0" anchor="ctr"/>
+          <a:bodyPr wrap="square" lIns="0" tIns="0" rIns="0" bIns="0" rtlCol="0" anchor="ctr">
+            <a:normAutofit/>
+          </a:bodyPr>
           <a:lstStyle/>
           <a:p>
             <a:pPr indent="0" marL="0">
               <a:buNone/>
             </a:pPr>
             <a:r>
-              <a:rPr lang="en-US" sz="1450" dirty="0">
-                <a:solidFill>
-                  <a:schemeClr val="tx1"/>
-                </a:solidFill>
+              <a:rPr lang="ja-JP" altLang="en-US" sz="1400" b="1" dirty="0">
+                <a:solidFill>
+                  <a:srgbClr val="1A1A1A"/>
+                </a:solidFill>
+                <a:latin typeface="Noto Sans JP" pitchFamily="34" charset="0"/>
+                <a:ea typeface="Noto Sans JP" pitchFamily="34" charset="-122"/>
+                <a:cs typeface="Noto Sans JP" pitchFamily="34" charset="-120"/>
               </a:rPr>
               <a:t>「まなべ食堂の紹介ページを index.html 1枚で」と頼む</a:t>
             </a:r>
-            <a:endParaRPr lang="en-US" sz="1450" dirty="0"/>
-          </a:p>
-        </p:txBody>
-      </p:sp>
-      <p:sp>
-        <p:nvSpPr>
-          <p:cNvPr id="12" name="step-num"/>
+            <a:endParaRPr lang="ja-JP" sz="1400" dirty="0"/>
+          </a:p>
+        </p:txBody>
+      </p:sp>
+      <p:sp>
+        <p:nvSpPr>
+          <p:cNvPr id="11" name="card"/>
           <p:cNvSpPr/>
           <p:nvPr/>
         </p:nvSpPr>
         <p:spPr>
           <a:xfrm>
-            <a:off x="548640" y="2779776"/>
-            <a:ext cx="384048" cy="384048"/>
-          </a:xfrm>
-          <a:prstGeom prst="ellipse">
-            <a:avLst/>
-          </a:prstGeom>
-          <a:solidFill>
-            <a:schemeClr val="accent1"/>
-          </a:solidFill>
-          <a:ln w="15875">
+            <a:off x="502920" y="2692908"/>
+            <a:ext cx="8138160" cy="509778"/>
+          </a:xfrm>
+          <a:prstGeom prst="roundRect">
+            <a:avLst>
+              <a:gd name="adj" fmla="val 17937"/>
+            </a:avLst>
+          </a:prstGeom>
+          <a:solidFill>
+            <a:srgbClr val="FFFFFF"/>
+          </a:solidFill>
+          <a:ln w="25400">
             <a:solidFill>
               <a:srgbClr val="1A1A1A"/>
             </a:solidFill>
             <a:prstDash val="solid"/>
           </a:ln>
-        </p:spPr>
-      </p:sp>
-      <p:sp>
-        <p:nvSpPr>
-          <p:cNvPr id="13" name="step-num-text"/>
+          <a:effectLst>
+            <a:outerShdw sx="100000" sy="100000" kx="0" ky="0" algn="bl" rotWithShape="0" blurRad="101600" dist="38100" dir="2700000">
+              <a:srgbClr val="1A1A1A">
+                <a:alpha val="100000"/>
+              </a:srgbClr>
+            </a:outerShdw>
+          </a:effectLst>
+        </p:spPr>
+      </p:sp>
+      <p:sp>
+        <p:nvSpPr>
+          <p:cNvPr id="12" name="Text 9"/>
           <p:cNvSpPr txBox="1"/>
           <p:nvPr/>
         </p:nvSpPr>
         <p:spPr>
           <a:xfrm>
-            <a:off x="548640" y="2779776"/>
-            <a:ext cx="384048" cy="384048"/>
+            <a:off x="640080" y="2747772"/>
+            <a:ext cx="400050" cy="400050"/>
+          </a:xfrm>
+          <a:prstGeom prst="ellipse">
+            <a:avLst/>
+          </a:prstGeom>
+          <a:solidFill>
+            <a:srgbClr val="DD6420"/>
+          </a:solidFill>
+          <a:ln w="19050">
+            <a:solidFill>
+              <a:srgbClr val="1A1A1A"/>
+            </a:solidFill>
+          </a:ln>
+        </p:spPr>
+        <p:txBody>
+          <a:bodyPr wrap="square" lIns="0" tIns="0" rIns="0" bIns="0" rtlCol="0" anchor="ctr"/>
+          <a:lstStyle/>
+          <a:p>
+            <a:pPr algn="ctr" indent="0" marL="0">
+              <a:buNone/>
+            </a:pPr>
+            <a:r>
+              <a:rPr lang="ja-JP" altLang="en-US" sz="1500" dirty="0">
+                <a:solidFill>
+                  <a:srgbClr val="FFFFFF"/>
+                </a:solidFill>
+                <a:latin typeface="Dela Gothic One" pitchFamily="34" charset="0"/>
+                <a:ea typeface="けいふぉんと" pitchFamily="34" charset="-122"/>
+                <a:cs typeface="Dela Gothic One" pitchFamily="34" charset="-120"/>
+              </a:rPr>
+              <a:t>3</a:t>
+            </a:r>
+            <a:endParaRPr lang="ja-JP" sz="1500" dirty="0"/>
+          </a:p>
+        </p:txBody>
+      </p:sp>
+      <p:sp>
+        <p:nvSpPr>
+          <p:cNvPr id="13" name="step-text"/>
+          <p:cNvSpPr txBox="1"/>
+          <p:nvPr/>
+        </p:nvSpPr>
+        <p:spPr>
+          <a:xfrm>
+            <a:off x="1234440" y="2692908"/>
+            <a:ext cx="7269480" cy="509778"/>
           </a:xfrm>
           <a:prstGeom prst="rect">
             <a:avLst/>
@@ -5404,95 +5678,118 @@
           <a:ln/>
         </p:spPr>
         <p:txBody>
-          <a:bodyPr wrap="square" lIns="0" tIns="0" rIns="0" bIns="0" rtlCol="0" anchor="ctr"/>
-          <a:lstStyle/>
-          <a:p>
-            <a:pPr algn="ctr" indent="0" marL="0">
-              <a:buNone/>
-            </a:pPr>
-            <a:r>
-              <a:rPr lang="en-US" sz="1400" b="1" dirty="0">
-                <a:solidFill>
-                  <a:schemeClr val="tx1"/>
-                </a:solidFill>
-              </a:rPr>
-              <a:t>3</a:t>
-            </a:r>
-            <a:endParaRPr lang="en-US" sz="1400" dirty="0"/>
-          </a:p>
-        </p:txBody>
-      </p:sp>
-      <p:sp>
-        <p:nvSpPr>
-          <p:cNvPr id="14" name="step-text"/>
-          <p:cNvSpPr txBox="1"/>
-          <p:nvPr/>
-        </p:nvSpPr>
-        <p:spPr>
-          <a:xfrm>
-            <a:off x="1097280" y="2670048"/>
-            <a:ext cx="7498080" cy="603504"/>
-          </a:xfrm>
-          <a:prstGeom prst="rect">
-            <a:avLst/>
-          </a:prstGeom>
-          <a:noFill/>
-          <a:ln/>
-        </p:spPr>
-        <p:txBody>
-          <a:bodyPr wrap="square" lIns="0" tIns="0" rIns="0" bIns="0" rtlCol="0" anchor="ctr"/>
+          <a:bodyPr wrap="square" lIns="0" tIns="0" rIns="0" bIns="0" rtlCol="0" anchor="ctr">
+            <a:normAutofit/>
+          </a:bodyPr>
           <a:lstStyle/>
           <a:p>
             <a:pPr indent="0" marL="0">
               <a:buNone/>
             </a:pPr>
             <a:r>
-              <a:rPr lang="en-US" sz="1450" dirty="0">
-                <a:solidFill>
-                  <a:schemeClr val="tx1"/>
-                </a:solidFill>
+              <a:rPr lang="ja-JP" altLang="en-US" sz="1400" b="1" dirty="0">
+                <a:solidFill>
+                  <a:srgbClr val="1A1A1A"/>
+                </a:solidFill>
+                <a:latin typeface="Noto Sans JP" pitchFamily="34" charset="0"/>
+                <a:ea typeface="Noto Sans JP" pitchFamily="34" charset="-122"/>
+                <a:cs typeface="Noto Sans JP" pitchFamily="34" charset="-120"/>
               </a:rPr>
               <a:t>できた index.html をブラウザで開いて確かめる</a:t>
             </a:r>
-            <a:endParaRPr lang="en-US" sz="1450" dirty="0"/>
-          </a:p>
-        </p:txBody>
-      </p:sp>
-      <p:sp>
-        <p:nvSpPr>
-          <p:cNvPr id="15" name="step-num"/>
+            <a:endParaRPr lang="ja-JP" sz="1400" dirty="0"/>
+          </a:p>
+        </p:txBody>
+      </p:sp>
+      <p:sp>
+        <p:nvSpPr>
+          <p:cNvPr id="14" name="card"/>
           <p:cNvSpPr/>
           <p:nvPr/>
         </p:nvSpPr>
         <p:spPr>
           <a:xfrm>
-            <a:off x="548640" y="3383280"/>
-            <a:ext cx="384048" cy="384048"/>
-          </a:xfrm>
-          <a:prstGeom prst="ellipse">
-            <a:avLst/>
-          </a:prstGeom>
-          <a:solidFill>
-            <a:schemeClr val="accent1"/>
-          </a:solidFill>
-          <a:ln w="15875">
+            <a:off x="502920" y="3330702"/>
+            <a:ext cx="8138160" cy="509778"/>
+          </a:xfrm>
+          <a:prstGeom prst="roundRect">
+            <a:avLst>
+              <a:gd name="adj" fmla="val 17937"/>
+            </a:avLst>
+          </a:prstGeom>
+          <a:solidFill>
+            <a:srgbClr val="FFFFFF"/>
+          </a:solidFill>
+          <a:ln w="25400">
             <a:solidFill>
               <a:srgbClr val="1A1A1A"/>
             </a:solidFill>
             <a:prstDash val="solid"/>
           </a:ln>
-        </p:spPr>
-      </p:sp>
-      <p:sp>
-        <p:nvSpPr>
-          <p:cNvPr id="16" name="step-num-text"/>
+          <a:effectLst>
+            <a:outerShdw sx="100000" sy="100000" kx="0" ky="0" algn="bl" rotWithShape="0" blurRad="101600" dist="38100" dir="2700000">
+              <a:srgbClr val="1A1A1A">
+                <a:alpha val="100000"/>
+              </a:srgbClr>
+            </a:outerShdw>
+          </a:effectLst>
+        </p:spPr>
+      </p:sp>
+      <p:sp>
+        <p:nvSpPr>
+          <p:cNvPr id="15" name="Text 12"/>
           <p:cNvSpPr txBox="1"/>
           <p:nvPr/>
         </p:nvSpPr>
         <p:spPr>
           <a:xfrm>
-            <a:off x="548640" y="3383280"/>
-            <a:ext cx="384048" cy="384048"/>
+            <a:off x="640080" y="3385566"/>
+            <a:ext cx="400050" cy="400050"/>
+          </a:xfrm>
+          <a:prstGeom prst="ellipse">
+            <a:avLst/>
+          </a:prstGeom>
+          <a:solidFill>
+            <a:srgbClr val="DD6420"/>
+          </a:solidFill>
+          <a:ln w="19050">
+            <a:solidFill>
+              <a:srgbClr val="1A1A1A"/>
+            </a:solidFill>
+          </a:ln>
+        </p:spPr>
+        <p:txBody>
+          <a:bodyPr wrap="square" lIns="0" tIns="0" rIns="0" bIns="0" rtlCol="0" anchor="ctr"/>
+          <a:lstStyle/>
+          <a:p>
+            <a:pPr algn="ctr" indent="0" marL="0">
+              <a:buNone/>
+            </a:pPr>
+            <a:r>
+              <a:rPr lang="ja-JP" altLang="en-US" sz="1500" dirty="0">
+                <a:solidFill>
+                  <a:srgbClr val="FFFFFF"/>
+                </a:solidFill>
+                <a:latin typeface="Dela Gothic One" pitchFamily="34" charset="0"/>
+                <a:ea typeface="けいふぉんと" pitchFamily="34" charset="-122"/>
+                <a:cs typeface="Dela Gothic One" pitchFamily="34" charset="-120"/>
+              </a:rPr>
+              <a:t>4</a:t>
+            </a:r>
+            <a:endParaRPr lang="ja-JP" sz="1500" dirty="0"/>
+          </a:p>
+        </p:txBody>
+      </p:sp>
+      <p:sp>
+        <p:nvSpPr>
+          <p:cNvPr id="16" name="step-text"/>
+          <p:cNvSpPr txBox="1"/>
+          <p:nvPr/>
+        </p:nvSpPr>
+        <p:spPr>
+          <a:xfrm>
+            <a:off x="1234440" y="3330702"/>
+            <a:ext cx="7269480" cy="509778"/>
           </a:xfrm>
           <a:prstGeom prst="rect">
             <a:avLst/>
@@ -5501,144 +5798,80 @@
           <a:ln/>
         </p:spPr>
         <p:txBody>
-          <a:bodyPr wrap="square" lIns="0" tIns="0" rIns="0" bIns="0" rtlCol="0" anchor="ctr"/>
+          <a:bodyPr wrap="square" lIns="0" tIns="0" rIns="0" bIns="0" rtlCol="0" anchor="ctr">
+            <a:normAutofit/>
+          </a:bodyPr>
+          <a:lstStyle/>
+          <a:p>
+            <a:pPr indent="0" marL="0">
+              <a:buNone/>
+            </a:pPr>
+            <a:r>
+              <a:rPr lang="ja-JP" altLang="en-US" sz="1400" b="1" dirty="0">
+                <a:solidFill>
+                  <a:srgbClr val="1A1A1A"/>
+                </a:solidFill>
+                <a:latin typeface="Noto Sans JP" pitchFamily="34" charset="0"/>
+                <a:ea typeface="Noto Sans JP" pitchFamily="34" charset="-122"/>
+                <a:cs typeface="Noto Sans JP" pitchFamily="34" charset="-120"/>
+              </a:rPr>
+              <a:t>「ボタンを緑に」「メニューを5品に」など、2回修正を頼む</a:t>
+            </a:r>
+            <a:endParaRPr lang="ja-JP" sz="1400" dirty="0"/>
+          </a:p>
+        </p:txBody>
+      </p:sp>
+      <p:sp>
+        <p:nvSpPr>
+          <p:cNvPr id="17" name="Text 14"/>
+          <p:cNvSpPr txBox="1"/>
+          <p:nvPr/>
+        </p:nvSpPr>
+        <p:spPr>
+          <a:xfrm rot="-60000">
+            <a:off x="502920" y="4005072"/>
+            <a:ext cx="8138160" cy="502920"/>
+          </a:xfrm>
+          <a:prstGeom prst="rect">
+            <a:avLst/>
+          </a:prstGeom>
+          <a:solidFill>
+            <a:srgbClr val="DD6420"/>
+          </a:solidFill>
+          <a:ln w="19050">
+            <a:solidFill>
+              <a:srgbClr val="1A1A1A"/>
+            </a:solidFill>
+          </a:ln>
+          <a:effectLst>
+            <a:outerShdw sx="100000" sy="100000" kx="0" ky="0" algn="bl" rotWithShape="0" blurRad="101600" dist="38100" dir="2700000">
+              <a:srgbClr val="1A1A1A">
+                <a:alpha val="100000"/>
+              </a:srgbClr>
+            </a:outerShdw>
+          </a:effectLst>
+        </p:spPr>
+        <p:txBody>
+          <a:bodyPr wrap="square" lIns="0" tIns="1905" rIns="1905" bIns="0" rtlCol="0" anchor="ctr">
+            <a:normAutofit/>
+          </a:bodyPr>
           <a:lstStyle/>
           <a:p>
             <a:pPr algn="ctr" indent="0" marL="0">
               <a:buNone/>
             </a:pPr>
             <a:r>
-              <a:rPr lang="en-US" sz="1400" b="1" dirty="0">
-                <a:solidFill>
-                  <a:schemeClr val="tx1"/>
-                </a:solidFill>
-              </a:rPr>
-              <a:t>4</a:t>
-            </a:r>
-            <a:endParaRPr lang="en-US" sz="1400" dirty="0"/>
-          </a:p>
-        </p:txBody>
-      </p:sp>
-      <p:sp>
-        <p:nvSpPr>
-          <p:cNvPr id="17" name="step-text"/>
-          <p:cNvSpPr txBox="1"/>
-          <p:nvPr/>
-        </p:nvSpPr>
-        <p:spPr>
-          <a:xfrm>
-            <a:off x="1097280" y="3273552"/>
-            <a:ext cx="7498080" cy="603504"/>
-          </a:xfrm>
-          <a:prstGeom prst="rect">
-            <a:avLst/>
-          </a:prstGeom>
-          <a:noFill/>
-          <a:ln/>
-        </p:spPr>
-        <p:txBody>
-          <a:bodyPr wrap="square" lIns="0" tIns="0" rIns="0" bIns="0" rtlCol="0" anchor="ctr"/>
-          <a:lstStyle/>
-          <a:p>
-            <a:pPr indent="0" marL="0">
-              <a:buNone/>
-            </a:pPr>
-            <a:r>
-              <a:rPr lang="en-US" sz="1450" dirty="0">
-                <a:solidFill>
-                  <a:schemeClr val="tx1"/>
-                </a:solidFill>
-              </a:rPr>
-              <a:t>「ボタンを緑に」「メニューを5品に」など、2回修正を頼む</a:t>
-            </a:r>
-            <a:endParaRPr lang="en-US" sz="1450" dirty="0"/>
-          </a:p>
-        </p:txBody>
-      </p:sp>
-      <p:sp>
-        <p:nvSpPr>
-          <p:cNvPr id="18" name="foot-box"/>
-          <p:cNvSpPr/>
-          <p:nvPr/>
-        </p:nvSpPr>
-        <p:spPr>
-          <a:xfrm>
-            <a:off x="548640" y="3977640"/>
-            <a:ext cx="8046720" cy="502920"/>
-          </a:xfrm>
-          <a:prstGeom prst="roundRect">
-            <a:avLst>
-              <a:gd name="adj" fmla="val 18182"/>
-            </a:avLst>
-          </a:prstGeom>
-          <a:solidFill>
-            <a:schemeClr val="bg2"/>
-          </a:solidFill>
-          <a:ln w="12700">
-            <a:solidFill>
-              <a:schemeClr val="bg2"/>
-            </a:solidFill>
-            <a:prstDash val="solid"/>
-          </a:ln>
-        </p:spPr>
-      </p:sp>
-      <p:pic>
-        <p:nvPicPr>
-          <p:cNvPr id="19" name="foot-icon" descr="preencoded.png">    </p:cNvPr>
-          <p:cNvPicPr>
-            <a:picLocks noChangeAspect="1"/>
-          </p:cNvPicPr>
-          <p:nvPr/>
-        </p:nvPicPr>
-        <p:blipFill>
-          <a:blip r:embed="rId1"/>
-          <a:stretch>
-            <a:fillRect/>
-          </a:stretch>
-        </p:blipFill>
-        <p:spPr>
-          <a:xfrm>
-            <a:off x="685800" y="4105656"/>
-            <a:ext cx="246888" cy="246888"/>
-          </a:xfrm>
-          <a:prstGeom prst="rect">
-            <a:avLst/>
-          </a:prstGeom>
-        </p:spPr>
-      </p:pic>
-      <p:sp>
-        <p:nvSpPr>
-          <p:cNvPr id="20" name="foot-text"/>
-          <p:cNvSpPr txBox="1"/>
-          <p:nvPr/>
-        </p:nvSpPr>
-        <p:spPr>
-          <a:xfrm>
-            <a:off x="1051560" y="3977640"/>
-            <a:ext cx="7406640" cy="502920"/>
-          </a:xfrm>
-          <a:prstGeom prst="rect">
-            <a:avLst/>
-          </a:prstGeom>
-          <a:noFill/>
-          <a:ln/>
-        </p:spPr>
-        <p:txBody>
-          <a:bodyPr wrap="square" lIns="0" tIns="0" rIns="0" bIns="0" rtlCol="0" anchor="ctr"/>
-          <a:lstStyle/>
-          <a:p>
-            <a:pPr indent="0" marL="0">
-              <a:buNone/>
-            </a:pPr>
-            <a:r>
-              <a:rPr lang="en-US" sz="1150" dirty="0">
-                <a:solidFill>
-                  <a:schemeClr val="tx1"/>
-                </a:solidFill>
+              <a:rPr lang="ja-JP" altLang="en-US" sz="1300" b="1" dirty="0">
+                <a:solidFill>
+                  <a:srgbClr val="FFFFFF"/>
+                </a:solidFill>
+                <a:latin typeface="Noto Sans JP" pitchFamily="34" charset="0"/>
+                <a:ea typeface="Noto Sans JP" pitchFamily="34" charset="-122"/>
+                <a:cs typeface="Noto Sans JP" pitchFamily="34" charset="-120"/>
               </a:rPr>
               <a:t>インストールは準備会で済ませています。止まった人はブレイクアウトで個別に</a:t>
             </a:r>
-            <a:endParaRPr lang="en-US" sz="1150" dirty="0"/>
+            <a:endParaRPr lang="ja-JP" sz="1300" dirty="0"/>
           </a:p>
         </p:txBody>
       </p:sp>
@@ -5654,8 +5887,8 @@
         </p:nvSpPr>
         <p:spPr>
           <a:xfrm>
-            <a:off x="8229600" y="4773168"/>
-            <a:ext cx="365760" cy="228600"/>
+            <a:off x="8366760" y="4754880"/>
+            <a:ext cx="365760" cy="274320"/>
           </a:xfrm>
           <a:prstGeom prst="rect">
             <a:avLst/>
@@ -5667,20 +5900,23 @@
           </a:extLst>
         </p:spPr>
         <p:txBody>
-          <a:bodyPr/>
+          <a:bodyPr anchor="ctr"/>
           <a:lstStyle>
             <a:lvl1pPr>
-              <a:defRPr sz="900">
-                <a:solidFill>
-                  <a:srgbClr val="5A6872"/>
-                </a:solidFill>
+              <a:defRPr sz="850">
+                <a:solidFill>
+                  <a:srgbClr val="FFFFFF"/>
+                </a:solidFill>
+                <a:latin typeface="Noto Sans JP"/>
+                <a:ea typeface="Noto Sans JP"/>
+                <a:cs typeface="Noto Sans JP"/>
               </a:defRPr>
             </a:lvl1pPr>
           </a:lstStyle>
           <a:p>
             <a:pPr algn="r"/>
             <a:fld id="{F7021451-1387-4CA6-816F-3879F97B5CBC}" type="slidenum">
-              <a:rPr b="0" lang="en-US"/>
+              <a:rPr b="1" lang="en-US"/>
               <a:t>5</a:t>
             </a:fld>
             <a:endParaRPr lang="en-US"/>
@@ -5715,15 +5951,58 @@
       <p:sp>
         <p:nvSpPr>
           <p:cNvPr id="2" name="Text 0"/>
-          <p:cNvSpPr/>
-          <p:nvPr>
-            <p:ph idx="100" type="title" hasCustomPrompt="1"/>
-          </p:nvPr>
-        </p:nvSpPr>
-        <p:spPr>
-          <a:xfrm>
-            <a:off x="548640" y="658368"/>
-            <a:ext cx="8046720" cy="566928"/>
+          <p:cNvSpPr txBox="1"/>
+          <p:nvPr/>
+        </p:nvSpPr>
+        <p:spPr>
+          <a:xfrm rot="-180000">
+            <a:off x="411480" y="201168"/>
+            <a:ext cx="1478128" cy="352044"/>
+          </a:xfrm>
+          <a:prstGeom prst="rect">
+            <a:avLst/>
+          </a:prstGeom>
+          <a:solidFill>
+            <a:srgbClr val="1A1A1A"/>
+          </a:solidFill>
+          <a:ln>
+            <a:solidFill>
+              <a:srgbClr val="1A1A1A"/>
+            </a:solidFill>
+          </a:ln>
+        </p:spPr>
+        <p:txBody>
+          <a:bodyPr wrap="square" lIns="0" tIns="0" rIns="0" bIns="0" rtlCol="0" anchor="ctr"/>
+          <a:lstStyle/>
+          <a:p>
+            <a:pPr algn="ctr" indent="0" marL="0">
+              <a:buNone/>
+            </a:pPr>
+            <a:r>
+              <a:rPr lang="ja-JP" altLang="en-US" sz="1100" dirty="0">
+                <a:solidFill>
+                  <a:srgbClr val="FFFFFF"/>
+                </a:solidFill>
+                <a:latin typeface="Dela Gothic One" pitchFamily="34" charset="0"/>
+                <a:ea typeface="けいふぉんと" pitchFamily="34" charset="-122"/>
+                <a:cs typeface="Dela Gothic One" pitchFamily="34" charset="-120"/>
+              </a:rPr>
+              <a:t>説明② 10分</a:t>
+            </a:r>
+            <a:endParaRPr lang="ja-JP" sz="1100" dirty="0"/>
+          </a:p>
+        </p:txBody>
+      </p:sp>
+      <p:sp>
+        <p:nvSpPr>
+          <p:cNvPr id="3" name="Text 1"/>
+          <p:cNvSpPr txBox="1"/>
+          <p:nvPr/>
+        </p:nvSpPr>
+        <p:spPr>
+          <a:xfrm>
+            <a:off x="411480" y="502920"/>
+            <a:ext cx="8321040" cy="685800"/>
           </a:xfrm>
           <a:prstGeom prst="rect">
             <a:avLst/>
@@ -5732,116 +6011,58 @@
           <a:ln/>
         </p:spPr>
         <p:txBody>
-          <a:bodyPr wrap="square" lIns="0" tIns="0" rIns="0" bIns="0" rtlCol="0" anchor="ctr"/>
-          <a:lstStyle/>
-          <a:p>
-            <a:pPr algn="l" indent="0" marL="0">
-              <a:buNone/>
-            </a:pPr>
-            <a:r>
-              <a:rPr lang="en-US" sz="2400" b="1" dirty="0">
-                <a:solidFill>
-                  <a:schemeClr val="tx1"/>
-                </a:solidFill>
+          <a:bodyPr wrap="square" lIns="0" tIns="0" rIns="0" bIns="0" rtlCol="0" anchor="ctr">
+            <a:normAutofit/>
+          </a:bodyPr>
+          <a:lstStyle/>
+          <a:p>
+            <a:pPr indent="0" marL="0">
+              <a:buNone/>
+            </a:pPr>
+            <a:r>
+              <a:rPr lang="ja-JP" altLang="en-US" sz="2600" dirty="0">
+                <a:solidFill>
+                  <a:srgbClr val="1A1A1A"/>
+                </a:solidFill>
+                <a:latin typeface="Dela Gothic One" pitchFamily="34" charset="0"/>
+                <a:ea typeface="けいふぉんと" pitchFamily="34" charset="-122"/>
+                <a:cs typeface="Dela Gothic One" pitchFamily="34" charset="-120"/>
               </a:rPr>
               <a:t>Claude Codeへの頼み方：3つ足す</a:t>
             </a:r>
-            <a:endParaRPr lang="en-US" sz="2400" dirty="0"/>
-          </a:p>
-        </p:txBody>
-      </p:sp>
-      <p:sp>
-        <p:nvSpPr>
-          <p:cNvPr id="3" name="chip"/>
+            <a:endParaRPr lang="ja-JP" sz="2600" dirty="0"/>
+          </a:p>
+        </p:txBody>
+      </p:sp>
+      <p:sp>
+        <p:nvSpPr>
+          <p:cNvPr id="5" name="card"/>
           <p:cNvSpPr/>
           <p:nvPr/>
         </p:nvSpPr>
         <p:spPr>
           <a:xfrm>
-            <a:off x="548640" y="292608"/>
-            <a:ext cx="1344168" cy="292608"/>
+            <a:off x="502920" y="1417320"/>
+            <a:ext cx="2542032" cy="2331720"/>
           </a:xfrm>
           <a:prstGeom prst="roundRect">
             <a:avLst>
-              <a:gd name="adj" fmla="val 50000"/>
+              <a:gd name="adj" fmla="val 3922"/>
             </a:avLst>
           </a:prstGeom>
           <a:solidFill>
-            <a:schemeClr val="tx1"/>
-          </a:solidFill>
-          <a:ln w="12700">
-            <a:solidFill>
-              <a:schemeClr val="tx1"/>
-            </a:solidFill>
-            <a:prstDash val="solid"/>
-          </a:ln>
-        </p:spPr>
-      </p:sp>
-      <p:sp>
-        <p:nvSpPr>
-          <p:cNvPr id="4" name="chip-text"/>
-          <p:cNvSpPr txBox="1"/>
-          <p:nvPr/>
-        </p:nvSpPr>
-        <p:spPr>
-          <a:xfrm>
-            <a:off x="548640" y="292608"/>
-            <a:ext cx="1344168" cy="292608"/>
-          </a:xfrm>
-          <a:prstGeom prst="rect">
-            <a:avLst/>
-          </a:prstGeom>
-          <a:noFill/>
-          <a:ln/>
-        </p:spPr>
-        <p:txBody>
-          <a:bodyPr wrap="square" lIns="0" tIns="0" rIns="0" bIns="0" rtlCol="0" anchor="ctr"/>
-          <a:lstStyle/>
-          <a:p>
-            <a:pPr algn="ctr" indent="0" marL="0">
-              <a:buNone/>
-            </a:pPr>
-            <a:r>
-              <a:rPr lang="en-US" sz="1100" b="1" dirty="0">
-                <a:solidFill>
-                  <a:schemeClr val="accent1"/>
-                </a:solidFill>
-              </a:rPr>
-              <a:t>説明② 10分</a:t>
-            </a:r>
-            <a:endParaRPr lang="en-US" sz="1100" dirty="0"/>
-          </a:p>
-        </p:txBody>
-      </p:sp>
-      <p:sp>
-        <p:nvSpPr>
-          <p:cNvPr id="6" name="card"/>
-          <p:cNvSpPr/>
-          <p:nvPr/>
-        </p:nvSpPr>
-        <p:spPr>
-          <a:xfrm>
-            <a:off x="548640" y="1463040"/>
-            <a:ext cx="2529840" cy="2286000"/>
-          </a:xfrm>
-          <a:prstGeom prst="roundRect">
-            <a:avLst>
-              <a:gd name="adj" fmla="val 4800"/>
-            </a:avLst>
-          </a:prstGeom>
-          <a:solidFill>
-            <a:schemeClr val="bg1"/>
-          </a:solidFill>
-          <a:ln w="19050">
+            <a:srgbClr val="FFFFFF"/>
+          </a:solidFill>
+          <a:ln w="25400">
             <a:solidFill>
               <a:srgbClr val="1A1A1A"/>
             </a:solidFill>
             <a:prstDash val="solid"/>
           </a:ln>
           <a:effectLst>
-            <a:outerShdw sx="100000" sy="100000" kx="0" ky="0" algn="bl" rotWithShape="0" blurRad="101600" dist="38100" dir="2700000">
-              <a:srgbClr val="000000">
-                <a:alpha val="18000"/>
+            <a:outerShdw sx="100000" sy="100000" kx="0" ky="0" algn="bl" rotWithShape="0" blurRad="101600" dist="50800" dir="2700000">
+              <a:srgbClr val="1A1A1A">
+                <a:alpha val="100000"/>
               </a:srgbClr>
             </a:outerShdw>
           </a:effectLst>
@@ -5849,14 +6070,63 @@
       </p:sp>
       <p:sp>
         <p:nvSpPr>
-          <p:cNvPr id="7" name="card-head"/>
+          <p:cNvPr id="6" name="Text 3"/>
           <p:cNvSpPr txBox="1"/>
           <p:nvPr/>
         </p:nvSpPr>
         <p:spPr>
           <a:xfrm>
-            <a:off x="731520" y="1645920"/>
-            <a:ext cx="2164080" cy="365760"/>
+            <a:off x="685800" y="1600200"/>
+            <a:ext cx="1197864" cy="329184"/>
+          </a:xfrm>
+          <a:prstGeom prst="roundRect">
+            <a:avLst>
+              <a:gd name="adj" fmla="val 16667"/>
+            </a:avLst>
+          </a:prstGeom>
+          <a:solidFill>
+            <a:srgbClr val="DD6420"/>
+          </a:solidFill>
+          <a:ln>
+            <a:solidFill>
+              <a:srgbClr val="DD6420"/>
+            </a:solidFill>
+          </a:ln>
+        </p:spPr>
+        <p:txBody>
+          <a:bodyPr wrap="square" lIns="0" tIns="0" rIns="0" bIns="0" rtlCol="0" anchor="ctr">
+            <a:normAutofit/>
+          </a:bodyPr>
+          <a:lstStyle/>
+          <a:p>
+            <a:pPr algn="ctr" indent="0" marL="0">
+              <a:buNone/>
+            </a:pPr>
+            <a:r>
+              <a:rPr lang="ja-JP" altLang="en-US" sz="1300" b="1" dirty="0">
+                <a:solidFill>
+                  <a:srgbClr val="FFFFFF"/>
+                </a:solidFill>
+                <a:latin typeface="Noto Sans JP" pitchFamily="34" charset="0"/>
+                <a:ea typeface="Noto Sans JP" pitchFamily="34" charset="-122"/>
+                <a:cs typeface="Noto Sans JP" pitchFamily="34" charset="-120"/>
+              </a:rPr>
+              <a:t>小さく頼む</a:t>
+            </a:r>
+            <a:endParaRPr lang="ja-JP" sz="1300" dirty="0"/>
+          </a:p>
+        </p:txBody>
+      </p:sp>
+      <p:sp>
+        <p:nvSpPr>
+          <p:cNvPr id="7" name="card-body"/>
+          <p:cNvSpPr txBox="1"/>
+          <p:nvPr/>
+        </p:nvSpPr>
+        <p:spPr>
+          <a:xfrm>
+            <a:off x="704088" y="2075688"/>
+            <a:ext cx="2139696" cy="1536192"/>
           </a:xfrm>
           <a:prstGeom prst="rect">
             <a:avLst/>
@@ -5865,43 +6135,9 @@
           <a:ln/>
         </p:spPr>
         <p:txBody>
-          <a:bodyPr wrap="square" lIns="0" tIns="0" rIns="0" bIns="0" rtlCol="0" anchor="ctr"/>
-          <a:lstStyle/>
-          <a:p>
-            <a:pPr indent="0" marL="0">
-              <a:buNone/>
-            </a:pPr>
-            <a:r>
-              <a:rPr lang="en-US" sz="1500" b="1" dirty="0">
-                <a:solidFill>
-                  <a:schemeClr val="tx1"/>
-                </a:solidFill>
-              </a:rPr>
-              <a:t>小さく頼む</a:t>
-            </a:r>
-            <a:endParaRPr lang="en-US" sz="1500" dirty="0"/>
-          </a:p>
-        </p:txBody>
-      </p:sp>
-      <p:sp>
-        <p:nvSpPr>
-          <p:cNvPr id="8" name="card-body"/>
-          <p:cNvSpPr txBox="1"/>
-          <p:nvPr/>
-        </p:nvSpPr>
-        <p:spPr>
-          <a:xfrm>
-            <a:off x="731520" y="2057400"/>
-            <a:ext cx="2164080" cy="1554480"/>
-          </a:xfrm>
-          <a:prstGeom prst="rect">
-            <a:avLst/>
-          </a:prstGeom>
-          <a:noFill/>
-          <a:ln/>
-        </p:spPr>
-        <p:txBody>
-          <a:bodyPr wrap="square" lIns="0" tIns="0" rIns="0" bIns="0" rtlCol="0" anchor="t"/>
+          <a:bodyPr wrap="square" lIns="0" tIns="0" rIns="0" bIns="0" rtlCol="0" anchor="t">
+            <a:normAutofit/>
+          </a:bodyPr>
           <a:lstStyle/>
           <a:p>
             <a:pPr indent="0" marL="0">
@@ -5911,46 +6147,49 @@
               <a:buNone/>
             </a:pPr>
             <a:r>
-              <a:rPr lang="en-US" sz="1300" dirty="0">
-                <a:solidFill>
-                  <a:schemeClr val="tx1"/>
-                </a:solidFill>
+              <a:rPr lang="ja-JP" altLang="en-US" sz="1350" b="1" dirty="0">
+                <a:solidFill>
+                  <a:srgbClr val="1A1A1A"/>
+                </a:solidFill>
+                <a:latin typeface="Noto Sans JP" pitchFamily="34" charset="0"/>
+                <a:ea typeface="Noto Sans JP" pitchFamily="34" charset="-122"/>
+                <a:cs typeface="Noto Sans JP" pitchFamily="34" charset="-120"/>
               </a:rPr>
               <a:t>「全部作って」ではなく、1回1機能</a:t>
             </a:r>
-            <a:endParaRPr lang="en-US" sz="1300" dirty="0"/>
-          </a:p>
-        </p:txBody>
-      </p:sp>
-      <p:sp>
-        <p:nvSpPr>
-          <p:cNvPr id="9" name="card"/>
+            <a:endParaRPr lang="ja-JP" sz="1350" dirty="0"/>
+          </a:p>
+        </p:txBody>
+      </p:sp>
+      <p:sp>
+        <p:nvSpPr>
+          <p:cNvPr id="8" name="card"/>
           <p:cNvSpPr/>
           <p:nvPr/>
         </p:nvSpPr>
         <p:spPr>
           <a:xfrm>
-            <a:off x="3307080" y="1463040"/>
-            <a:ext cx="2529840" cy="2286000"/>
+            <a:off x="3300984" y="1417320"/>
+            <a:ext cx="2542032" cy="2331720"/>
           </a:xfrm>
           <a:prstGeom prst="roundRect">
             <a:avLst>
-              <a:gd name="adj" fmla="val 4800"/>
+              <a:gd name="adj" fmla="val 3922"/>
             </a:avLst>
           </a:prstGeom>
           <a:solidFill>
-            <a:schemeClr val="bg1"/>
-          </a:solidFill>
-          <a:ln w="19050">
+            <a:srgbClr val="FFFFFF"/>
+          </a:solidFill>
+          <a:ln w="25400">
             <a:solidFill>
               <a:srgbClr val="1A1A1A"/>
             </a:solidFill>
             <a:prstDash val="solid"/>
           </a:ln>
           <a:effectLst>
-            <a:outerShdw sx="100000" sy="100000" kx="0" ky="0" algn="bl" rotWithShape="0" blurRad="101600" dist="38100" dir="2700000">
-              <a:srgbClr val="000000">
-                <a:alpha val="18000"/>
+            <a:outerShdw sx="100000" sy="100000" kx="0" ky="0" algn="bl" rotWithShape="0" blurRad="101600" dist="50800" dir="2700000">
+              <a:srgbClr val="1A1A1A">
+                <a:alpha val="100000"/>
               </a:srgbClr>
             </a:outerShdw>
           </a:effectLst>
@@ -5958,14 +6197,63 @@
       </p:sp>
       <p:sp>
         <p:nvSpPr>
-          <p:cNvPr id="10" name="card-head"/>
+          <p:cNvPr id="9" name="Text 6"/>
           <p:cNvSpPr txBox="1"/>
           <p:nvPr/>
         </p:nvSpPr>
         <p:spPr>
           <a:xfrm>
-            <a:off x="3489960" y="1645920"/>
-            <a:ext cx="2164080" cy="365760"/>
+            <a:off x="3483864" y="1600200"/>
+            <a:ext cx="1545336" cy="329184"/>
+          </a:xfrm>
+          <a:prstGeom prst="roundRect">
+            <a:avLst>
+              <a:gd name="adj" fmla="val 16667"/>
+            </a:avLst>
+          </a:prstGeom>
+          <a:solidFill>
+            <a:srgbClr val="DD6420"/>
+          </a:solidFill>
+          <a:ln>
+            <a:solidFill>
+              <a:srgbClr val="DD6420"/>
+            </a:solidFill>
+          </a:ln>
+        </p:spPr>
+        <p:txBody>
+          <a:bodyPr wrap="square" lIns="0" tIns="0" rIns="0" bIns="0" rtlCol="0" anchor="ctr">
+            <a:normAutofit/>
+          </a:bodyPr>
+          <a:lstStyle/>
+          <a:p>
+            <a:pPr algn="ctr" indent="0" marL="0">
+              <a:buNone/>
+            </a:pPr>
+            <a:r>
+              <a:rPr lang="ja-JP" altLang="en-US" sz="1300" b="1" dirty="0">
+                <a:solidFill>
+                  <a:srgbClr val="FFFFFF"/>
+                </a:solidFill>
+                <a:latin typeface="Noto Sans JP" pitchFamily="34" charset="0"/>
+                <a:ea typeface="Noto Sans JP" pitchFamily="34" charset="-122"/>
+                <a:cs typeface="Noto Sans JP" pitchFamily="34" charset="-120"/>
+              </a:rPr>
+              <a:t>確かめ方を聞く</a:t>
+            </a:r>
+            <a:endParaRPr lang="ja-JP" sz="1300" dirty="0"/>
+          </a:p>
+        </p:txBody>
+      </p:sp>
+      <p:sp>
+        <p:nvSpPr>
+          <p:cNvPr id="10" name="card-body"/>
+          <p:cNvSpPr txBox="1"/>
+          <p:nvPr/>
+        </p:nvSpPr>
+        <p:spPr>
+          <a:xfrm>
+            <a:off x="3502152" y="2075688"/>
+            <a:ext cx="2139696" cy="1536192"/>
           </a:xfrm>
           <a:prstGeom prst="rect">
             <a:avLst/>
@@ -5974,43 +6262,9 @@
           <a:ln/>
         </p:spPr>
         <p:txBody>
-          <a:bodyPr wrap="square" lIns="0" tIns="0" rIns="0" bIns="0" rtlCol="0" anchor="ctr"/>
-          <a:lstStyle/>
-          <a:p>
-            <a:pPr indent="0" marL="0">
-              <a:buNone/>
-            </a:pPr>
-            <a:r>
-              <a:rPr lang="en-US" sz="1500" b="1" dirty="0">
-                <a:solidFill>
-                  <a:schemeClr val="tx1"/>
-                </a:solidFill>
-              </a:rPr>
-              <a:t>確かめ方を聞く</a:t>
-            </a:r>
-            <a:endParaRPr lang="en-US" sz="1500" dirty="0"/>
-          </a:p>
-        </p:txBody>
-      </p:sp>
-      <p:sp>
-        <p:nvSpPr>
-          <p:cNvPr id="11" name="card-body"/>
-          <p:cNvSpPr txBox="1"/>
-          <p:nvPr/>
-        </p:nvSpPr>
-        <p:spPr>
-          <a:xfrm>
-            <a:off x="3489960" y="2057400"/>
-            <a:ext cx="2164080" cy="1554480"/>
-          </a:xfrm>
-          <a:prstGeom prst="rect">
-            <a:avLst/>
-          </a:prstGeom>
-          <a:noFill/>
-          <a:ln/>
-        </p:spPr>
-        <p:txBody>
-          <a:bodyPr wrap="square" lIns="0" tIns="0" rIns="0" bIns="0" rtlCol="0" anchor="t"/>
+          <a:bodyPr wrap="square" lIns="0" tIns="0" rIns="0" bIns="0" rtlCol="0" anchor="t">
+            <a:normAutofit/>
+          </a:bodyPr>
           <a:lstStyle/>
           <a:p>
             <a:pPr indent="0" marL="0">
@@ -6020,46 +6274,49 @@
               <a:buNone/>
             </a:pPr>
             <a:r>
-              <a:rPr lang="en-US" sz="1300" dirty="0">
-                <a:solidFill>
-                  <a:schemeClr val="tx1"/>
-                </a:solidFill>
+              <a:rPr lang="ja-JP" altLang="en-US" sz="1350" b="1" dirty="0">
+                <a:solidFill>
+                  <a:srgbClr val="1A1A1A"/>
+                </a:solidFill>
+                <a:latin typeface="Noto Sans JP" pitchFamily="34" charset="0"/>
+                <a:ea typeface="Noto Sans JP" pitchFamily="34" charset="-122"/>
+                <a:cs typeface="Noto Sans JP" pitchFamily="34" charset="-120"/>
               </a:rPr>
               <a:t>「できたら、どこを開けば確認できるか教えて」</a:t>
             </a:r>
-            <a:endParaRPr lang="en-US" sz="1300" dirty="0"/>
-          </a:p>
-        </p:txBody>
-      </p:sp>
-      <p:sp>
-        <p:nvSpPr>
-          <p:cNvPr id="12" name="card"/>
+            <a:endParaRPr lang="ja-JP" sz="1350" dirty="0"/>
+          </a:p>
+        </p:txBody>
+      </p:sp>
+      <p:sp>
+        <p:nvSpPr>
+          <p:cNvPr id="11" name="card"/>
           <p:cNvSpPr/>
           <p:nvPr/>
         </p:nvSpPr>
         <p:spPr>
           <a:xfrm>
-            <a:off x="6065520" y="1463040"/>
-            <a:ext cx="2529840" cy="2286000"/>
+            <a:off x="6099048" y="1417320"/>
+            <a:ext cx="2542032" cy="2331720"/>
           </a:xfrm>
           <a:prstGeom prst="roundRect">
             <a:avLst>
-              <a:gd name="adj" fmla="val 4800"/>
+              <a:gd name="adj" fmla="val 3922"/>
             </a:avLst>
           </a:prstGeom>
           <a:solidFill>
-            <a:schemeClr val="bg1"/>
-          </a:solidFill>
-          <a:ln w="19050">
+            <a:srgbClr val="FFFFFF"/>
+          </a:solidFill>
+          <a:ln w="25400">
             <a:solidFill>
               <a:srgbClr val="1A1A1A"/>
             </a:solidFill>
             <a:prstDash val="solid"/>
           </a:ln>
           <a:effectLst>
-            <a:outerShdw sx="100000" sy="100000" kx="0" ky="0" algn="bl" rotWithShape="0" blurRad="101600" dist="38100" dir="2700000">
-              <a:srgbClr val="000000">
-                <a:alpha val="18000"/>
+            <a:outerShdw sx="100000" sy="100000" kx="0" ky="0" algn="bl" rotWithShape="0" blurRad="101600" dist="50800" dir="2700000">
+              <a:srgbClr val="1A1A1A">
+                <a:alpha val="100000"/>
               </a:srgbClr>
             </a:outerShdw>
           </a:effectLst>
@@ -6067,14 +6324,63 @@
       </p:sp>
       <p:sp>
         <p:nvSpPr>
-          <p:cNvPr id="13" name="card-head"/>
+          <p:cNvPr id="12" name="Text 9"/>
           <p:cNvSpPr txBox="1"/>
           <p:nvPr/>
         </p:nvSpPr>
         <p:spPr>
           <a:xfrm>
-            <a:off x="6248400" y="1645920"/>
-            <a:ext cx="2164080" cy="365760"/>
+            <a:off x="6281928" y="1600200"/>
+            <a:ext cx="1545336" cy="329184"/>
+          </a:xfrm>
+          <a:prstGeom prst="roundRect">
+            <a:avLst>
+              <a:gd name="adj" fmla="val 16667"/>
+            </a:avLst>
+          </a:prstGeom>
+          <a:solidFill>
+            <a:srgbClr val="DD6420"/>
+          </a:solidFill>
+          <a:ln>
+            <a:solidFill>
+              <a:srgbClr val="DD6420"/>
+            </a:solidFill>
+          </a:ln>
+        </p:spPr>
+        <p:txBody>
+          <a:bodyPr wrap="square" lIns="0" tIns="0" rIns="0" bIns="0" rtlCol="0" anchor="ctr">
+            <a:normAutofit/>
+          </a:bodyPr>
+          <a:lstStyle/>
+          <a:p>
+            <a:pPr algn="ctr" indent="0" marL="0">
+              <a:buNone/>
+            </a:pPr>
+            <a:r>
+              <a:rPr lang="ja-JP" altLang="en-US" sz="1300" b="1" dirty="0">
+                <a:solidFill>
+                  <a:srgbClr val="FFFFFF"/>
+                </a:solidFill>
+                <a:latin typeface="Noto Sans JP" pitchFamily="34" charset="0"/>
+                <a:ea typeface="Noto Sans JP" pitchFamily="34" charset="-122"/>
+                <a:cs typeface="Noto Sans JP" pitchFamily="34" charset="-120"/>
+              </a:rPr>
+              <a:t>先に質問させる</a:t>
+            </a:r>
+            <a:endParaRPr lang="ja-JP" sz="1300" dirty="0"/>
+          </a:p>
+        </p:txBody>
+      </p:sp>
+      <p:sp>
+        <p:nvSpPr>
+          <p:cNvPr id="13" name="card-body"/>
+          <p:cNvSpPr txBox="1"/>
+          <p:nvPr/>
+        </p:nvSpPr>
+        <p:spPr>
+          <a:xfrm>
+            <a:off x="6300216" y="2075688"/>
+            <a:ext cx="2139696" cy="1536192"/>
           </a:xfrm>
           <a:prstGeom prst="rect">
             <a:avLst/>
@@ -6083,43 +6389,9 @@
           <a:ln/>
         </p:spPr>
         <p:txBody>
-          <a:bodyPr wrap="square" lIns="0" tIns="0" rIns="0" bIns="0" rtlCol="0" anchor="ctr"/>
-          <a:lstStyle/>
-          <a:p>
-            <a:pPr indent="0" marL="0">
-              <a:buNone/>
-            </a:pPr>
-            <a:r>
-              <a:rPr lang="en-US" sz="1500" b="1" dirty="0">
-                <a:solidFill>
-                  <a:schemeClr val="tx1"/>
-                </a:solidFill>
-              </a:rPr>
-              <a:t>先に質問させる</a:t>
-            </a:r>
-            <a:endParaRPr lang="en-US" sz="1500" dirty="0"/>
-          </a:p>
-        </p:txBody>
-      </p:sp>
-      <p:sp>
-        <p:nvSpPr>
-          <p:cNvPr id="14" name="card-body"/>
-          <p:cNvSpPr txBox="1"/>
-          <p:nvPr/>
-        </p:nvSpPr>
-        <p:spPr>
-          <a:xfrm>
-            <a:off x="6248400" y="2057400"/>
-            <a:ext cx="2164080" cy="1554480"/>
-          </a:xfrm>
-          <a:prstGeom prst="rect">
-            <a:avLst/>
-          </a:prstGeom>
-          <a:noFill/>
-          <a:ln/>
-        </p:spPr>
-        <p:txBody>
-          <a:bodyPr wrap="square" lIns="0" tIns="0" rIns="0" bIns="0" rtlCol="0" anchor="t"/>
+          <a:bodyPr wrap="square" lIns="0" tIns="0" rIns="0" bIns="0" rtlCol="0" anchor="t">
+            <a:normAutofit/>
+          </a:bodyPr>
           <a:lstStyle/>
           <a:p>
             <a:pPr indent="0" marL="0">
@@ -6129,101 +6401,113 @@
               <a:buNone/>
             </a:pPr>
             <a:r>
-              <a:rPr lang="en-US" sz="1300" dirty="0">
-                <a:solidFill>
-                  <a:schemeClr val="tx1"/>
-                </a:solidFill>
+              <a:rPr lang="ja-JP" altLang="en-US" sz="1350" b="1" dirty="0">
+                <a:solidFill>
+                  <a:srgbClr val="1A1A1A"/>
+                </a:solidFill>
+                <a:latin typeface="Noto Sans JP" pitchFamily="34" charset="0"/>
+                <a:ea typeface="Noto Sans JP" pitchFamily="34" charset="-122"/>
+                <a:cs typeface="Noto Sans JP" pitchFamily="34" charset="-120"/>
               </a:rPr>
               <a:t>「作る前に、不明点を質問してください」</a:t>
             </a:r>
-            <a:endParaRPr lang="en-US" sz="1300" dirty="0"/>
-          </a:p>
-        </p:txBody>
-      </p:sp>
-      <p:sp>
-        <p:nvSpPr>
-          <p:cNvPr id="15" name="foot-box"/>
-          <p:cNvSpPr/>
-          <p:nvPr/>
-        </p:nvSpPr>
-        <p:spPr>
-          <a:xfrm>
-            <a:off x="548640" y="4114800"/>
-            <a:ext cx="8046720" cy="502920"/>
-          </a:xfrm>
-          <a:prstGeom prst="roundRect">
-            <a:avLst>
-              <a:gd name="adj" fmla="val 18182"/>
-            </a:avLst>
-          </a:prstGeom>
-          <a:solidFill>
-            <a:schemeClr val="bg2"/>
-          </a:solidFill>
-          <a:ln w="12700">
+            <a:endParaRPr lang="ja-JP" sz="1350" dirty="0"/>
+          </a:p>
+        </p:txBody>
+      </p:sp>
+      <p:sp>
+        <p:nvSpPr>
+          <p:cNvPr id="14" name="Text 11"/>
+          <p:cNvSpPr txBox="1"/>
+          <p:nvPr/>
+        </p:nvSpPr>
+        <p:spPr>
+          <a:xfrm rot="-60000">
+            <a:off x="502920" y="4114800"/>
+            <a:ext cx="8138160" cy="502920"/>
+          </a:xfrm>
+          <a:prstGeom prst="rect">
+            <a:avLst/>
+          </a:prstGeom>
+          <a:solidFill>
+            <a:srgbClr val="DD6420"/>
+          </a:solidFill>
+          <a:ln w="19050">
             <a:solidFill>
-              <a:schemeClr val="bg2"/>
+              <a:srgbClr val="1A1A1A"/>
             </a:solidFill>
-            <a:prstDash val="solid"/>
           </a:ln>
-        </p:spPr>
-      </p:sp>
-      <p:pic>
-        <p:nvPicPr>
-          <p:cNvPr id="16" name="foot-icon" descr="preencoded.png">    </p:cNvPr>
-          <p:cNvPicPr>
-            <a:picLocks noChangeAspect="1"/>
-          </p:cNvPicPr>
-          <p:nvPr/>
-        </p:nvPicPr>
-        <p:blipFill>
-          <a:blip r:embed="rId1"/>
-          <a:stretch>
-            <a:fillRect/>
-          </a:stretch>
-        </p:blipFill>
-        <p:spPr>
-          <a:xfrm>
-            <a:off x="685800" y="4242816"/>
-            <a:ext cx="246888" cy="246888"/>
-          </a:xfrm>
-          <a:prstGeom prst="rect">
-            <a:avLst/>
-          </a:prstGeom>
-        </p:spPr>
-      </p:pic>
-      <p:sp>
-        <p:nvSpPr>
-          <p:cNvPr id="17" name="foot-text"/>
-          <p:cNvSpPr txBox="1"/>
-          <p:nvPr/>
-        </p:nvSpPr>
-        <p:spPr>
-          <a:xfrm>
-            <a:off x="1051560" y="4114800"/>
-            <a:ext cx="7406640" cy="502920"/>
-          </a:xfrm>
-          <a:prstGeom prst="rect">
-            <a:avLst/>
-          </a:prstGeom>
-          <a:noFill/>
-          <a:ln/>
-        </p:spPr>
-        <p:txBody>
-          <a:bodyPr wrap="square" lIns="0" tIns="0" rIns="0" bIns="0" rtlCol="0" anchor="ctr"/>
-          <a:lstStyle/>
-          <a:p>
-            <a:pPr indent="0" marL="0">
-              <a:buNone/>
-            </a:pPr>
-            <a:r>
-              <a:rPr lang="en-US" sz="1150" dirty="0">
-                <a:solidFill>
-                  <a:schemeClr val="tx1"/>
-                </a:solidFill>
-              </a:rPr>
-              <a:t>動いた！と思ったら「今の状態をGitで記録して」。壊れたら「1つ前の記録に戻して」</a:t>
-            </a:r>
-            <a:endParaRPr lang="en-US" sz="1150" dirty="0"/>
+          <a:effectLst>
+            <a:outerShdw sx="100000" sy="100000" kx="0" ky="0" algn="bl" rotWithShape="0" blurRad="101600" dist="38100" dir="2700000">
+              <a:srgbClr val="1A1A1A">
+                <a:alpha val="100000"/>
+              </a:srgbClr>
+            </a:outerShdw>
+          </a:effectLst>
+        </p:spPr>
+        <p:txBody>
+          <a:bodyPr wrap="square" lIns="0" tIns="1905" rIns="1905" bIns="0" rtlCol="0" anchor="ctr">
+            <a:normAutofit/>
+          </a:bodyPr>
+          <a:lstStyle/>
+          <a:p>
+            <a:pPr algn="ctr" indent="0" marL="0">
+              <a:buNone/>
+            </a:pPr>
+            <a:r>
+              <a:rPr lang="ja-JP" altLang="en-US" sz="1300" b="1" dirty="0">
+                <a:solidFill>
+                  <a:srgbClr val="FFFFFF"/>
+                </a:solidFill>
+                <a:latin typeface="Noto Sans JP" pitchFamily="34" charset="0"/>
+                <a:ea typeface="Noto Sans JP" pitchFamily="34" charset="-122"/>
+                <a:cs typeface="Noto Sans JP" pitchFamily="34" charset="-120"/>
+              </a:rPr>
+              <a:t>動いた！と思ったら</a:t>
+            </a:r>
+            <a:pPr algn="ctr" indent="0" marL="0">
+              <a:buNone/>
+            </a:pPr>
+            <a:r>
+              <a:rPr lang="ja-JP" altLang="en-US" sz="1300" b="1" dirty="0">
+                <a:solidFill>
+                  <a:srgbClr val="FFD600"/>
+                </a:solidFill>
+                <a:latin typeface="Noto Sans JP" pitchFamily="34" charset="0"/>
+                <a:ea typeface="Noto Sans JP" pitchFamily="34" charset="-122"/>
+                <a:cs typeface="Noto Sans JP" pitchFamily="34" charset="-120"/>
+              </a:rPr>
+              <a:t>「今の状態をGitで記録して」</a:t>
+            </a:r>
+            <a:pPr algn="ctr" indent="0" marL="0">
+              <a:buNone/>
+            </a:pPr>
+            <a:r>
+              <a:rPr lang="ja-JP" altLang="en-US" sz="1300" b="1" dirty="0">
+                <a:solidFill>
+                  <a:srgbClr val="FFFFFF"/>
+                </a:solidFill>
+                <a:latin typeface="Noto Sans JP" pitchFamily="34" charset="0"/>
+                <a:ea typeface="Noto Sans JP" pitchFamily="34" charset="-122"/>
+                <a:cs typeface="Noto Sans JP" pitchFamily="34" charset="-120"/>
+              </a:rPr>
+              <a:t>。壊れたら</a:t>
+            </a:r>
+            <a:pPr algn="ctr" indent="0" marL="0">
+              <a:buNone/>
+            </a:pPr>
+            <a:r>
+              <a:rPr lang="ja-JP" altLang="en-US" sz="1300" b="1" dirty="0">
+                <a:solidFill>
+                  <a:srgbClr val="FFD600"/>
+                </a:solidFill>
+                <a:latin typeface="Noto Sans JP" pitchFamily="34" charset="0"/>
+                <a:ea typeface="Noto Sans JP" pitchFamily="34" charset="-122"/>
+                <a:cs typeface="Noto Sans JP" pitchFamily="34" charset="-120"/>
+              </a:rPr>
+              <a:t>「1つ前の記録に戻して」</a:t>
+            </a:r>
+            <a:endParaRPr lang="ja-JP" sz="1300" dirty="0"/>
           </a:p>
         </p:txBody>
       </p:sp>
@@ -6239,8 +6523,8 @@
         </p:nvSpPr>
         <p:spPr>
           <a:xfrm>
-            <a:off x="8229600" y="4773168"/>
-            <a:ext cx="365760" cy="228600"/>
+            <a:off x="8366760" y="4754880"/>
+            <a:ext cx="365760" cy="274320"/>
           </a:xfrm>
           <a:prstGeom prst="rect">
             <a:avLst/>
@@ -6252,20 +6536,23 @@
           </a:extLst>
         </p:spPr>
         <p:txBody>
-          <a:bodyPr/>
+          <a:bodyPr anchor="ctr"/>
           <a:lstStyle>
             <a:lvl1pPr>
-              <a:defRPr sz="900">
-                <a:solidFill>
-                  <a:srgbClr val="5A6872"/>
-                </a:solidFill>
+              <a:defRPr sz="850">
+                <a:solidFill>
+                  <a:srgbClr val="FFFFFF"/>
+                </a:solidFill>
+                <a:latin typeface="Noto Sans JP"/>
+                <a:ea typeface="Noto Sans JP"/>
+                <a:cs typeface="Noto Sans JP"/>
               </a:defRPr>
             </a:lvl1pPr>
           </a:lstStyle>
           <a:p>
             <a:pPr algn="r"/>
             <a:fld id="{F7021451-1387-4CA6-816F-3879F97B5CBC}" type="slidenum">
-              <a:rPr b="0" lang="en-US"/>
+              <a:rPr b="1" lang="en-US"/>
               <a:t>6</a:t>
             </a:fld>
             <a:endParaRPr lang="en-US"/>
@@ -6300,15 +6587,58 @@
       <p:sp>
         <p:nvSpPr>
           <p:cNvPr id="2" name="Text 0"/>
-          <p:cNvSpPr/>
-          <p:nvPr>
-            <p:ph idx="100" type="title" hasCustomPrompt="1"/>
-          </p:nvPr>
-        </p:nvSpPr>
-        <p:spPr>
-          <a:xfrm>
-            <a:off x="548640" y="658368"/>
-            <a:ext cx="8046720" cy="566928"/>
+          <p:cNvSpPr txBox="1"/>
+          <p:nvPr/>
+        </p:nvSpPr>
+        <p:spPr>
+          <a:xfrm rot="-180000">
+            <a:off x="411480" y="201168"/>
+            <a:ext cx="1915668" cy="352044"/>
+          </a:xfrm>
+          <a:prstGeom prst="rect">
+            <a:avLst/>
+          </a:prstGeom>
+          <a:solidFill>
+            <a:srgbClr val="DD6420"/>
+          </a:solidFill>
+          <a:ln>
+            <a:solidFill>
+              <a:srgbClr val="DD6420"/>
+            </a:solidFill>
+          </a:ln>
+        </p:spPr>
+        <p:txBody>
+          <a:bodyPr wrap="square" lIns="0" tIns="0" rIns="0" bIns="0" rtlCol="0" anchor="ctr"/>
+          <a:lstStyle/>
+          <a:p>
+            <a:pPr algn="ctr" indent="0" marL="0">
+              <a:buNone/>
+            </a:pPr>
+            <a:r>
+              <a:rPr lang="ja-JP" altLang="en-US" sz="1100" dirty="0">
+                <a:solidFill>
+                  <a:srgbClr val="FFFFFF"/>
+                </a:solidFill>
+                <a:latin typeface="Dela Gothic One" pitchFamily="34" charset="0"/>
+                <a:ea typeface="けいふぉんと" pitchFamily="34" charset="-122"/>
+                <a:cs typeface="Dela Gothic One" pitchFamily="34" charset="-120"/>
+              </a:rPr>
+              <a:t>ハンズオン② 20分</a:t>
+            </a:r>
+            <a:endParaRPr lang="ja-JP" sz="1100" dirty="0"/>
+          </a:p>
+        </p:txBody>
+      </p:sp>
+      <p:sp>
+        <p:nvSpPr>
+          <p:cNvPr id="3" name="Text 1"/>
+          <p:cNvSpPr txBox="1"/>
+          <p:nvPr/>
+        </p:nvSpPr>
+        <p:spPr>
+          <a:xfrm>
+            <a:off x="411480" y="502920"/>
+            <a:ext cx="8321040" cy="685800"/>
           </a:xfrm>
           <a:prstGeom prst="rect">
             <a:avLst/>
@@ -6317,122 +6647,118 @@
           <a:ln/>
         </p:spPr>
         <p:txBody>
-          <a:bodyPr wrap="square" lIns="0" tIns="0" rIns="0" bIns="0" rtlCol="0" anchor="ctr"/>
-          <a:lstStyle/>
-          <a:p>
-            <a:pPr algn="l" indent="0" marL="0">
-              <a:buNone/>
-            </a:pPr>
-            <a:r>
-              <a:rPr lang="en-US" sz="2400" b="1" dirty="0">
-                <a:solidFill>
-                  <a:schemeClr val="tx1"/>
-                </a:solidFill>
+          <a:bodyPr wrap="square" lIns="0" tIns="0" rIns="0" bIns="0" rtlCol="0" anchor="ctr">
+            <a:normAutofit/>
+          </a:bodyPr>
+          <a:lstStyle/>
+          <a:p>
+            <a:pPr indent="0" marL="0">
+              <a:buNone/>
+            </a:pPr>
+            <a:r>
+              <a:rPr lang="ja-JP" altLang="en-US" sz="2600" dirty="0">
+                <a:solidFill>
+                  <a:srgbClr val="1A1A1A"/>
+                </a:solidFill>
+                <a:latin typeface="Dela Gothic One" pitchFamily="34" charset="0"/>
+                <a:ea typeface="けいふぉんと" pitchFamily="34" charset="-122"/>
+                <a:cs typeface="Dela Gothic One" pitchFamily="34" charset="-120"/>
               </a:rPr>
               <a:t>GitHubに保存する</a:t>
             </a:r>
-            <a:endParaRPr lang="en-US" sz="2400" dirty="0"/>
-          </a:p>
-        </p:txBody>
-      </p:sp>
-      <p:sp>
-        <p:nvSpPr>
-          <p:cNvPr id="3" name="chip"/>
+            <a:endParaRPr lang="ja-JP" sz="2600" dirty="0"/>
+          </a:p>
+        </p:txBody>
+      </p:sp>
+      <p:sp>
+        <p:nvSpPr>
+          <p:cNvPr id="4" name="card"/>
           <p:cNvSpPr/>
           <p:nvPr/>
         </p:nvSpPr>
         <p:spPr>
           <a:xfrm>
-            <a:off x="548640" y="292608"/>
-            <a:ext cx="1755648" cy="292608"/>
+            <a:off x="502920" y="1947672"/>
+            <a:ext cx="8138160" cy="566928"/>
           </a:xfrm>
           <a:prstGeom prst="roundRect">
             <a:avLst>
-              <a:gd name="adj" fmla="val 50000"/>
+              <a:gd name="adj" fmla="val 16129"/>
             </a:avLst>
           </a:prstGeom>
           <a:solidFill>
-            <a:schemeClr val="accent2"/>
-          </a:solidFill>
-          <a:ln w="12700">
-            <a:solidFill>
-              <a:schemeClr val="accent2"/>
-            </a:solidFill>
-            <a:prstDash val="solid"/>
-          </a:ln>
-        </p:spPr>
-      </p:sp>
-      <p:sp>
-        <p:nvSpPr>
-          <p:cNvPr id="4" name="chip-text"/>
-          <p:cNvSpPr txBox="1"/>
-          <p:nvPr/>
-        </p:nvSpPr>
-        <p:spPr>
-          <a:xfrm>
-            <a:off x="548640" y="292608"/>
-            <a:ext cx="1755648" cy="292608"/>
-          </a:xfrm>
-          <a:prstGeom prst="rect">
-            <a:avLst/>
-          </a:prstGeom>
-          <a:noFill/>
-          <a:ln/>
-        </p:spPr>
-        <p:txBody>
-          <a:bodyPr wrap="square" lIns="0" tIns="0" rIns="0" bIns="0" rtlCol="0" anchor="ctr"/>
-          <a:lstStyle/>
-          <a:p>
-            <a:pPr algn="ctr" indent="0" marL="0">
-              <a:buNone/>
-            </a:pPr>
-            <a:r>
-              <a:rPr lang="en-US" sz="1100" b="1" dirty="0">
-                <a:solidFill>
-                  <a:schemeClr val="bg1"/>
-                </a:solidFill>
-              </a:rPr>
-              <a:t>ハンズオン② 20分</a:t>
-            </a:r>
-            <a:endParaRPr lang="en-US" sz="1100" dirty="0"/>
-          </a:p>
-        </p:txBody>
-      </p:sp>
-      <p:sp>
-        <p:nvSpPr>
-          <p:cNvPr id="5" name="step-num"/>
-          <p:cNvSpPr/>
-          <p:nvPr/>
-        </p:nvSpPr>
-        <p:spPr>
-          <a:xfrm>
-            <a:off x="548640" y="2107692"/>
-            <a:ext cx="384048" cy="384048"/>
-          </a:xfrm>
-          <a:prstGeom prst="ellipse">
-            <a:avLst/>
-          </a:prstGeom>
-          <a:solidFill>
-            <a:schemeClr val="accent1"/>
-          </a:solidFill>
-          <a:ln w="15875">
+            <a:srgbClr val="FFFFFF"/>
+          </a:solidFill>
+          <a:ln w="25400">
             <a:solidFill>
               <a:srgbClr val="1A1A1A"/>
             </a:solidFill>
             <a:prstDash val="solid"/>
           </a:ln>
-        </p:spPr>
-      </p:sp>
-      <p:sp>
-        <p:nvSpPr>
-          <p:cNvPr id="6" name="step-num-text"/>
+          <a:effectLst>
+            <a:outerShdw sx="100000" sy="100000" kx="0" ky="0" algn="bl" rotWithShape="0" blurRad="101600" dist="38100" dir="2700000">
+              <a:srgbClr val="1A1A1A">
+                <a:alpha val="100000"/>
+              </a:srgbClr>
+            </a:outerShdw>
+          </a:effectLst>
+        </p:spPr>
+      </p:sp>
+      <p:sp>
+        <p:nvSpPr>
+          <p:cNvPr id="5" name="Text 3"/>
           <p:cNvSpPr txBox="1"/>
           <p:nvPr/>
         </p:nvSpPr>
         <p:spPr>
           <a:xfrm>
-            <a:off x="548640" y="2107692"/>
-            <a:ext cx="384048" cy="384048"/>
+            <a:off x="640080" y="2029968"/>
+            <a:ext cx="402336" cy="402336"/>
+          </a:xfrm>
+          <a:prstGeom prst="ellipse">
+            <a:avLst/>
+          </a:prstGeom>
+          <a:solidFill>
+            <a:srgbClr val="DD6420"/>
+          </a:solidFill>
+          <a:ln w="19050">
+            <a:solidFill>
+              <a:srgbClr val="1A1A1A"/>
+            </a:solidFill>
+          </a:ln>
+        </p:spPr>
+        <p:txBody>
+          <a:bodyPr wrap="square" lIns="0" tIns="0" rIns="0" bIns="0" rtlCol="0" anchor="ctr"/>
+          <a:lstStyle/>
+          <a:p>
+            <a:pPr algn="ctr" indent="0" marL="0">
+              <a:buNone/>
+            </a:pPr>
+            <a:r>
+              <a:rPr lang="ja-JP" altLang="en-US" sz="1500" dirty="0">
+                <a:solidFill>
+                  <a:srgbClr val="FFFFFF"/>
+                </a:solidFill>
+                <a:latin typeface="Dela Gothic One" pitchFamily="34" charset="0"/>
+                <a:ea typeface="けいふぉんと" pitchFamily="34" charset="-122"/>
+                <a:cs typeface="Dela Gothic One" pitchFamily="34" charset="-120"/>
+              </a:rPr>
+              <a:t>1</a:t>
+            </a:r>
+            <a:endParaRPr lang="ja-JP" sz="1500" dirty="0"/>
+          </a:p>
+        </p:txBody>
+      </p:sp>
+      <p:sp>
+        <p:nvSpPr>
+          <p:cNvPr id="6" name="step-text"/>
+          <p:cNvSpPr txBox="1"/>
+          <p:nvPr/>
+        </p:nvSpPr>
+        <p:spPr>
+          <a:xfrm>
+            <a:off x="1234440" y="1947672"/>
+            <a:ext cx="7269480" cy="566928"/>
           </a:xfrm>
           <a:prstGeom prst="rect">
             <a:avLst/>
@@ -6441,95 +6767,118 @@
           <a:ln/>
         </p:spPr>
         <p:txBody>
-          <a:bodyPr wrap="square" lIns="0" tIns="0" rIns="0" bIns="0" rtlCol="0" anchor="ctr"/>
-          <a:lstStyle/>
-          <a:p>
-            <a:pPr algn="ctr" indent="0" marL="0">
-              <a:buNone/>
-            </a:pPr>
-            <a:r>
-              <a:rPr lang="en-US" sz="1400" b="1" dirty="0">
-                <a:solidFill>
-                  <a:schemeClr val="tx1"/>
-                </a:solidFill>
-              </a:rPr>
-              <a:t>1</a:t>
-            </a:r>
-            <a:endParaRPr lang="en-US" sz="1400" dirty="0"/>
-          </a:p>
-        </p:txBody>
-      </p:sp>
-      <p:sp>
-        <p:nvSpPr>
-          <p:cNvPr id="7" name="step-text"/>
-          <p:cNvSpPr txBox="1"/>
-          <p:nvPr/>
-        </p:nvSpPr>
-        <p:spPr>
-          <a:xfrm>
-            <a:off x="1097280" y="1997964"/>
-            <a:ext cx="7498080" cy="603504"/>
-          </a:xfrm>
-          <a:prstGeom prst="rect">
-            <a:avLst/>
-          </a:prstGeom>
-          <a:noFill/>
-          <a:ln/>
-        </p:spPr>
-        <p:txBody>
-          <a:bodyPr wrap="square" lIns="0" tIns="0" rIns="0" bIns="0" rtlCol="0" anchor="ctr"/>
+          <a:bodyPr wrap="square" lIns="0" tIns="0" rIns="0" bIns="0" rtlCol="0" anchor="ctr">
+            <a:normAutofit/>
+          </a:bodyPr>
           <a:lstStyle/>
           <a:p>
             <a:pPr indent="0" marL="0">
               <a:buNone/>
             </a:pPr>
             <a:r>
-              <a:rPr lang="en-US" sz="1450" dirty="0">
-                <a:solidFill>
-                  <a:schemeClr val="tx1"/>
-                </a:solidFill>
+              <a:rPr lang="ja-JP" altLang="en-US" sz="1400" b="1" dirty="0">
+                <a:solidFill>
+                  <a:srgbClr val="1A1A1A"/>
+                </a:solidFill>
+                <a:latin typeface="Noto Sans JP" pitchFamily="34" charset="0"/>
+                <a:ea typeface="Noto Sans JP" pitchFamily="34" charset="-122"/>
+                <a:cs typeface="Noto Sans JP" pitchFamily="34" charset="-120"/>
               </a:rPr>
               <a:t>GitHubで新しいリポジトリを作る（公開範囲は Private）</a:t>
             </a:r>
-            <a:endParaRPr lang="en-US" sz="1450" dirty="0"/>
-          </a:p>
-        </p:txBody>
-      </p:sp>
-      <p:sp>
-        <p:nvSpPr>
-          <p:cNvPr id="8" name="step-num"/>
+            <a:endParaRPr lang="ja-JP" sz="1400" dirty="0"/>
+          </a:p>
+        </p:txBody>
+      </p:sp>
+      <p:sp>
+        <p:nvSpPr>
+          <p:cNvPr id="7" name="card"/>
           <p:cNvSpPr/>
           <p:nvPr/>
         </p:nvSpPr>
         <p:spPr>
           <a:xfrm>
-            <a:off x="548640" y="2711196"/>
-            <a:ext cx="384048" cy="384048"/>
-          </a:xfrm>
-          <a:prstGeom prst="ellipse">
-            <a:avLst/>
-          </a:prstGeom>
-          <a:solidFill>
-            <a:schemeClr val="accent1"/>
-          </a:solidFill>
-          <a:ln w="15875">
+            <a:off x="502920" y="2642616"/>
+            <a:ext cx="8138160" cy="566928"/>
+          </a:xfrm>
+          <a:prstGeom prst="roundRect">
+            <a:avLst>
+              <a:gd name="adj" fmla="val 16129"/>
+            </a:avLst>
+          </a:prstGeom>
+          <a:solidFill>
+            <a:srgbClr val="FFFFFF"/>
+          </a:solidFill>
+          <a:ln w="25400">
             <a:solidFill>
               <a:srgbClr val="1A1A1A"/>
             </a:solidFill>
             <a:prstDash val="solid"/>
           </a:ln>
-        </p:spPr>
-      </p:sp>
-      <p:sp>
-        <p:nvSpPr>
-          <p:cNvPr id="9" name="step-num-text"/>
+          <a:effectLst>
+            <a:outerShdw sx="100000" sy="100000" kx="0" ky="0" algn="bl" rotWithShape="0" blurRad="101600" dist="38100" dir="2700000">
+              <a:srgbClr val="1A1A1A">
+                <a:alpha val="100000"/>
+              </a:srgbClr>
+            </a:outerShdw>
+          </a:effectLst>
+        </p:spPr>
+      </p:sp>
+      <p:sp>
+        <p:nvSpPr>
+          <p:cNvPr id="8" name="Text 6"/>
           <p:cNvSpPr txBox="1"/>
           <p:nvPr/>
         </p:nvSpPr>
         <p:spPr>
           <a:xfrm>
-            <a:off x="548640" y="2711196"/>
-            <a:ext cx="384048" cy="384048"/>
+            <a:off x="640080" y="2724912"/>
+            <a:ext cx="402336" cy="402336"/>
+          </a:xfrm>
+          <a:prstGeom prst="ellipse">
+            <a:avLst/>
+          </a:prstGeom>
+          <a:solidFill>
+            <a:srgbClr val="DD6420"/>
+          </a:solidFill>
+          <a:ln w="19050">
+            <a:solidFill>
+              <a:srgbClr val="1A1A1A"/>
+            </a:solidFill>
+          </a:ln>
+        </p:spPr>
+        <p:txBody>
+          <a:bodyPr wrap="square" lIns="0" tIns="0" rIns="0" bIns="0" rtlCol="0" anchor="ctr"/>
+          <a:lstStyle/>
+          <a:p>
+            <a:pPr algn="ctr" indent="0" marL="0">
+              <a:buNone/>
+            </a:pPr>
+            <a:r>
+              <a:rPr lang="ja-JP" altLang="en-US" sz="1500" dirty="0">
+                <a:solidFill>
+                  <a:srgbClr val="FFFFFF"/>
+                </a:solidFill>
+                <a:latin typeface="Dela Gothic One" pitchFamily="34" charset="0"/>
+                <a:ea typeface="けいふぉんと" pitchFamily="34" charset="-122"/>
+                <a:cs typeface="Dela Gothic One" pitchFamily="34" charset="-120"/>
+              </a:rPr>
+              <a:t>2</a:t>
+            </a:r>
+            <a:endParaRPr lang="ja-JP" sz="1500" dirty="0"/>
+          </a:p>
+        </p:txBody>
+      </p:sp>
+      <p:sp>
+        <p:nvSpPr>
+          <p:cNvPr id="9" name="step-text"/>
+          <p:cNvSpPr txBox="1"/>
+          <p:nvPr/>
+        </p:nvSpPr>
+        <p:spPr>
+          <a:xfrm>
+            <a:off x="1234440" y="2642616"/>
+            <a:ext cx="7269480" cy="566928"/>
           </a:xfrm>
           <a:prstGeom prst="rect">
             <a:avLst/>
@@ -6538,95 +6887,118 @@
           <a:ln/>
         </p:spPr>
         <p:txBody>
-          <a:bodyPr wrap="square" lIns="0" tIns="0" rIns="0" bIns="0" rtlCol="0" anchor="ctr"/>
-          <a:lstStyle/>
-          <a:p>
-            <a:pPr algn="ctr" indent="0" marL="0">
-              <a:buNone/>
-            </a:pPr>
-            <a:r>
-              <a:rPr lang="en-US" sz="1400" b="1" dirty="0">
-                <a:solidFill>
-                  <a:schemeClr val="tx1"/>
-                </a:solidFill>
-              </a:rPr>
-              <a:t>2</a:t>
-            </a:r>
-            <a:endParaRPr lang="en-US" sz="1400" dirty="0"/>
-          </a:p>
-        </p:txBody>
-      </p:sp>
-      <p:sp>
-        <p:nvSpPr>
-          <p:cNvPr id="10" name="step-text"/>
-          <p:cNvSpPr txBox="1"/>
-          <p:nvPr/>
-        </p:nvSpPr>
-        <p:spPr>
-          <a:xfrm>
-            <a:off x="1097280" y="2601468"/>
-            <a:ext cx="7498080" cy="603504"/>
-          </a:xfrm>
-          <a:prstGeom prst="rect">
-            <a:avLst/>
-          </a:prstGeom>
-          <a:noFill/>
-          <a:ln/>
-        </p:spPr>
-        <p:txBody>
-          <a:bodyPr wrap="square" lIns="0" tIns="0" rIns="0" bIns="0" rtlCol="0" anchor="ctr"/>
+          <a:bodyPr wrap="square" lIns="0" tIns="0" rIns="0" bIns="0" rtlCol="0" anchor="ctr">
+            <a:normAutofit/>
+          </a:bodyPr>
           <a:lstStyle/>
           <a:p>
             <a:pPr indent="0" marL="0">
               <a:buNone/>
             </a:pPr>
             <a:r>
-              <a:rPr lang="en-US" sz="1450" dirty="0">
-                <a:solidFill>
-                  <a:schemeClr val="tx1"/>
-                </a:solidFill>
+              <a:rPr lang="ja-JP" altLang="en-US" sz="1400" b="1" dirty="0">
+                <a:solidFill>
+                  <a:srgbClr val="1A1A1A"/>
+                </a:solidFill>
+                <a:latin typeface="Noto Sans JP" pitchFamily="34" charset="0"/>
+                <a:ea typeface="Noto Sans JP" pitchFamily="34" charset="-122"/>
+                <a:cs typeface="Noto Sans JP" pitchFamily="34" charset="-120"/>
               </a:rPr>
               <a:t>Claude Codeに「このフォルダをGitHubにアップロードしたい。手順を教えて」と頼む</a:t>
             </a:r>
-            <a:endParaRPr lang="en-US" sz="1450" dirty="0"/>
-          </a:p>
-        </p:txBody>
-      </p:sp>
-      <p:sp>
-        <p:nvSpPr>
-          <p:cNvPr id="11" name="step-num"/>
+            <a:endParaRPr lang="ja-JP" sz="1400" dirty="0"/>
+          </a:p>
+        </p:txBody>
+      </p:sp>
+      <p:sp>
+        <p:nvSpPr>
+          <p:cNvPr id="10" name="card"/>
           <p:cNvSpPr/>
           <p:nvPr/>
         </p:nvSpPr>
         <p:spPr>
           <a:xfrm>
-            <a:off x="548640" y="3314700"/>
-            <a:ext cx="384048" cy="384048"/>
-          </a:xfrm>
-          <a:prstGeom prst="ellipse">
-            <a:avLst/>
-          </a:prstGeom>
-          <a:solidFill>
-            <a:schemeClr val="accent1"/>
-          </a:solidFill>
-          <a:ln w="15875">
+            <a:off x="502920" y="3337560"/>
+            <a:ext cx="8138160" cy="566928"/>
+          </a:xfrm>
+          <a:prstGeom prst="roundRect">
+            <a:avLst>
+              <a:gd name="adj" fmla="val 16129"/>
+            </a:avLst>
+          </a:prstGeom>
+          <a:solidFill>
+            <a:srgbClr val="FFFFFF"/>
+          </a:solidFill>
+          <a:ln w="25400">
             <a:solidFill>
               <a:srgbClr val="1A1A1A"/>
             </a:solidFill>
             <a:prstDash val="solid"/>
           </a:ln>
-        </p:spPr>
-      </p:sp>
-      <p:sp>
-        <p:nvSpPr>
-          <p:cNvPr id="12" name="step-num-text"/>
+          <a:effectLst>
+            <a:outerShdw sx="100000" sy="100000" kx="0" ky="0" algn="bl" rotWithShape="0" blurRad="101600" dist="38100" dir="2700000">
+              <a:srgbClr val="1A1A1A">
+                <a:alpha val="100000"/>
+              </a:srgbClr>
+            </a:outerShdw>
+          </a:effectLst>
+        </p:spPr>
+      </p:sp>
+      <p:sp>
+        <p:nvSpPr>
+          <p:cNvPr id="11" name="Text 9"/>
           <p:cNvSpPr txBox="1"/>
           <p:nvPr/>
         </p:nvSpPr>
         <p:spPr>
           <a:xfrm>
-            <a:off x="548640" y="3314700"/>
-            <a:ext cx="384048" cy="384048"/>
+            <a:off x="640080" y="3419856"/>
+            <a:ext cx="402336" cy="402336"/>
+          </a:xfrm>
+          <a:prstGeom prst="ellipse">
+            <a:avLst/>
+          </a:prstGeom>
+          <a:solidFill>
+            <a:srgbClr val="DD6420"/>
+          </a:solidFill>
+          <a:ln w="19050">
+            <a:solidFill>
+              <a:srgbClr val="1A1A1A"/>
+            </a:solidFill>
+          </a:ln>
+        </p:spPr>
+        <p:txBody>
+          <a:bodyPr wrap="square" lIns="0" tIns="0" rIns="0" bIns="0" rtlCol="0" anchor="ctr"/>
+          <a:lstStyle/>
+          <a:p>
+            <a:pPr algn="ctr" indent="0" marL="0">
+              <a:buNone/>
+            </a:pPr>
+            <a:r>
+              <a:rPr lang="ja-JP" altLang="en-US" sz="1500" dirty="0">
+                <a:solidFill>
+                  <a:srgbClr val="FFFFFF"/>
+                </a:solidFill>
+                <a:latin typeface="Dela Gothic One" pitchFamily="34" charset="0"/>
+                <a:ea typeface="けいふぉんと" pitchFamily="34" charset="-122"/>
+                <a:cs typeface="Dela Gothic One" pitchFamily="34" charset="-120"/>
+              </a:rPr>
+              <a:t>3</a:t>
+            </a:r>
+            <a:endParaRPr lang="ja-JP" sz="1500" dirty="0"/>
+          </a:p>
+        </p:txBody>
+      </p:sp>
+      <p:sp>
+        <p:nvSpPr>
+          <p:cNvPr id="12" name="step-text"/>
+          <p:cNvSpPr txBox="1"/>
+          <p:nvPr/>
+        </p:nvSpPr>
+        <p:spPr>
+          <a:xfrm>
+            <a:off x="1234440" y="3337560"/>
+            <a:ext cx="7269480" cy="566928"/>
           </a:xfrm>
           <a:prstGeom prst="rect">
             <a:avLst/>
@@ -6635,57 +7007,26 @@
           <a:ln/>
         </p:spPr>
         <p:txBody>
-          <a:bodyPr wrap="square" lIns="0" tIns="0" rIns="0" bIns="0" rtlCol="0" anchor="ctr"/>
-          <a:lstStyle/>
-          <a:p>
-            <a:pPr algn="ctr" indent="0" marL="0">
-              <a:buNone/>
-            </a:pPr>
-            <a:r>
-              <a:rPr lang="en-US" sz="1400" b="1" dirty="0">
-                <a:solidFill>
-                  <a:schemeClr val="tx1"/>
-                </a:solidFill>
-              </a:rPr>
-              <a:t>3</a:t>
-            </a:r>
-            <a:endParaRPr lang="en-US" sz="1400" dirty="0"/>
-          </a:p>
-        </p:txBody>
-      </p:sp>
-      <p:sp>
-        <p:nvSpPr>
-          <p:cNvPr id="13" name="step-text"/>
-          <p:cNvSpPr txBox="1"/>
-          <p:nvPr/>
-        </p:nvSpPr>
-        <p:spPr>
-          <a:xfrm>
-            <a:off x="1097280" y="3204972"/>
-            <a:ext cx="7498080" cy="603504"/>
-          </a:xfrm>
-          <a:prstGeom prst="rect">
-            <a:avLst/>
-          </a:prstGeom>
-          <a:noFill/>
-          <a:ln/>
-        </p:spPr>
-        <p:txBody>
-          <a:bodyPr wrap="square" lIns="0" tIns="0" rIns="0" bIns="0" rtlCol="0" anchor="ctr"/>
+          <a:bodyPr wrap="square" lIns="0" tIns="0" rIns="0" bIns="0" rtlCol="0" anchor="ctr">
+            <a:normAutofit/>
+          </a:bodyPr>
           <a:lstStyle/>
           <a:p>
             <a:pPr indent="0" marL="0">
               <a:buNone/>
             </a:pPr>
             <a:r>
-              <a:rPr lang="en-US" sz="1450" dirty="0">
-                <a:solidFill>
-                  <a:schemeClr val="tx1"/>
-                </a:solidFill>
+              <a:rPr lang="ja-JP" altLang="en-US" sz="1400" b="1" dirty="0">
+                <a:solidFill>
+                  <a:srgbClr val="1A1A1A"/>
+                </a:solidFill>
+                <a:latin typeface="Noto Sans JP" pitchFamily="34" charset="0"/>
+                <a:ea typeface="Noto Sans JP" pitchFamily="34" charset="-122"/>
+                <a:cs typeface="Noto Sans JP" pitchFamily="34" charset="-120"/>
               </a:rPr>
               <a:t>GitHubの画面で、ファイルが見えることを確かめる</a:t>
             </a:r>
-            <a:endParaRPr lang="en-US" sz="1450" dirty="0"/>
+            <a:endParaRPr lang="ja-JP" sz="1400" dirty="0"/>
           </a:p>
         </p:txBody>
       </p:sp>
@@ -6701,8 +7042,8 @@
         </p:nvSpPr>
         <p:spPr>
           <a:xfrm>
-            <a:off x="8229600" y="4773168"/>
-            <a:ext cx="365760" cy="228600"/>
+            <a:off x="8366760" y="4754880"/>
+            <a:ext cx="365760" cy="274320"/>
           </a:xfrm>
           <a:prstGeom prst="rect">
             <a:avLst/>
@@ -6714,20 +7055,23 @@
           </a:extLst>
         </p:spPr>
         <p:txBody>
-          <a:bodyPr/>
+          <a:bodyPr anchor="ctr"/>
           <a:lstStyle>
             <a:lvl1pPr>
-              <a:defRPr sz="900">
-                <a:solidFill>
-                  <a:srgbClr val="5A6872"/>
-                </a:solidFill>
+              <a:defRPr sz="850">
+                <a:solidFill>
+                  <a:srgbClr val="FFFFFF"/>
+                </a:solidFill>
+                <a:latin typeface="Noto Sans JP"/>
+                <a:ea typeface="Noto Sans JP"/>
+                <a:cs typeface="Noto Sans JP"/>
               </a:defRPr>
             </a:lvl1pPr>
           </a:lstStyle>
           <a:p>
             <a:pPr algn="r"/>
             <a:fld id="{F7021451-1387-4CA6-816F-3879F97B5CBC}" type="slidenum">
-              <a:rPr b="0" lang="en-US"/>
+              <a:rPr b="1" lang="en-US"/>
               <a:t>7</a:t>
             </a:fld>
             <a:endParaRPr lang="en-US"/>
@@ -6762,15 +7106,58 @@
       <p:sp>
         <p:nvSpPr>
           <p:cNvPr id="2" name="Text 0"/>
-          <p:cNvSpPr/>
-          <p:nvPr>
-            <p:ph idx="100" type="title" hasCustomPrompt="1"/>
-          </p:nvPr>
-        </p:nvSpPr>
-        <p:spPr>
-          <a:xfrm>
-            <a:off x="548640" y="658368"/>
-            <a:ext cx="8046720" cy="566928"/>
+          <p:cNvSpPr txBox="1"/>
+          <p:nvPr/>
+        </p:nvSpPr>
+        <p:spPr>
+          <a:xfrm rot="-180000">
+            <a:off x="411480" y="201168"/>
+            <a:ext cx="1040587" cy="352044"/>
+          </a:xfrm>
+          <a:prstGeom prst="rect">
+            <a:avLst/>
+          </a:prstGeom>
+          <a:solidFill>
+            <a:srgbClr val="1A1A1A"/>
+          </a:solidFill>
+          <a:ln>
+            <a:solidFill>
+              <a:srgbClr val="1A1A1A"/>
+            </a:solidFill>
+          </a:ln>
+        </p:spPr>
+        <p:txBody>
+          <a:bodyPr wrap="square" lIns="0" tIns="0" rIns="0" bIns="0" rtlCol="0" anchor="ctr"/>
+          <a:lstStyle/>
+          <a:p>
+            <a:pPr algn="ctr" indent="0" marL="0">
+              <a:buNone/>
+            </a:pPr>
+            <a:r>
+              <a:rPr lang="ja-JP" altLang="en-US" sz="1100" dirty="0">
+                <a:solidFill>
+                  <a:srgbClr val="FFFFFF"/>
+                </a:solidFill>
+                <a:latin typeface="Dela Gothic One" pitchFamily="34" charset="0"/>
+                <a:ea typeface="けいふぉんと" pitchFamily="34" charset="-122"/>
+                <a:cs typeface="Dela Gothic One" pitchFamily="34" charset="-120"/>
+              </a:rPr>
+              <a:t>必ず守る</a:t>
+            </a:r>
+            <a:endParaRPr lang="ja-JP" sz="1100" dirty="0"/>
+          </a:p>
+        </p:txBody>
+      </p:sp>
+      <p:sp>
+        <p:nvSpPr>
+          <p:cNvPr id="3" name="Text 1"/>
+          <p:cNvSpPr txBox="1"/>
+          <p:nvPr/>
+        </p:nvSpPr>
+        <p:spPr>
+          <a:xfrm>
+            <a:off x="411480" y="502920"/>
+            <a:ext cx="8321040" cy="685800"/>
           </a:xfrm>
           <a:prstGeom prst="rect">
             <a:avLst/>
@@ -6779,105 +7166,79 @@
           <a:ln/>
         </p:spPr>
         <p:txBody>
-          <a:bodyPr wrap="square" lIns="0" tIns="0" rIns="0" bIns="0" rtlCol="0" anchor="ctr"/>
-          <a:lstStyle/>
-          <a:p>
-            <a:pPr algn="l" indent="0" marL="0">
-              <a:buNone/>
-            </a:pPr>
-            <a:r>
-              <a:rPr lang="en-US" sz="2400" b="1" dirty="0">
-                <a:solidFill>
-                  <a:schemeClr val="tx1"/>
-                </a:solidFill>
+          <a:bodyPr wrap="square" lIns="0" tIns="0" rIns="0" bIns="0" rtlCol="0" anchor="ctr">
+            <a:normAutofit/>
+          </a:bodyPr>
+          <a:lstStyle/>
+          <a:p>
+            <a:pPr indent="0" marL="0">
+              <a:buNone/>
+            </a:pPr>
+            <a:r>
+              <a:rPr lang="ja-JP" altLang="en-US" sz="2600" dirty="0">
+                <a:solidFill>
+                  <a:srgbClr val="1A1A1A"/>
+                </a:solidFill>
+                <a:latin typeface="Dela Gothic One" pitchFamily="34" charset="0"/>
+                <a:ea typeface="けいふぉんと" pitchFamily="34" charset="-122"/>
+                <a:cs typeface="Dela Gothic One" pitchFamily="34" charset="-120"/>
               </a:rPr>
               <a:t>安全に使うための約束</a:t>
             </a:r>
-            <a:endParaRPr lang="en-US" sz="2400" dirty="0"/>
-          </a:p>
-        </p:txBody>
-      </p:sp>
-      <p:sp>
-        <p:nvSpPr>
-          <p:cNvPr id="3" name="chip"/>
+            <a:endParaRPr lang="ja-JP" sz="2600" dirty="0"/>
+          </a:p>
+        </p:txBody>
+      </p:sp>
+      <p:sp>
+        <p:nvSpPr>
+          <p:cNvPr id="4" name="card"/>
           <p:cNvSpPr/>
           <p:nvPr/>
         </p:nvSpPr>
         <p:spPr>
           <a:xfrm>
-            <a:off x="548640" y="292608"/>
-            <a:ext cx="932688" cy="292608"/>
+            <a:off x="502920" y="1417320"/>
+            <a:ext cx="3941064" cy="2331720"/>
           </a:xfrm>
           <a:prstGeom prst="roundRect">
             <a:avLst>
-              <a:gd name="adj" fmla="val 50000"/>
+              <a:gd name="adj" fmla="val 3922"/>
             </a:avLst>
           </a:prstGeom>
           <a:solidFill>
-            <a:schemeClr val="accent5"/>
-          </a:solidFill>
-          <a:ln w="12700">
+            <a:srgbClr val="FFFFFF"/>
+          </a:solidFill>
+          <a:ln w="25400">
             <a:solidFill>
-              <a:schemeClr val="accent5"/>
+              <a:srgbClr val="1A1A1A"/>
             </a:solidFill>
             <a:prstDash val="solid"/>
           </a:ln>
-        </p:spPr>
-      </p:sp>
-      <p:sp>
-        <p:nvSpPr>
-          <p:cNvPr id="4" name="chip-text"/>
-          <p:cNvSpPr txBox="1"/>
-          <p:nvPr/>
-        </p:nvSpPr>
-        <p:spPr>
-          <a:xfrm>
-            <a:off x="548640" y="292608"/>
-            <a:ext cx="932688" cy="292608"/>
-          </a:xfrm>
-          <a:prstGeom prst="rect">
-            <a:avLst/>
-          </a:prstGeom>
-          <a:noFill/>
-          <a:ln/>
-        </p:spPr>
-        <p:txBody>
-          <a:bodyPr wrap="square" lIns="0" tIns="0" rIns="0" bIns="0" rtlCol="0" anchor="ctr"/>
-          <a:lstStyle/>
-          <a:p>
-            <a:pPr algn="ctr" indent="0" marL="0">
-              <a:buNone/>
-            </a:pPr>
-            <a:r>
-              <a:rPr lang="en-US" sz="1100" b="1" dirty="0">
-                <a:solidFill>
-                  <a:schemeClr val="bg1"/>
-                </a:solidFill>
-              </a:rPr>
-              <a:t>必ず守る</a:t>
-            </a:r>
-            <a:endParaRPr lang="en-US" sz="1100" dirty="0"/>
-          </a:p>
-        </p:txBody>
-      </p:sp>
-      <p:sp>
-        <p:nvSpPr>
-          <p:cNvPr id="5" name="card"/>
+          <a:effectLst>
+            <a:outerShdw sx="100000" sy="100000" kx="0" ky="0" algn="bl" rotWithShape="0" blurRad="101600" dist="50800" dir="2700000">
+              <a:srgbClr val="1A1A1A">
+                <a:alpha val="100000"/>
+              </a:srgbClr>
+            </a:outerShdw>
+          </a:effectLst>
+        </p:spPr>
+      </p:sp>
+      <p:sp>
+        <p:nvSpPr>
+          <p:cNvPr id="5" name="icon-circle"/>
           <p:cNvSpPr/>
           <p:nvPr/>
         </p:nvSpPr>
         <p:spPr>
           <a:xfrm>
-            <a:off x="548640" y="1463040"/>
-            <a:ext cx="3909060" cy="2286000"/>
-          </a:xfrm>
-          <a:prstGeom prst="roundRect">
-            <a:avLst>
-              <a:gd name="adj" fmla="val 4800"/>
-            </a:avLst>
-          </a:prstGeom>
-          <a:solidFill>
-            <a:srgbClr val="FFF1F0"/>
+            <a:off x="704088" y="1618488"/>
+            <a:ext cx="548640" cy="548640"/>
+          </a:xfrm>
+          <a:prstGeom prst="ellipse">
+            <a:avLst/>
+          </a:prstGeom>
+          <a:solidFill>
+            <a:srgbClr val="DD6420"/>
           </a:solidFill>
           <a:ln w="19050">
             <a:solidFill>
@@ -6885,43 +7246,11 @@
             </a:solidFill>
             <a:prstDash val="solid"/>
           </a:ln>
-          <a:effectLst>
-            <a:outerShdw sx="100000" sy="100000" kx="0" ky="0" algn="bl" rotWithShape="0" blurRad="101600" dist="38100" dir="2700000">
-              <a:srgbClr val="000000">
-                <a:alpha val="18000"/>
-              </a:srgbClr>
-            </a:outerShdw>
-          </a:effectLst>
-        </p:spPr>
-      </p:sp>
-      <p:sp>
-        <p:nvSpPr>
-          <p:cNvPr id="6" name="icon-circle"/>
-          <p:cNvSpPr/>
-          <p:nvPr/>
-        </p:nvSpPr>
-        <p:spPr>
-          <a:xfrm>
-            <a:off x="731520" y="1645920"/>
-            <a:ext cx="502920" cy="502920"/>
-          </a:xfrm>
-          <a:prstGeom prst="ellipse">
-            <a:avLst/>
-          </a:prstGeom>
-          <a:solidFill>
-            <a:srgbClr val="E53935"/>
-          </a:solidFill>
-          <a:ln w="15875">
-            <a:solidFill>
-              <a:srgbClr val="1A1A1A"/>
-            </a:solidFill>
-            <a:prstDash val="solid"/>
-          </a:ln>
         </p:spPr>
       </p:sp>
       <p:pic>
         <p:nvPicPr>
-          <p:cNvPr id="7" name="icon" descr="preencoded.png">    </p:cNvPr>
+          <p:cNvPr id="6" name="icon" descr="preencoded.png">    </p:cNvPr>
           <p:cNvPicPr>
             <a:picLocks noChangeAspect="1"/>
           </p:cNvPicPr>
@@ -6935,8 +7264,8 @@
         </p:blipFill>
         <p:spPr>
           <a:xfrm>
-            <a:off x="862279" y="1776679"/>
-            <a:ext cx="241402" cy="241402"/>
+            <a:off x="841248" y="1755648"/>
+            <a:ext cx="274320" cy="274320"/>
           </a:xfrm>
           <a:prstGeom prst="rect">
             <a:avLst/>
@@ -6945,14 +7274,14 @@
       </p:pic>
       <p:sp>
         <p:nvSpPr>
-          <p:cNvPr id="8" name="card-head"/>
+          <p:cNvPr id="7" name="Text 4"/>
           <p:cNvSpPr txBox="1"/>
           <p:nvPr/>
         </p:nvSpPr>
         <p:spPr>
           <a:xfrm>
-            <a:off x="731520" y="2286000"/>
-            <a:ext cx="3543300" cy="365760"/>
+            <a:off x="1371600" y="1618488"/>
+            <a:ext cx="2889504" cy="548640"/>
           </a:xfrm>
           <a:prstGeom prst="rect">
             <a:avLst/>
@@ -6961,34 +7290,39 @@
           <a:ln/>
         </p:spPr>
         <p:txBody>
-          <a:bodyPr wrap="square" lIns="0" tIns="0" rIns="0" bIns="0" rtlCol="0" anchor="ctr"/>
+          <a:bodyPr wrap="square" lIns="0" tIns="0" rIns="0" bIns="0" rtlCol="0" anchor="ctr">
+            <a:normAutofit/>
+          </a:bodyPr>
           <a:lstStyle/>
           <a:p>
             <a:pPr indent="0" marL="0">
               <a:buNone/>
             </a:pPr>
             <a:r>
-              <a:rPr lang="en-US" sz="1500" b="1" dirty="0">
-                <a:solidFill>
-                  <a:schemeClr val="tx1"/>
-                </a:solidFill>
+              <a:rPr lang="ja-JP" altLang="en-US" sz="1250" dirty="0">
+                <a:solidFill>
+                  <a:srgbClr val="1A1A1A"/>
+                </a:solidFill>
+                <a:latin typeface="Dela Gothic One" pitchFamily="34" charset="0"/>
+                <a:ea typeface="けいふぉんと" pitchFamily="34" charset="-122"/>
+                <a:cs typeface="Dela Gothic One" pitchFamily="34" charset="-120"/>
               </a:rPr>
               <a:t>許可は読んでから</a:t>
             </a:r>
-            <a:endParaRPr lang="en-US" sz="1500" dirty="0"/>
-          </a:p>
-        </p:txBody>
-      </p:sp>
-      <p:sp>
-        <p:nvSpPr>
-          <p:cNvPr id="9" name="card-body"/>
+            <a:endParaRPr lang="ja-JP" sz="1250" dirty="0"/>
+          </a:p>
+        </p:txBody>
+      </p:sp>
+      <p:sp>
+        <p:nvSpPr>
+          <p:cNvPr id="8" name="card-body"/>
           <p:cNvSpPr txBox="1"/>
           <p:nvPr/>
         </p:nvSpPr>
         <p:spPr>
           <a:xfrm>
-            <a:off x="731520" y="2697480"/>
-            <a:ext cx="3543300" cy="914400"/>
+            <a:off x="704088" y="2313432"/>
+            <a:ext cx="3538728" cy="1298448"/>
           </a:xfrm>
           <a:prstGeom prst="rect">
             <a:avLst/>
@@ -6997,7 +7331,9 @@
           <a:ln/>
         </p:spPr>
         <p:txBody>
-          <a:bodyPr wrap="square" lIns="0" tIns="0" rIns="0" bIns="0" rtlCol="0" anchor="t"/>
+          <a:bodyPr wrap="square" lIns="0" tIns="0" rIns="0" bIns="0" rtlCol="0" anchor="t">
+            <a:normAutofit/>
+          </a:bodyPr>
           <a:lstStyle/>
           <a:p>
             <a:pPr indent="0" marL="0">
@@ -7007,35 +7343,70 @@
               <a:buNone/>
             </a:pPr>
             <a:r>
-              <a:rPr lang="en-US" sz="1300" dirty="0">
-                <a:solidFill>
-                  <a:schemeClr val="tx1"/>
-                </a:solidFill>
+              <a:rPr lang="ja-JP" altLang="en-US" sz="1350" b="1" dirty="0">
+                <a:solidFill>
+                  <a:srgbClr val="1A1A1A"/>
+                </a:solidFill>
+                <a:latin typeface="Noto Sans JP" pitchFamily="34" charset="0"/>
+                <a:ea typeface="Noto Sans JP" pitchFamily="34" charset="-122"/>
+                <a:cs typeface="Noto Sans JP" pitchFamily="34" charset="-120"/>
               </a:rPr>
               <a:t>コマンドの実行許可を求められたら、何をするのか読む。わからなければ「このコマンドは何をしますか？」と聞く</a:t>
             </a:r>
-            <a:endParaRPr lang="en-US" sz="1300" dirty="0"/>
-          </a:p>
-        </p:txBody>
-      </p:sp>
-      <p:sp>
-        <p:nvSpPr>
-          <p:cNvPr id="10" name="card"/>
+            <a:endParaRPr lang="ja-JP" sz="1350" dirty="0"/>
+          </a:p>
+        </p:txBody>
+      </p:sp>
+      <p:sp>
+        <p:nvSpPr>
+          <p:cNvPr id="9" name="card"/>
           <p:cNvSpPr/>
           <p:nvPr/>
         </p:nvSpPr>
         <p:spPr>
           <a:xfrm>
-            <a:off x="4686300" y="1463040"/>
-            <a:ext cx="3909060" cy="2286000"/>
+            <a:off x="4700016" y="1417320"/>
+            <a:ext cx="3941064" cy="2331720"/>
           </a:xfrm>
           <a:prstGeom prst="roundRect">
             <a:avLst>
-              <a:gd name="adj" fmla="val 4800"/>
+              <a:gd name="adj" fmla="val 3922"/>
             </a:avLst>
           </a:prstGeom>
           <a:solidFill>
-            <a:srgbClr val="FFF1F0"/>
+            <a:srgbClr val="FFFFFF"/>
+          </a:solidFill>
+          <a:ln w="25400">
+            <a:solidFill>
+              <a:srgbClr val="1A1A1A"/>
+            </a:solidFill>
+            <a:prstDash val="solid"/>
+          </a:ln>
+          <a:effectLst>
+            <a:outerShdw sx="100000" sy="100000" kx="0" ky="0" algn="bl" rotWithShape="0" blurRad="101600" dist="50800" dir="2700000">
+              <a:srgbClr val="1A1A1A">
+                <a:alpha val="100000"/>
+              </a:srgbClr>
+            </a:outerShdw>
+          </a:effectLst>
+        </p:spPr>
+      </p:sp>
+      <p:sp>
+        <p:nvSpPr>
+          <p:cNvPr id="10" name="icon-circle"/>
+          <p:cNvSpPr/>
+          <p:nvPr/>
+        </p:nvSpPr>
+        <p:spPr>
+          <a:xfrm>
+            <a:off x="4901184" y="1618488"/>
+            <a:ext cx="548640" cy="548640"/>
+          </a:xfrm>
+          <a:prstGeom prst="ellipse">
+            <a:avLst/>
+          </a:prstGeom>
+          <a:solidFill>
+            <a:srgbClr val="DD6420"/>
           </a:solidFill>
           <a:ln w="19050">
             <a:solidFill>
@@ -7043,43 +7414,11 @@
             </a:solidFill>
             <a:prstDash val="solid"/>
           </a:ln>
-          <a:effectLst>
-            <a:outerShdw sx="100000" sy="100000" kx="0" ky="0" algn="bl" rotWithShape="0" blurRad="101600" dist="38100" dir="2700000">
-              <a:srgbClr val="000000">
-                <a:alpha val="18000"/>
-              </a:srgbClr>
-            </a:outerShdw>
-          </a:effectLst>
-        </p:spPr>
-      </p:sp>
-      <p:sp>
-        <p:nvSpPr>
-          <p:cNvPr id="11" name="icon-circle"/>
-          <p:cNvSpPr/>
-          <p:nvPr/>
-        </p:nvSpPr>
-        <p:spPr>
-          <a:xfrm>
-            <a:off x="4869180" y="1645920"/>
-            <a:ext cx="502920" cy="502920"/>
-          </a:xfrm>
-          <a:prstGeom prst="ellipse">
-            <a:avLst/>
-          </a:prstGeom>
-          <a:solidFill>
-            <a:srgbClr val="E53935"/>
-          </a:solidFill>
-          <a:ln w="15875">
-            <a:solidFill>
-              <a:srgbClr val="1A1A1A"/>
-            </a:solidFill>
-            <a:prstDash val="solid"/>
-          </a:ln>
         </p:spPr>
       </p:sp>
       <p:pic>
         <p:nvPicPr>
-          <p:cNvPr id="12" name="icon" descr="preencoded.png">    </p:cNvPr>
+          <p:cNvPr id="11" name="icon" descr="preencoded.png">    </p:cNvPr>
           <p:cNvPicPr>
             <a:picLocks noChangeAspect="1"/>
           </p:cNvPicPr>
@@ -7093,8 +7432,8 @@
         </p:blipFill>
         <p:spPr>
           <a:xfrm>
-            <a:off x="4999939" y="1776679"/>
-            <a:ext cx="241402" cy="241402"/>
+            <a:off x="5038344" y="1755648"/>
+            <a:ext cx="274320" cy="274320"/>
           </a:xfrm>
           <a:prstGeom prst="rect">
             <a:avLst/>
@@ -7103,14 +7442,14 @@
       </p:pic>
       <p:sp>
         <p:nvSpPr>
-          <p:cNvPr id="13" name="card-head"/>
+          <p:cNvPr id="12" name="Text 8"/>
           <p:cNvSpPr txBox="1"/>
           <p:nvPr/>
         </p:nvSpPr>
         <p:spPr>
           <a:xfrm>
-            <a:off x="4869180" y="2286000"/>
-            <a:ext cx="3543300" cy="365760"/>
+            <a:off x="5568696" y="1618488"/>
+            <a:ext cx="2889504" cy="548640"/>
           </a:xfrm>
           <a:prstGeom prst="rect">
             <a:avLst/>
@@ -7119,34 +7458,39 @@
           <a:ln/>
         </p:spPr>
         <p:txBody>
-          <a:bodyPr wrap="square" lIns="0" tIns="0" rIns="0" bIns="0" rtlCol="0" anchor="ctr"/>
+          <a:bodyPr wrap="square" lIns="0" tIns="0" rIns="0" bIns="0" rtlCol="0" anchor="ctr">
+            <a:normAutofit/>
+          </a:bodyPr>
           <a:lstStyle/>
           <a:p>
             <a:pPr indent="0" marL="0">
               <a:buNone/>
             </a:pPr>
             <a:r>
-              <a:rPr lang="en-US" sz="1500" b="1" dirty="0">
-                <a:solidFill>
-                  <a:schemeClr val="tx1"/>
-                </a:solidFill>
+              <a:rPr lang="ja-JP" altLang="en-US" sz="1500" dirty="0">
+                <a:solidFill>
+                  <a:srgbClr val="1A1A1A"/>
+                </a:solidFill>
+                <a:latin typeface="Dela Gothic One" pitchFamily="34" charset="0"/>
+                <a:ea typeface="けいふぉんと" pitchFamily="34" charset="-122"/>
+                <a:cs typeface="Dela Gothic One" pitchFamily="34" charset="-120"/>
               </a:rPr>
               <a:t>秘密を書かない</a:t>
             </a:r>
-            <a:endParaRPr lang="en-US" sz="1500" dirty="0"/>
-          </a:p>
-        </p:txBody>
-      </p:sp>
-      <p:sp>
-        <p:nvSpPr>
-          <p:cNvPr id="14" name="card-body"/>
+            <a:endParaRPr lang="ja-JP" sz="1500" dirty="0"/>
+          </a:p>
+        </p:txBody>
+      </p:sp>
+      <p:sp>
+        <p:nvSpPr>
+          <p:cNvPr id="13" name="card-body"/>
           <p:cNvSpPr txBox="1"/>
           <p:nvPr/>
         </p:nvSpPr>
         <p:spPr>
           <a:xfrm>
-            <a:off x="4869180" y="2697480"/>
-            <a:ext cx="3543300" cy="914400"/>
+            <a:off x="4901184" y="2313432"/>
+            <a:ext cx="3538728" cy="1298448"/>
           </a:xfrm>
           <a:prstGeom prst="rect">
             <a:avLst/>
@@ -7155,7 +7499,9 @@
           <a:ln/>
         </p:spPr>
         <p:txBody>
-          <a:bodyPr wrap="square" lIns="0" tIns="0" rIns="0" bIns="0" rtlCol="0" anchor="t"/>
+          <a:bodyPr wrap="square" lIns="0" tIns="0" rIns="0" bIns="0" rtlCol="0" anchor="t">
+            <a:normAutofit/>
+          </a:bodyPr>
           <a:lstStyle/>
           <a:p>
             <a:pPr indent="0" marL="0">
@@ -7165,14 +7511,17 @@
               <a:buNone/>
             </a:pPr>
             <a:r>
-              <a:rPr lang="en-US" sz="1300" dirty="0">
-                <a:solidFill>
-                  <a:schemeClr val="tx1"/>
-                </a:solidFill>
+              <a:rPr lang="ja-JP" altLang="en-US" sz="1350" b="1" dirty="0">
+                <a:solidFill>
+                  <a:srgbClr val="1A1A1A"/>
+                </a:solidFill>
+                <a:latin typeface="Noto Sans JP" pitchFamily="34" charset="0"/>
+                <a:ea typeface="Noto Sans JP" pitchFamily="34" charset="-122"/>
+                <a:cs typeface="Noto Sans JP" pitchFamily="34" charset="-120"/>
               </a:rPr>
               <a:t>パスワードやAPIキーを、チャット欄やファイルに直接書かない（第9回で正しい置き場所を学ぶ）</a:t>
             </a:r>
-            <a:endParaRPr lang="en-US" sz="1300" dirty="0"/>
+            <a:endParaRPr lang="ja-JP" sz="1350" dirty="0"/>
           </a:p>
         </p:txBody>
       </p:sp>
@@ -7188,8 +7537,8 @@
         </p:nvSpPr>
         <p:spPr>
           <a:xfrm>
-            <a:off x="8229600" y="4773168"/>
-            <a:ext cx="365760" cy="228600"/>
+            <a:off x="8366760" y="4754880"/>
+            <a:ext cx="365760" cy="274320"/>
           </a:xfrm>
           <a:prstGeom prst="rect">
             <a:avLst/>
@@ -7201,20 +7550,23 @@
           </a:extLst>
         </p:spPr>
         <p:txBody>
-          <a:bodyPr/>
+          <a:bodyPr anchor="ctr"/>
           <a:lstStyle>
             <a:lvl1pPr>
-              <a:defRPr sz="900">
-                <a:solidFill>
-                  <a:srgbClr val="5A6872"/>
-                </a:solidFill>
+              <a:defRPr sz="850">
+                <a:solidFill>
+                  <a:srgbClr val="FFFFFF"/>
+                </a:solidFill>
+                <a:latin typeface="Noto Sans JP"/>
+                <a:ea typeface="Noto Sans JP"/>
+                <a:cs typeface="Noto Sans JP"/>
               </a:defRPr>
             </a:lvl1pPr>
           </a:lstStyle>
           <a:p>
             <a:pPr algn="r"/>
             <a:fld id="{F7021451-1387-4CA6-816F-3879F97B5CBC}" type="slidenum">
-              <a:rPr b="0" lang="en-US"/>
+              <a:rPr b="1" lang="en-US"/>
               <a:t>8</a:t>
             </a:fld>
             <a:endParaRPr lang="en-US"/>
@@ -7249,15 +7601,58 @@
       <p:sp>
         <p:nvSpPr>
           <p:cNvPr id="2" name="Text 0"/>
-          <p:cNvSpPr/>
-          <p:nvPr>
-            <p:ph idx="100" type="title" hasCustomPrompt="1"/>
-          </p:nvPr>
-        </p:nvSpPr>
-        <p:spPr>
-          <a:xfrm>
-            <a:off x="548640" y="658368"/>
-            <a:ext cx="8046720" cy="566928"/>
+          <p:cNvSpPr txBox="1"/>
+          <p:nvPr/>
+        </p:nvSpPr>
+        <p:spPr>
+          <a:xfrm rot="-180000">
+            <a:off x="411480" y="201168"/>
+            <a:ext cx="894740" cy="352044"/>
+          </a:xfrm>
+          <a:prstGeom prst="rect">
+            <a:avLst/>
+          </a:prstGeom>
+          <a:solidFill>
+            <a:srgbClr val="1A1A1A"/>
+          </a:solidFill>
+          <a:ln>
+            <a:solidFill>
+              <a:srgbClr val="1A1A1A"/>
+            </a:solidFill>
+          </a:ln>
+        </p:spPr>
+        <p:txBody>
+          <a:bodyPr wrap="square" lIns="0" tIns="0" rIns="0" bIns="0" rtlCol="0" anchor="ctr"/>
+          <a:lstStyle/>
+          <a:p>
+            <a:pPr algn="ctr" indent="0" marL="0">
+              <a:buNone/>
+            </a:pPr>
+            <a:r>
+              <a:rPr lang="ja-JP" altLang="en-US" sz="1100" dirty="0">
+                <a:solidFill>
+                  <a:srgbClr val="FFFFFF"/>
+                </a:solidFill>
+                <a:latin typeface="Dela Gothic One" pitchFamily="34" charset="0"/>
+                <a:ea typeface="けいふぉんと" pitchFamily="34" charset="-122"/>
+                <a:cs typeface="Dela Gothic One" pitchFamily="34" charset="-120"/>
+              </a:rPr>
+              <a:t>まとめ</a:t>
+            </a:r>
+            <a:endParaRPr lang="ja-JP" sz="1100" dirty="0"/>
+          </a:p>
+        </p:txBody>
+      </p:sp>
+      <p:sp>
+        <p:nvSpPr>
+          <p:cNvPr id="3" name="Text 1"/>
+          <p:cNvSpPr txBox="1"/>
+          <p:nvPr/>
+        </p:nvSpPr>
+        <p:spPr>
+          <a:xfrm>
+            <a:off x="411480" y="502920"/>
+            <a:ext cx="8321040" cy="685800"/>
           </a:xfrm>
           <a:prstGeom prst="rect">
             <a:avLst/>
@@ -7266,105 +7661,79 @@
           <a:ln/>
         </p:spPr>
         <p:txBody>
-          <a:bodyPr wrap="square" lIns="0" tIns="0" rIns="0" bIns="0" rtlCol="0" anchor="ctr"/>
-          <a:lstStyle/>
-          <a:p>
-            <a:pPr algn="l" indent="0" marL="0">
-              <a:buNone/>
-            </a:pPr>
-            <a:r>
-              <a:rPr lang="en-US" sz="2400" b="1" dirty="0">
-                <a:solidFill>
-                  <a:schemeClr val="tx1"/>
-                </a:solidFill>
+          <a:bodyPr wrap="square" lIns="0" tIns="0" rIns="0" bIns="0" rtlCol="0" anchor="ctr">
+            <a:normAutofit/>
+          </a:bodyPr>
+          <a:lstStyle/>
+          <a:p>
+            <a:pPr indent="0" marL="0">
+              <a:buNone/>
+            </a:pPr>
+            <a:r>
+              <a:rPr lang="ja-JP" altLang="en-US" sz="2600" dirty="0">
+                <a:solidFill>
+                  <a:srgbClr val="1A1A1A"/>
+                </a:solidFill>
+                <a:latin typeface="Dela Gothic One" pitchFamily="34" charset="0"/>
+                <a:ea typeface="けいふぉんと" pitchFamily="34" charset="-122"/>
+                <a:cs typeface="Dela Gothic One" pitchFamily="34" charset="-120"/>
               </a:rPr>
               <a:t>宿題と、今日のチェック</a:t>
             </a:r>
-            <a:endParaRPr lang="en-US" sz="2400" dirty="0"/>
-          </a:p>
-        </p:txBody>
-      </p:sp>
-      <p:sp>
-        <p:nvSpPr>
-          <p:cNvPr id="3" name="chip"/>
+            <a:endParaRPr lang="ja-JP" sz="2600" dirty="0"/>
+          </a:p>
+        </p:txBody>
+      </p:sp>
+      <p:sp>
+        <p:nvSpPr>
+          <p:cNvPr id="4" name="card"/>
           <p:cNvSpPr/>
           <p:nvPr/>
         </p:nvSpPr>
         <p:spPr>
           <a:xfrm>
-            <a:off x="548640" y="292608"/>
-            <a:ext cx="795528" cy="292608"/>
+            <a:off x="502920" y="1417320"/>
+            <a:ext cx="3931920" cy="3108960"/>
           </a:xfrm>
           <a:prstGeom prst="roundRect">
             <a:avLst>
-              <a:gd name="adj" fmla="val 50000"/>
+              <a:gd name="adj" fmla="val 2941"/>
             </a:avLst>
           </a:prstGeom>
           <a:solidFill>
-            <a:schemeClr val="tx1"/>
-          </a:solidFill>
-          <a:ln w="12700">
+            <a:srgbClr val="FFFFFF"/>
+          </a:solidFill>
+          <a:ln w="25400">
             <a:solidFill>
-              <a:schemeClr val="tx1"/>
+              <a:srgbClr val="1A1A1A"/>
             </a:solidFill>
             <a:prstDash val="solid"/>
           </a:ln>
-        </p:spPr>
-      </p:sp>
-      <p:sp>
-        <p:nvSpPr>
-          <p:cNvPr id="4" name="chip-text"/>
-          <p:cNvSpPr txBox="1"/>
-          <p:nvPr/>
-        </p:nvSpPr>
-        <p:spPr>
-          <a:xfrm>
-            <a:off x="548640" y="292608"/>
-            <a:ext cx="795528" cy="292608"/>
-          </a:xfrm>
-          <a:prstGeom prst="rect">
-            <a:avLst/>
-          </a:prstGeom>
-          <a:noFill/>
-          <a:ln/>
-        </p:spPr>
-        <p:txBody>
-          <a:bodyPr wrap="square" lIns="0" tIns="0" rIns="0" bIns="0" rtlCol="0" anchor="ctr"/>
-          <a:lstStyle/>
-          <a:p>
-            <a:pPr algn="ctr" indent="0" marL="0">
-              <a:buNone/>
-            </a:pPr>
-            <a:r>
-              <a:rPr lang="en-US" sz="1100" b="1" dirty="0">
-                <a:solidFill>
-                  <a:schemeClr val="accent1"/>
-                </a:solidFill>
-              </a:rPr>
-              <a:t>まとめ</a:t>
-            </a:r>
-            <a:endParaRPr lang="en-US" sz="1100" dirty="0"/>
-          </a:p>
-        </p:txBody>
-      </p:sp>
-      <p:sp>
-        <p:nvSpPr>
-          <p:cNvPr id="5" name="card"/>
+          <a:effectLst>
+            <a:outerShdw sx="100000" sy="100000" kx="0" ky="0" algn="bl" rotWithShape="0" blurRad="101600" dist="50800" dir="2700000">
+              <a:srgbClr val="1A1A1A">
+                <a:alpha val="100000"/>
+              </a:srgbClr>
+            </a:outerShdw>
+          </a:effectLst>
+        </p:spPr>
+      </p:sp>
+      <p:sp>
+        <p:nvSpPr>
+          <p:cNvPr id="5" name="icon-circle"/>
           <p:cNvSpPr/>
           <p:nvPr/>
         </p:nvSpPr>
         <p:spPr>
           <a:xfrm>
-            <a:off x="548640" y="1463040"/>
-            <a:ext cx="3886200" cy="3017520"/>
-          </a:xfrm>
-          <a:prstGeom prst="roundRect">
-            <a:avLst>
-              <a:gd name="adj" fmla="val 3636"/>
-            </a:avLst>
-          </a:prstGeom>
-          <a:solidFill>
-            <a:schemeClr val="bg2"/>
+            <a:off x="704088" y="1600200"/>
+            <a:ext cx="457200" cy="457200"/>
+          </a:xfrm>
+          <a:prstGeom prst="ellipse">
+            <a:avLst/>
+          </a:prstGeom>
+          <a:solidFill>
+            <a:srgbClr val="DD6420"/>
           </a:solidFill>
           <a:ln w="19050">
             <a:solidFill>
@@ -7372,43 +7741,11 @@
             </a:solidFill>
             <a:prstDash val="solid"/>
           </a:ln>
-          <a:effectLst>
-            <a:outerShdw sx="100000" sy="100000" kx="0" ky="0" algn="bl" rotWithShape="0" blurRad="101600" dist="38100" dir="2700000">
-              <a:srgbClr val="000000">
-                <a:alpha val="18000"/>
-              </a:srgbClr>
-            </a:outerShdw>
-          </a:effectLst>
-        </p:spPr>
-      </p:sp>
-      <p:sp>
-        <p:nvSpPr>
-          <p:cNvPr id="6" name="icon-circle"/>
-          <p:cNvSpPr/>
-          <p:nvPr/>
-        </p:nvSpPr>
-        <p:spPr>
-          <a:xfrm>
-            <a:off x="777240" y="1645920"/>
-            <a:ext cx="457200" cy="457200"/>
-          </a:xfrm>
-          <a:prstGeom prst="ellipse">
-            <a:avLst/>
-          </a:prstGeom>
-          <a:solidFill>
-            <a:schemeClr val="accent1"/>
-          </a:solidFill>
-          <a:ln w="15875">
-            <a:solidFill>
-              <a:srgbClr val="1A1A1A"/>
-            </a:solidFill>
-            <a:prstDash val="solid"/>
-          </a:ln>
         </p:spPr>
       </p:sp>
       <p:pic>
         <p:nvPicPr>
-          <p:cNvPr id="7" name="icon" descr="preencoded.png">    </p:cNvPr>
+          <p:cNvPr id="6" name="icon" descr="preencoded.png">    </p:cNvPr>
           <p:cNvPicPr>
             <a:picLocks noChangeAspect="1"/>
           </p:cNvPicPr>
@@ -7422,14 +7759,53 @@
         </p:blipFill>
         <p:spPr>
           <a:xfrm>
-            <a:off x="896112" y="1764792"/>
-            <a:ext cx="219456" cy="219456"/>
+            <a:off x="818388" y="1714500"/>
+            <a:ext cx="228600" cy="228600"/>
           </a:xfrm>
           <a:prstGeom prst="rect">
             <a:avLst/>
           </a:prstGeom>
         </p:spPr>
       </p:pic>
+      <p:sp>
+        <p:nvSpPr>
+          <p:cNvPr id="7" name="Text 4"/>
+          <p:cNvSpPr txBox="1"/>
+          <p:nvPr/>
+        </p:nvSpPr>
+        <p:spPr>
+          <a:xfrm>
+            <a:off x="1280160" y="1600200"/>
+            <a:ext cx="2743200" cy="457200"/>
+          </a:xfrm>
+          <a:prstGeom prst="rect">
+            <a:avLst/>
+          </a:prstGeom>
+          <a:noFill/>
+          <a:ln/>
+        </p:spPr>
+        <p:txBody>
+          <a:bodyPr wrap="square" lIns="0" tIns="0" rIns="0" bIns="0" rtlCol="0" anchor="ctr"/>
+          <a:lstStyle/>
+          <a:p>
+            <a:pPr indent="0" marL="0">
+              <a:buNone/>
+            </a:pPr>
+            <a:r>
+              <a:rPr lang="ja-JP" altLang="en-US" sz="1800" dirty="0">
+                <a:solidFill>
+                  <a:srgbClr val="1A1A1A"/>
+                </a:solidFill>
+                <a:latin typeface="Dela Gothic One" pitchFamily="34" charset="0"/>
+                <a:ea typeface="けいふぉんと" pitchFamily="34" charset="-122"/>
+                <a:cs typeface="Dela Gothic One" pitchFamily="34" charset="-120"/>
+              </a:rPr>
+              <a:t>宿題</a:t>
+            </a:r>
+            <a:endParaRPr lang="ja-JP" sz="1800" dirty="0"/>
+          </a:p>
+        </p:txBody>
+      </p:sp>
       <p:sp>
         <p:nvSpPr>
           <p:cNvPr id="8" name="Text 5"/>
@@ -7438,8 +7814,8 @@
         </p:nvSpPr>
         <p:spPr>
           <a:xfrm>
-            <a:off x="1371600" y="1645920"/>
-            <a:ext cx="2743200" cy="457200"/>
+            <a:off x="731520" y="2240280"/>
+            <a:ext cx="3474720" cy="2148840"/>
           </a:xfrm>
           <a:prstGeom prst="rect">
             <a:avLst/>
@@ -7448,43 +7824,9 @@
           <a:ln/>
         </p:spPr>
         <p:txBody>
-          <a:bodyPr wrap="square" lIns="0" tIns="0" rIns="0" bIns="0" rtlCol="0" anchor="ctr"/>
-          <a:lstStyle/>
-          <a:p>
-            <a:pPr indent="0" marL="0">
-              <a:buNone/>
-            </a:pPr>
-            <a:r>
-              <a:rPr lang="en-US" sz="1700" b="1" dirty="0">
-                <a:solidFill>
-                  <a:schemeClr val="tx1"/>
-                </a:solidFill>
-              </a:rPr>
-              <a:t>宿題</a:t>
-            </a:r>
-            <a:endParaRPr lang="en-US" sz="1700" dirty="0"/>
-          </a:p>
-        </p:txBody>
-      </p:sp>
-      <p:sp>
-        <p:nvSpPr>
-          <p:cNvPr id="9" name="Text 6"/>
-          <p:cNvSpPr txBox="1"/>
-          <p:nvPr/>
-        </p:nvSpPr>
-        <p:spPr>
-          <a:xfrm>
-            <a:off x="777240" y="2286000"/>
-            <a:ext cx="3474720" cy="2057400"/>
-          </a:xfrm>
-          <a:prstGeom prst="rect">
-            <a:avLst/>
-          </a:prstGeom>
-          <a:noFill/>
-          <a:ln/>
-        </p:spPr>
-        <p:txBody>
-          <a:bodyPr wrap="square" lIns="0" tIns="0" rIns="0" bIns="0" rtlCol="0" anchor="t"/>
+          <a:bodyPr wrap="square" lIns="0" tIns="0" rIns="0" bIns="0" rtlCol="0" anchor="t">
+            <a:normAutofit/>
+          </a:bodyPr>
           <a:lstStyle/>
           <a:p>
             <a:pPr marL="342900" indent="-342900">
@@ -7492,38 +7834,73 @@
                 <a:spcPts val="800"/>
               </a:spcAft>
               <a:buSzPct val="100000"/>
-              <a:buChar char="•"/>
-            </a:pPr>
-            <a:r>
-              <a:rPr lang="en-US" sz="1350" dirty="0">
-                <a:solidFill>
-                  <a:schemeClr val="tx1"/>
-                </a:solidFill>
+              <a:buChar char="●"/>
+            </a:pPr>
+            <a:r>
+              <a:rPr lang="ja-JP" altLang="en-US" sz="1350" b="1" dirty="0">
+                <a:solidFill>
+                  <a:srgbClr val="1A1A1A"/>
+                </a:solidFill>
+                <a:latin typeface="Noto Sans JP" pitchFamily="34" charset="0"/>
+                <a:ea typeface="Noto Sans JP" pitchFamily="34" charset="-122"/>
+                <a:cs typeface="Noto Sans JP" pitchFamily="34" charset="-120"/>
               </a:rPr>
               <a:t>紹介ページに自社の紹介文を入れ、3回以上「修正 → 記録 → GitHubに保存」をくり返す</a:t>
             </a:r>
-            <a:endParaRPr lang="en-US" sz="1350" dirty="0"/>
-          </a:p>
-        </p:txBody>
-      </p:sp>
-      <p:sp>
-        <p:nvSpPr>
-          <p:cNvPr id="10" name="card"/>
+            <a:endParaRPr lang="ja-JP" sz="1350" dirty="0"/>
+          </a:p>
+        </p:txBody>
+      </p:sp>
+      <p:sp>
+        <p:nvSpPr>
+          <p:cNvPr id="9" name="card"/>
           <p:cNvSpPr/>
           <p:nvPr/>
         </p:nvSpPr>
         <p:spPr>
           <a:xfrm>
-            <a:off x="4709160" y="1463040"/>
-            <a:ext cx="3886200" cy="3017520"/>
+            <a:off x="4709160" y="1417320"/>
+            <a:ext cx="3931920" cy="3108960"/>
           </a:xfrm>
           <a:prstGeom prst="roundRect">
             <a:avLst>
-              <a:gd name="adj" fmla="val 3636"/>
+              <a:gd name="adj" fmla="val 2941"/>
             </a:avLst>
           </a:prstGeom>
           <a:solidFill>
-            <a:schemeClr val="bg1"/>
+            <a:srgbClr val="FFFFFF"/>
+          </a:solidFill>
+          <a:ln w="25400">
+            <a:solidFill>
+              <a:srgbClr val="1A1A1A"/>
+            </a:solidFill>
+            <a:prstDash val="solid"/>
+          </a:ln>
+          <a:effectLst>
+            <a:outerShdw sx="100000" sy="100000" kx="0" ky="0" algn="bl" rotWithShape="0" blurRad="101600" dist="50800" dir="2700000">
+              <a:srgbClr val="1A1A1A">
+                <a:alpha val="100000"/>
+              </a:srgbClr>
+            </a:outerShdw>
+          </a:effectLst>
+        </p:spPr>
+      </p:sp>
+      <p:sp>
+        <p:nvSpPr>
+          <p:cNvPr id="10" name="icon-circle"/>
+          <p:cNvSpPr/>
+          <p:nvPr/>
+        </p:nvSpPr>
+        <p:spPr>
+          <a:xfrm>
+            <a:off x="4910328" y="1600200"/>
+            <a:ext cx="457200" cy="457200"/>
+          </a:xfrm>
+          <a:prstGeom prst="ellipse">
+            <a:avLst/>
+          </a:prstGeom>
+          <a:solidFill>
+            <a:srgbClr val="DD6420"/>
           </a:solidFill>
           <a:ln w="19050">
             <a:solidFill>
@@ -7531,43 +7908,11 @@
             </a:solidFill>
             <a:prstDash val="solid"/>
           </a:ln>
-          <a:effectLst>
-            <a:outerShdw sx="100000" sy="100000" kx="0" ky="0" algn="bl" rotWithShape="0" blurRad="101600" dist="38100" dir="2700000">
-              <a:srgbClr val="000000">
-                <a:alpha val="18000"/>
-              </a:srgbClr>
-            </a:outerShdw>
-          </a:effectLst>
-        </p:spPr>
-      </p:sp>
-      <p:sp>
-        <p:nvSpPr>
-          <p:cNvPr id="11" name="icon-circle"/>
-          <p:cNvSpPr/>
-          <p:nvPr/>
-        </p:nvSpPr>
-        <p:spPr>
-          <a:xfrm>
-            <a:off x="4937760" y="1645920"/>
-            <a:ext cx="457200" cy="457200"/>
-          </a:xfrm>
-          <a:prstGeom prst="ellipse">
-            <a:avLst/>
-          </a:prstGeom>
-          <a:solidFill>
-            <a:schemeClr val="accent1"/>
-          </a:solidFill>
-          <a:ln w="15875">
-            <a:solidFill>
-              <a:srgbClr val="1A1A1A"/>
-            </a:solidFill>
-            <a:prstDash val="solid"/>
-          </a:ln>
         </p:spPr>
       </p:sp>
       <p:pic>
         <p:nvPicPr>
-          <p:cNvPr id="12" name="icon" descr="preencoded.png">    </p:cNvPr>
+          <p:cNvPr id="11" name="icon" descr="preencoded.png">    </p:cNvPr>
           <p:cNvPicPr>
             <a:picLocks noChangeAspect="1"/>
           </p:cNvPicPr>
@@ -7581,14 +7926,53 @@
         </p:blipFill>
         <p:spPr>
           <a:xfrm>
-            <a:off x="5056632" y="1764792"/>
-            <a:ext cx="219456" cy="219456"/>
+            <a:off x="5024628" y="1714500"/>
+            <a:ext cx="228600" cy="228600"/>
           </a:xfrm>
           <a:prstGeom prst="rect">
             <a:avLst/>
           </a:prstGeom>
         </p:spPr>
       </p:pic>
+      <p:sp>
+        <p:nvSpPr>
+          <p:cNvPr id="12" name="Text 8"/>
+          <p:cNvSpPr txBox="1"/>
+          <p:nvPr/>
+        </p:nvSpPr>
+        <p:spPr>
+          <a:xfrm>
+            <a:off x="5486400" y="1600200"/>
+            <a:ext cx="2743200" cy="457200"/>
+          </a:xfrm>
+          <a:prstGeom prst="rect">
+            <a:avLst/>
+          </a:prstGeom>
+          <a:noFill/>
+          <a:ln/>
+        </p:spPr>
+        <p:txBody>
+          <a:bodyPr wrap="square" lIns="0" tIns="0" rIns="0" bIns="0" rtlCol="0" anchor="ctr"/>
+          <a:lstStyle/>
+          <a:p>
+            <a:pPr indent="0" marL="0">
+              <a:buNone/>
+            </a:pPr>
+            <a:r>
+              <a:rPr lang="ja-JP" altLang="en-US" sz="1800" dirty="0">
+                <a:solidFill>
+                  <a:srgbClr val="1A1A1A"/>
+                </a:solidFill>
+                <a:latin typeface="Dela Gothic One" pitchFamily="34" charset="0"/>
+                <a:ea typeface="けいふぉんと" pitchFamily="34" charset="-122"/>
+                <a:cs typeface="Dela Gothic One" pitchFamily="34" charset="-120"/>
+              </a:rPr>
+              <a:t>できたらチェック</a:t>
+            </a:r>
+            <a:endParaRPr lang="ja-JP" sz="1800" dirty="0"/>
+          </a:p>
+        </p:txBody>
+      </p:sp>
       <p:sp>
         <p:nvSpPr>
           <p:cNvPr id="13" name="Text 9"/>
@@ -7597,8 +7981,8 @@
         </p:nvSpPr>
         <p:spPr>
           <a:xfrm>
-            <a:off x="5532120" y="1645920"/>
-            <a:ext cx="2743200" cy="457200"/>
+            <a:off x="4937760" y="2240280"/>
+            <a:ext cx="3474720" cy="2148840"/>
           </a:xfrm>
           <a:prstGeom prst="rect">
             <a:avLst/>
@@ -7607,43 +7991,9 @@
           <a:ln/>
         </p:spPr>
         <p:txBody>
-          <a:bodyPr wrap="square" lIns="0" tIns="0" rIns="0" bIns="0" rtlCol="0" anchor="ctr"/>
-          <a:lstStyle/>
-          <a:p>
-            <a:pPr indent="0" marL="0">
-              <a:buNone/>
-            </a:pPr>
-            <a:r>
-              <a:rPr lang="en-US" sz="1700" b="1" dirty="0">
-                <a:solidFill>
-                  <a:schemeClr val="tx1"/>
-                </a:solidFill>
-              </a:rPr>
-              <a:t>できたらチェック</a:t>
-            </a:r>
-            <a:endParaRPr lang="en-US" sz="1700" dirty="0"/>
-          </a:p>
-        </p:txBody>
-      </p:sp>
-      <p:sp>
-        <p:nvSpPr>
-          <p:cNvPr id="14" name="Text 10"/>
-          <p:cNvSpPr txBox="1"/>
-          <p:nvPr/>
-        </p:nvSpPr>
-        <p:spPr>
-          <a:xfrm>
-            <a:off x="4937760" y="2286000"/>
-            <a:ext cx="3474720" cy="2057400"/>
-          </a:xfrm>
-          <a:prstGeom prst="rect">
-            <a:avLst/>
-          </a:prstGeom>
-          <a:noFill/>
-          <a:ln/>
-        </p:spPr>
-        <p:txBody>
-          <a:bodyPr wrap="square" lIns="0" tIns="0" rIns="0" bIns="0" rtlCol="0" anchor="t"/>
+          <a:bodyPr wrap="square" lIns="0" tIns="0" rIns="0" bIns="0" rtlCol="0" anchor="t">
+            <a:normAutofit/>
+          </a:bodyPr>
           <a:lstStyle/>
           <a:p>
             <a:pPr indent="0" marL="0">
@@ -7653,14 +8003,17 @@
               <a:buNone/>
             </a:pPr>
             <a:r>
-              <a:rPr lang="en-US" sz="1350" dirty="0">
-                <a:solidFill>
-                  <a:schemeClr val="tx1"/>
-                </a:solidFill>
+              <a:rPr lang="ja-JP" altLang="en-US" sz="1350" b="1" dirty="0">
+                <a:solidFill>
+                  <a:srgbClr val="1A1A1A"/>
+                </a:solidFill>
+                <a:latin typeface="Noto Sans JP" pitchFamily="34" charset="0"/>
+                <a:ea typeface="Noto Sans JP" pitchFamily="34" charset="-122"/>
+                <a:cs typeface="Noto Sans JP" pitchFamily="34" charset="-120"/>
               </a:rPr>
               <a:t>☐ Claude Codeでページを作り、修正できた</a:t>
             </a:r>
-            <a:endParaRPr lang="en-US" sz="1350" dirty="0"/>
+            <a:endParaRPr lang="ja-JP" sz="1350" dirty="0"/>
           </a:p>
           <a:p>
             <a:pPr indent="0" marL="0">
@@ -7670,14 +8023,17 @@
               <a:buNone/>
             </a:pPr>
             <a:r>
-              <a:rPr lang="en-US" sz="1350" dirty="0">
-                <a:solidFill>
-                  <a:schemeClr val="tx1"/>
-                </a:solidFill>
+              <a:rPr lang="ja-JP" altLang="en-US" sz="1350" b="1" dirty="0">
+                <a:solidFill>
+                  <a:srgbClr val="1A1A1A"/>
+                </a:solidFill>
+                <a:latin typeface="Noto Sans JP" pitchFamily="34" charset="0"/>
+                <a:ea typeface="Noto Sans JP" pitchFamily="34" charset="-122"/>
+                <a:cs typeface="Noto Sans JP" pitchFamily="34" charset="-120"/>
               </a:rPr>
               <a:t>☐ Gitで記録し、GitHubに保存できた</a:t>
             </a:r>
-            <a:endParaRPr lang="en-US" sz="1350" dirty="0"/>
+            <a:endParaRPr lang="ja-JP" sz="1350" dirty="0"/>
           </a:p>
         </p:txBody>
       </p:sp>
@@ -7693,8 +8049,8 @@
         </p:nvSpPr>
         <p:spPr>
           <a:xfrm>
-            <a:off x="8229600" y="4773168"/>
-            <a:ext cx="365760" cy="228600"/>
+            <a:off x="8366760" y="4754880"/>
+            <a:ext cx="365760" cy="274320"/>
           </a:xfrm>
           <a:prstGeom prst="rect">
             <a:avLst/>
@@ -7706,20 +8062,23 @@
           </a:extLst>
         </p:spPr>
         <p:txBody>
-          <a:bodyPr/>
+          <a:bodyPr anchor="ctr"/>
           <a:lstStyle>
             <a:lvl1pPr>
-              <a:defRPr sz="900">
-                <a:solidFill>
-                  <a:srgbClr val="5A6872"/>
-                </a:solidFill>
+              <a:defRPr sz="850">
+                <a:solidFill>
+                  <a:srgbClr val="FFFFFF"/>
+                </a:solidFill>
+                <a:latin typeface="Noto Sans JP"/>
+                <a:ea typeface="Noto Sans JP"/>
+                <a:cs typeface="Noto Sans JP"/>
               </a:defRPr>
             </a:lvl1pPr>
           </a:lstStyle>
           <a:p>
             <a:pPr algn="r"/>
             <a:fld id="{F7021451-1387-4CA6-816F-3879F97B5CBC}" type="slidenum">
-              <a:rPr b="0" lang="en-US"/>
+              <a:rPr b="1" lang="en-US"/>
               <a:t>9</a:t>
             </a:fld>
             <a:endParaRPr lang="en-US"/>
@@ -7735,9 +8094,9 @@
 </file>
 
 <file path=ppt/theme/theme1.xml><?xml version="1.0" encoding="utf-8"?>
-<a:theme xmlns:a="http://schemas.openxmlformats.org/drawingml/2006/main" name="Manaberu">
+<a:theme xmlns:a="http://schemas.openxmlformats.org/drawingml/2006/main" name="SasaYell">
   <a:themeElements>
-    <a:clrScheme name="Manaberu">
+    <a:clrScheme name="SasaYell">
       <a:dk1>
         <a:srgbClr val="1A1A1A"/>
       </a:dk1>
@@ -7745,10 +8104,10 @@
         <a:srgbClr val="FFFFFF"/>
       </a:lt1>
       <a:dk2>
-        <a:srgbClr val="5A6872"/>
+        <a:srgbClr val="1A1A1A"/>
       </a:dk2>
       <a:lt2>
-        <a:srgbClr val="FFF6CC"/>
+        <a:srgbClr val="FFD600"/>
       </a:lt2>
       <a:accent1>
         <a:srgbClr val="FFD600"/>
@@ -7757,128 +8116,34 @@
         <a:srgbClr val="DD6420"/>
       </a:accent2>
       <a:accent3>
-        <a:srgbClr val="3370FF"/>
+        <a:srgbClr val="F5A623"/>
       </a:accent3>
       <a:accent4>
-        <a:srgbClr val="06C755"/>
+        <a:srgbClr val="1A1A1A"/>
       </a:accent4>
       <a:accent5>
-        <a:srgbClr val="E53935"/>
+        <a:srgbClr val="FFFFFF"/>
       </a:accent5>
       <a:accent6>
-        <a:srgbClr val="F5A623"/>
+        <a:srgbClr val="DD6420"/>
       </a:accent6>
       <a:hlink>
-        <a:srgbClr val="3370FF"/>
+        <a:srgbClr val="DD6420"/>
       </a:hlink>
       <a:folHlink>
-        <a:srgbClr val="6B4FBB"/>
+        <a:srgbClr val="F5A623"/>
       </a:folHlink>
     </a:clrScheme>
-    <a:fontScheme name="Manaberu">
+    <a:fontScheme name="SasaYell">
       <a:majorFont>
-        <a:latin typeface="Yu Gothic"/>
-        <a:ea typeface=""/>
+        <a:latin typeface="Dela Gothic One"/>
+        <a:ea typeface="けいふぉんと"/>
         <a:cs typeface=""/>
-        <a:font script="Jpan" typeface="游ゴシック Light"/>
-        <a:font script="Hang" typeface="맑은 고딕"/>
-        <a:font script="Hans" typeface="等线 Light"/>
-        <a:font script="Hant" typeface="新細明體"/>
-        <a:font script="Arab" typeface="Times New Roman"/>
-        <a:font script="Hebr" typeface="Times New Roman"/>
-        <a:font script="Thai" typeface="Angsana New"/>
-        <a:font script="Ethi" typeface="Nyala"/>
-        <a:font script="Beng" typeface="Vrinda"/>
-        <a:font script="Gujr" typeface="Shruti"/>
-        <a:font script="Khmr" typeface="MoolBoran"/>
-        <a:font script="Knda" typeface="Tunga"/>
-        <a:font script="Guru" typeface="Raavi"/>
-        <a:font script="Cans" typeface="Euphemia"/>
-        <a:font script="Cher" typeface="Plantagenet Cherokee"/>
-        <a:font script="Yiii" typeface="Microsoft Yi Baiti"/>
-        <a:font script="Tibt" typeface="Microsoft Himalaya"/>
-        <a:font script="Thaa" typeface="MV Boli"/>
-        <a:font script="Deva" typeface="Mangal"/>
-        <a:font script="Telu" typeface="Gautami"/>
-        <a:font script="Taml" typeface="Latha"/>
-        <a:font script="Syrc" typeface="Estrangelo Edessa"/>
-        <a:font script="Orya" typeface="Kalinga"/>
-        <a:font script="Mlym" typeface="Kartika"/>
-        <a:font script="Laoo" typeface="DokChampa"/>
-        <a:font script="Sinh" typeface="Iskoola Pota"/>
-        <a:font script="Mong" typeface="Mongolian Baiti"/>
-        <a:font script="Viet" typeface="Times New Roman"/>
-        <a:font script="Uigh" typeface="Microsoft Uighur"/>
-        <a:font script="Geor" typeface="Sylfaen"/>
-        <a:font script="Armn" typeface="Arial"/>
-        <a:font script="Bugi" typeface="Leelawadee UI"/>
-        <a:font script="Bopo" typeface="Microsoft JhengHei"/>
-        <a:font script="Java" typeface="Javanese Text"/>
-        <a:font script="Lisu" typeface="Segoe UI"/>
-        <a:font script="Mymr" typeface="Myanmar Text"/>
-        <a:font script="Nkoo" typeface="Ebrima"/>
-        <a:font script="Olck" typeface="Nirmala UI"/>
-        <a:font script="Osma" typeface="Ebrima"/>
-        <a:font script="Phag" typeface="Phagspa"/>
-        <a:font script="Syrn" typeface="Estrangelo Edessa"/>
-        <a:font script="Syrj" typeface="Estrangelo Edessa"/>
-        <a:font script="Syre" typeface="Estrangelo Edessa"/>
-        <a:font script="Sora" typeface="Nirmala UI"/>
-        <a:font script="Tale" typeface="Microsoft Tai Le"/>
-        <a:font script="Talu" typeface="Microsoft New Tai Lue"/>
-        <a:font script="Tfng" typeface="Ebrima"/>
       </a:majorFont>
       <a:minorFont>
-        <a:latin typeface="Yu Gothic"/>
-        <a:ea typeface=""/>
+        <a:latin typeface="Noto Sans JP"/>
+        <a:ea typeface="Noto Sans JP"/>
         <a:cs typeface=""/>
-        <a:font script="Jpan" typeface="游ゴシック"/>
-        <a:font script="Hang" typeface="맑은 고딕"/>
-        <a:font script="Hans" typeface="等线"/>
-        <a:font script="Hant" typeface="新細明體"/>
-        <a:font script="Arab" typeface="Arial"/>
-        <a:font script="Hebr" typeface="Arial"/>
-        <a:font script="Thai" typeface="Cordia New"/>
-        <a:font script="Ethi" typeface="Nyala"/>
-        <a:font script="Beng" typeface="Vrinda"/>
-        <a:font script="Gujr" typeface="Shruti"/>
-        <a:font script="Khmr" typeface="DaunPenh"/>
-        <a:font script="Knda" typeface="Tunga"/>
-        <a:font script="Guru" typeface="Raavi"/>
-        <a:font script="Cans" typeface="Euphemia"/>
-        <a:font script="Cher" typeface="Plantagenet Cherokee"/>
-        <a:font script="Yiii" typeface="Microsoft Yi Baiti"/>
-        <a:font script="Tibt" typeface="Microsoft Himalaya"/>
-        <a:font script="Thaa" typeface="MV Boli"/>
-        <a:font script="Deva" typeface="Mangal"/>
-        <a:font script="Telu" typeface="Gautami"/>
-        <a:font script="Taml" typeface="Latha"/>
-        <a:font script="Syrc" typeface="Estrangelo Edessa"/>
-        <a:font script="Orya" typeface="Kalinga"/>
-        <a:font script="Mlym" typeface="Kartika"/>
-        <a:font script="Laoo" typeface="DokChampa"/>
-        <a:font script="Sinh" typeface="Iskoola Pota"/>
-        <a:font script="Mong" typeface="Mongolian Baiti"/>
-        <a:font script="Viet" typeface="Arial"/>
-        <a:font script="Uigh" typeface="Microsoft Uighur"/>
-        <a:font script="Geor" typeface="Sylfaen"/>
-        <a:font script="Armn" typeface="Arial"/>
-        <a:font script="Bugi" typeface="Leelawadee UI"/>
-        <a:font script="Bopo" typeface="Microsoft JhengHei"/>
-        <a:font script="Java" typeface="Javanese Text"/>
-        <a:font script="Lisu" typeface="Segoe UI"/>
-        <a:font script="Mymr" typeface="Myanmar Text"/>
-        <a:font script="Nkoo" typeface="Ebrima"/>
-        <a:font script="Olck" typeface="Nirmala UI"/>
-        <a:font script="Osma" typeface="Ebrima"/>
-        <a:font script="Phag" typeface="Phagspa"/>
-        <a:font script="Syrn" typeface="Estrangelo Edessa"/>
-        <a:font script="Syrj" typeface="Estrangelo Edessa"/>
-        <a:font script="Syre" typeface="Estrangelo Edessa"/>
-        <a:font script="Sora" typeface="Nirmala UI"/>
-        <a:font script="Tale" typeface="Microsoft Tai Le"/>
-        <a:font script="Talu" typeface="Microsoft New Tai Lue"/>
-        <a:font script="Tfng" typeface="Ebrima"/>
       </a:minorFont>
     </a:fontScheme>
     <a:fmtScheme name="Office">
